--- a/ppt/1. selasa/1. matematika.pptx
+++ b/ppt/1. selasa/1. matematika.pptx
@@ -5,7 +5,7 @@
     <p:sldMasterId id="2147483648" r:id="rId1"/>
   </p:sldMasterIdLst>
   <p:notesMasterIdLst>
-    <p:notesMasterId r:id="rId7"/>
+    <p:notesMasterId r:id="rId33"/>
   </p:notesMasterIdLst>
   <p:sldIdLst>
     <p:sldId id="256" r:id="rId2"/>
@@ -13,6 +13,32 @@
     <p:sldId id="258" r:id="rId4"/>
     <p:sldId id="259" r:id="rId5"/>
     <p:sldId id="260" r:id="rId6"/>
+    <p:sldId id="261" r:id="rId7"/>
+    <p:sldId id="262" r:id="rId8"/>
+    <p:sldId id="263" r:id="rId9"/>
+    <p:sldId id="264" r:id="rId10"/>
+    <p:sldId id="265" r:id="rId11"/>
+    <p:sldId id="266" r:id="rId12"/>
+    <p:sldId id="267" r:id="rId13"/>
+    <p:sldId id="268" r:id="rId14"/>
+    <p:sldId id="269" r:id="rId15"/>
+    <p:sldId id="270" r:id="rId16"/>
+    <p:sldId id="271" r:id="rId17"/>
+    <p:sldId id="272" r:id="rId18"/>
+    <p:sldId id="273" r:id="rId19"/>
+    <p:sldId id="274" r:id="rId20"/>
+    <p:sldId id="275" r:id="rId21"/>
+    <p:sldId id="276" r:id="rId22"/>
+    <p:sldId id="277" r:id="rId23"/>
+    <p:sldId id="278" r:id="rId24"/>
+    <p:sldId id="279" r:id="rId25"/>
+    <p:sldId id="280" r:id="rId26"/>
+    <p:sldId id="281" r:id="rId27"/>
+    <p:sldId id="282" r:id="rId28"/>
+    <p:sldId id="283" r:id="rId29"/>
+    <p:sldId id="284" r:id="rId30"/>
+    <p:sldId id="285" r:id="rId31"/>
+    <p:sldId id="286" r:id="rId32"/>
   </p:sldIdLst>
   <p:sldSz cx="12192000" cy="6858000"/>
   <p:notesSz cx="6858000" cy="9144000"/>
@@ -111,6 +137,11 @@
       </a:defRPr>
     </a:lvl9pPr>
   </p:defaultTextStyle>
+  <p:extLst>
+    <p:ext uri="{EFAFB233-063F-42B5-8137-9DF3F51BA10A}">
+      <p15:sldGuideLst xmlns:p15="http://schemas.microsoft.com/office/powerpoint/2012/main"/>
+    </p:ext>
+  </p:extLst>
 </p:presentation>
 </file>
 
@@ -538,6 +569,2190 @@
     <p:extLst>
       <p:ext uri="{BB962C8B-B14F-4D97-AF65-F5344CB8AC3E}">
         <p14:creationId xmlns:p14="http://schemas.microsoft.com/office/powerpoint/2010/main" val="2662230714"/>
+      </p:ext>
+    </p:extLst>
+  </p:cSld>
+  <p:clrMapOvr>
+    <a:masterClrMapping/>
+  </p:clrMapOvr>
+</p:notes>
+</file>
+
+<file path=ppt/notesSlides/notesSlide10.xml><?xml version="1.0" encoding="utf-8"?>
+<p:notes xmlns:a="http://schemas.openxmlformats.org/drawingml/2006/main" xmlns:r="http://schemas.openxmlformats.org/officeDocument/2006/relationships" xmlns:p="http://schemas.openxmlformats.org/presentationml/2006/main">
+  <p:cSld>
+    <p:spTree>
+      <p:nvGrpSpPr>
+        <p:cNvPr id="1" name=""/>
+        <p:cNvGrpSpPr/>
+        <p:nvPr/>
+      </p:nvGrpSpPr>
+      <p:grpSpPr>
+        <a:xfrm>
+          <a:off x="0" y="0"/>
+          <a:ext cx="0" cy="0"/>
+          <a:chOff x="0" y="0"/>
+          <a:chExt cx="0" cy="0"/>
+        </a:xfrm>
+      </p:grpSpPr>
+      <p:sp>
+        <p:nvSpPr>
+          <p:cNvPr id="2" name="Slide Image Placeholder 1"/>
+          <p:cNvSpPr>
+            <a:spLocks noGrp="1" noRot="1" noChangeAspect="1"/>
+          </p:cNvSpPr>
+          <p:nvPr>
+            <p:ph type="sldImg"/>
+          </p:nvPr>
+        </p:nvSpPr>
+        <p:spPr/>
+      </p:sp>
+      <p:sp>
+        <p:nvSpPr>
+          <p:cNvPr id="3" name="Notes Placeholder 2"/>
+          <p:cNvSpPr>
+            <a:spLocks noGrp="1"/>
+          </p:cNvSpPr>
+          <p:nvPr>
+            <p:ph type="body" idx="1"/>
+          </p:nvPr>
+        </p:nvSpPr>
+        <p:spPr/>
+        <p:txBody>
+          <a:bodyPr/>
+          <a:lstStyle/>
+          <a:p>
+            <a:endParaRPr lang="en-US" dirty="0"/>
+          </a:p>
+        </p:txBody>
+      </p:sp>
+      <p:sp>
+        <p:nvSpPr>
+          <p:cNvPr id="4" name="Slide Number Placeholder 3"/>
+          <p:cNvSpPr>
+            <a:spLocks noGrp="1"/>
+          </p:cNvSpPr>
+          <p:nvPr>
+            <p:ph type="sldNum" sz="quarter" idx="5"/>
+          </p:nvPr>
+        </p:nvSpPr>
+        <p:spPr/>
+        <p:txBody>
+          <a:bodyPr/>
+          <a:lstStyle/>
+          <a:p>
+            <a:fld id="{6C000152-5583-4B4B-A72B-EFD48442328A}" type="slidenum">
+              <a:rPr lang="en-US" smtClean="0"/>
+              <a:t>14</a:t>
+            </a:fld>
+            <a:endParaRPr lang="en-US"/>
+          </a:p>
+        </p:txBody>
+      </p:sp>
+    </p:spTree>
+    <p:extLst>
+      <p:ext uri="{BB962C8B-B14F-4D97-AF65-F5344CB8AC3E}">
+        <p14:creationId xmlns:p14="http://schemas.microsoft.com/office/powerpoint/2010/main" val="3763338515"/>
+      </p:ext>
+    </p:extLst>
+  </p:cSld>
+  <p:clrMapOvr>
+    <a:masterClrMapping/>
+  </p:clrMapOvr>
+</p:notes>
+</file>
+
+<file path=ppt/notesSlides/notesSlide11.xml><?xml version="1.0" encoding="utf-8"?>
+<p:notes xmlns:a="http://schemas.openxmlformats.org/drawingml/2006/main" xmlns:r="http://schemas.openxmlformats.org/officeDocument/2006/relationships" xmlns:p="http://schemas.openxmlformats.org/presentationml/2006/main">
+  <p:cSld>
+    <p:spTree>
+      <p:nvGrpSpPr>
+        <p:cNvPr id="1" name=""/>
+        <p:cNvGrpSpPr/>
+        <p:nvPr/>
+      </p:nvGrpSpPr>
+      <p:grpSpPr>
+        <a:xfrm>
+          <a:off x="0" y="0"/>
+          <a:ext cx="0" cy="0"/>
+          <a:chOff x="0" y="0"/>
+          <a:chExt cx="0" cy="0"/>
+        </a:xfrm>
+      </p:grpSpPr>
+      <p:sp>
+        <p:nvSpPr>
+          <p:cNvPr id="2" name="Slide Image Placeholder 1"/>
+          <p:cNvSpPr>
+            <a:spLocks noGrp="1" noRot="1" noChangeAspect="1"/>
+          </p:cNvSpPr>
+          <p:nvPr>
+            <p:ph type="sldImg"/>
+          </p:nvPr>
+        </p:nvSpPr>
+        <p:spPr/>
+      </p:sp>
+      <p:sp>
+        <p:nvSpPr>
+          <p:cNvPr id="3" name="Notes Placeholder 2"/>
+          <p:cNvSpPr>
+            <a:spLocks noGrp="1"/>
+          </p:cNvSpPr>
+          <p:nvPr>
+            <p:ph type="body" idx="1"/>
+          </p:nvPr>
+        </p:nvSpPr>
+        <p:spPr/>
+        <p:txBody>
+          <a:bodyPr/>
+          <a:lstStyle/>
+          <a:p>
+            <a:endParaRPr lang="en-US" dirty="0"/>
+          </a:p>
+        </p:txBody>
+      </p:sp>
+      <p:sp>
+        <p:nvSpPr>
+          <p:cNvPr id="4" name="Slide Number Placeholder 3"/>
+          <p:cNvSpPr>
+            <a:spLocks noGrp="1"/>
+          </p:cNvSpPr>
+          <p:nvPr>
+            <p:ph type="sldNum" sz="quarter" idx="5"/>
+          </p:nvPr>
+        </p:nvSpPr>
+        <p:spPr/>
+        <p:txBody>
+          <a:bodyPr/>
+          <a:lstStyle/>
+          <a:p>
+            <a:fld id="{6C000152-5583-4B4B-A72B-EFD48442328A}" type="slidenum">
+              <a:rPr lang="en-US" smtClean="0"/>
+              <a:t>15</a:t>
+            </a:fld>
+            <a:endParaRPr lang="en-US"/>
+          </a:p>
+        </p:txBody>
+      </p:sp>
+    </p:spTree>
+    <p:extLst>
+      <p:ext uri="{BB962C8B-B14F-4D97-AF65-F5344CB8AC3E}">
+        <p14:creationId xmlns:p14="http://schemas.microsoft.com/office/powerpoint/2010/main" val="2902991385"/>
+      </p:ext>
+    </p:extLst>
+  </p:cSld>
+  <p:clrMapOvr>
+    <a:masterClrMapping/>
+  </p:clrMapOvr>
+</p:notes>
+</file>
+
+<file path=ppt/notesSlides/notesSlide12.xml><?xml version="1.0" encoding="utf-8"?>
+<p:notes xmlns:a="http://schemas.openxmlformats.org/drawingml/2006/main" xmlns:r="http://schemas.openxmlformats.org/officeDocument/2006/relationships" xmlns:p="http://schemas.openxmlformats.org/presentationml/2006/main">
+  <p:cSld>
+    <p:spTree>
+      <p:nvGrpSpPr>
+        <p:cNvPr id="1" name=""/>
+        <p:cNvGrpSpPr/>
+        <p:nvPr/>
+      </p:nvGrpSpPr>
+      <p:grpSpPr>
+        <a:xfrm>
+          <a:off x="0" y="0"/>
+          <a:ext cx="0" cy="0"/>
+          <a:chOff x="0" y="0"/>
+          <a:chExt cx="0" cy="0"/>
+        </a:xfrm>
+      </p:grpSpPr>
+      <p:sp>
+        <p:nvSpPr>
+          <p:cNvPr id="2" name="Slide Image Placeholder 1"/>
+          <p:cNvSpPr>
+            <a:spLocks noGrp="1" noRot="1" noChangeAspect="1"/>
+          </p:cNvSpPr>
+          <p:nvPr>
+            <p:ph type="sldImg"/>
+          </p:nvPr>
+        </p:nvSpPr>
+        <p:spPr/>
+      </p:sp>
+      <p:sp>
+        <p:nvSpPr>
+          <p:cNvPr id="3" name="Notes Placeholder 2"/>
+          <p:cNvSpPr>
+            <a:spLocks noGrp="1"/>
+          </p:cNvSpPr>
+          <p:nvPr>
+            <p:ph type="body" idx="1"/>
+          </p:nvPr>
+        </p:nvSpPr>
+        <p:spPr/>
+        <p:txBody>
+          <a:bodyPr/>
+          <a:lstStyle/>
+          <a:p>
+            <a:endParaRPr lang="en-US" dirty="0"/>
+          </a:p>
+        </p:txBody>
+      </p:sp>
+      <p:sp>
+        <p:nvSpPr>
+          <p:cNvPr id="4" name="Slide Number Placeholder 3"/>
+          <p:cNvSpPr>
+            <a:spLocks noGrp="1"/>
+          </p:cNvSpPr>
+          <p:nvPr>
+            <p:ph type="sldNum" sz="quarter" idx="5"/>
+          </p:nvPr>
+        </p:nvSpPr>
+        <p:spPr/>
+        <p:txBody>
+          <a:bodyPr/>
+          <a:lstStyle/>
+          <a:p>
+            <a:fld id="{6C000152-5583-4B4B-A72B-EFD48442328A}" type="slidenum">
+              <a:rPr lang="en-US" smtClean="0"/>
+              <a:t>16</a:t>
+            </a:fld>
+            <a:endParaRPr lang="en-US"/>
+          </a:p>
+        </p:txBody>
+      </p:sp>
+    </p:spTree>
+    <p:extLst>
+      <p:ext uri="{BB962C8B-B14F-4D97-AF65-F5344CB8AC3E}">
+        <p14:creationId xmlns:p14="http://schemas.microsoft.com/office/powerpoint/2010/main" val="3980924962"/>
+      </p:ext>
+    </p:extLst>
+  </p:cSld>
+  <p:clrMapOvr>
+    <a:masterClrMapping/>
+  </p:clrMapOvr>
+</p:notes>
+</file>
+
+<file path=ppt/notesSlides/notesSlide13.xml><?xml version="1.0" encoding="utf-8"?>
+<p:notes xmlns:a="http://schemas.openxmlformats.org/drawingml/2006/main" xmlns:r="http://schemas.openxmlformats.org/officeDocument/2006/relationships" xmlns:p="http://schemas.openxmlformats.org/presentationml/2006/main">
+  <p:cSld>
+    <p:spTree>
+      <p:nvGrpSpPr>
+        <p:cNvPr id="1" name=""/>
+        <p:cNvGrpSpPr/>
+        <p:nvPr/>
+      </p:nvGrpSpPr>
+      <p:grpSpPr>
+        <a:xfrm>
+          <a:off x="0" y="0"/>
+          <a:ext cx="0" cy="0"/>
+          <a:chOff x="0" y="0"/>
+          <a:chExt cx="0" cy="0"/>
+        </a:xfrm>
+      </p:grpSpPr>
+      <p:sp>
+        <p:nvSpPr>
+          <p:cNvPr id="2" name="Slide Image Placeholder 1"/>
+          <p:cNvSpPr>
+            <a:spLocks noGrp="1" noRot="1" noChangeAspect="1"/>
+          </p:cNvSpPr>
+          <p:nvPr>
+            <p:ph type="sldImg"/>
+          </p:nvPr>
+        </p:nvSpPr>
+        <p:spPr/>
+      </p:sp>
+      <p:sp>
+        <p:nvSpPr>
+          <p:cNvPr id="3" name="Notes Placeholder 2"/>
+          <p:cNvSpPr>
+            <a:spLocks noGrp="1"/>
+          </p:cNvSpPr>
+          <p:nvPr>
+            <p:ph type="body" idx="1"/>
+          </p:nvPr>
+        </p:nvSpPr>
+        <p:spPr/>
+        <p:txBody>
+          <a:bodyPr/>
+          <a:lstStyle/>
+          <a:p>
+            <a:endParaRPr lang="en-US" dirty="0"/>
+          </a:p>
+        </p:txBody>
+      </p:sp>
+      <p:sp>
+        <p:nvSpPr>
+          <p:cNvPr id="4" name="Slide Number Placeholder 3"/>
+          <p:cNvSpPr>
+            <a:spLocks noGrp="1"/>
+          </p:cNvSpPr>
+          <p:nvPr>
+            <p:ph type="sldNum" sz="quarter" idx="5"/>
+          </p:nvPr>
+        </p:nvSpPr>
+        <p:spPr/>
+        <p:txBody>
+          <a:bodyPr/>
+          <a:lstStyle/>
+          <a:p>
+            <a:fld id="{6C000152-5583-4B4B-A72B-EFD48442328A}" type="slidenum">
+              <a:rPr lang="en-US" smtClean="0"/>
+              <a:t>17</a:t>
+            </a:fld>
+            <a:endParaRPr lang="en-US"/>
+          </a:p>
+        </p:txBody>
+      </p:sp>
+    </p:spTree>
+    <p:extLst>
+      <p:ext uri="{BB962C8B-B14F-4D97-AF65-F5344CB8AC3E}">
+        <p14:creationId xmlns:p14="http://schemas.microsoft.com/office/powerpoint/2010/main" val="404074920"/>
+      </p:ext>
+    </p:extLst>
+  </p:cSld>
+  <p:clrMapOvr>
+    <a:masterClrMapping/>
+  </p:clrMapOvr>
+</p:notes>
+</file>
+
+<file path=ppt/notesSlides/notesSlide14.xml><?xml version="1.0" encoding="utf-8"?>
+<p:notes xmlns:a="http://schemas.openxmlformats.org/drawingml/2006/main" xmlns:r="http://schemas.openxmlformats.org/officeDocument/2006/relationships" xmlns:p="http://schemas.openxmlformats.org/presentationml/2006/main">
+  <p:cSld>
+    <p:spTree>
+      <p:nvGrpSpPr>
+        <p:cNvPr id="1" name=""/>
+        <p:cNvGrpSpPr/>
+        <p:nvPr/>
+      </p:nvGrpSpPr>
+      <p:grpSpPr>
+        <a:xfrm>
+          <a:off x="0" y="0"/>
+          <a:ext cx="0" cy="0"/>
+          <a:chOff x="0" y="0"/>
+          <a:chExt cx="0" cy="0"/>
+        </a:xfrm>
+      </p:grpSpPr>
+      <p:sp>
+        <p:nvSpPr>
+          <p:cNvPr id="2" name="Slide Image Placeholder 1"/>
+          <p:cNvSpPr>
+            <a:spLocks noGrp="1" noRot="1" noChangeAspect="1"/>
+          </p:cNvSpPr>
+          <p:nvPr>
+            <p:ph type="sldImg"/>
+          </p:nvPr>
+        </p:nvSpPr>
+        <p:spPr/>
+      </p:sp>
+      <p:sp>
+        <p:nvSpPr>
+          <p:cNvPr id="3" name="Notes Placeholder 2"/>
+          <p:cNvSpPr>
+            <a:spLocks noGrp="1"/>
+          </p:cNvSpPr>
+          <p:nvPr>
+            <p:ph type="body" idx="1"/>
+          </p:nvPr>
+        </p:nvSpPr>
+        <p:spPr/>
+        <p:txBody>
+          <a:bodyPr/>
+          <a:lstStyle/>
+          <a:p>
+            <a:endParaRPr lang="en-US" dirty="0"/>
+          </a:p>
+        </p:txBody>
+      </p:sp>
+      <p:sp>
+        <p:nvSpPr>
+          <p:cNvPr id="4" name="Slide Number Placeholder 3"/>
+          <p:cNvSpPr>
+            <a:spLocks noGrp="1"/>
+          </p:cNvSpPr>
+          <p:nvPr>
+            <p:ph type="sldNum" sz="quarter" idx="5"/>
+          </p:nvPr>
+        </p:nvSpPr>
+        <p:spPr/>
+        <p:txBody>
+          <a:bodyPr/>
+          <a:lstStyle/>
+          <a:p>
+            <a:fld id="{6C000152-5583-4B4B-A72B-EFD48442328A}" type="slidenum">
+              <a:rPr lang="en-US" smtClean="0"/>
+              <a:t>18</a:t>
+            </a:fld>
+            <a:endParaRPr lang="en-US"/>
+          </a:p>
+        </p:txBody>
+      </p:sp>
+    </p:spTree>
+    <p:extLst>
+      <p:ext uri="{BB962C8B-B14F-4D97-AF65-F5344CB8AC3E}">
+        <p14:creationId xmlns:p14="http://schemas.microsoft.com/office/powerpoint/2010/main" val="836629462"/>
+      </p:ext>
+    </p:extLst>
+  </p:cSld>
+  <p:clrMapOvr>
+    <a:masterClrMapping/>
+  </p:clrMapOvr>
+</p:notes>
+</file>
+
+<file path=ppt/notesSlides/notesSlide15.xml><?xml version="1.0" encoding="utf-8"?>
+<p:notes xmlns:a="http://schemas.openxmlformats.org/drawingml/2006/main" xmlns:r="http://schemas.openxmlformats.org/officeDocument/2006/relationships" xmlns:p="http://schemas.openxmlformats.org/presentationml/2006/main">
+  <p:cSld>
+    <p:spTree>
+      <p:nvGrpSpPr>
+        <p:cNvPr id="1" name=""/>
+        <p:cNvGrpSpPr/>
+        <p:nvPr/>
+      </p:nvGrpSpPr>
+      <p:grpSpPr>
+        <a:xfrm>
+          <a:off x="0" y="0"/>
+          <a:ext cx="0" cy="0"/>
+          <a:chOff x="0" y="0"/>
+          <a:chExt cx="0" cy="0"/>
+        </a:xfrm>
+      </p:grpSpPr>
+      <p:sp>
+        <p:nvSpPr>
+          <p:cNvPr id="2" name="Slide Image Placeholder 1"/>
+          <p:cNvSpPr>
+            <a:spLocks noGrp="1" noRot="1" noChangeAspect="1"/>
+          </p:cNvSpPr>
+          <p:nvPr>
+            <p:ph type="sldImg"/>
+          </p:nvPr>
+        </p:nvSpPr>
+        <p:spPr/>
+      </p:sp>
+      <p:sp>
+        <p:nvSpPr>
+          <p:cNvPr id="3" name="Notes Placeholder 2"/>
+          <p:cNvSpPr>
+            <a:spLocks noGrp="1"/>
+          </p:cNvSpPr>
+          <p:nvPr>
+            <p:ph type="body" idx="1"/>
+          </p:nvPr>
+        </p:nvSpPr>
+        <p:spPr/>
+        <p:txBody>
+          <a:bodyPr/>
+          <a:lstStyle/>
+          <a:p>
+            <a:endParaRPr lang="en-US" dirty="0"/>
+          </a:p>
+        </p:txBody>
+      </p:sp>
+      <p:sp>
+        <p:nvSpPr>
+          <p:cNvPr id="4" name="Slide Number Placeholder 3"/>
+          <p:cNvSpPr>
+            <a:spLocks noGrp="1"/>
+          </p:cNvSpPr>
+          <p:nvPr>
+            <p:ph type="sldNum" sz="quarter" idx="5"/>
+          </p:nvPr>
+        </p:nvSpPr>
+        <p:spPr/>
+        <p:txBody>
+          <a:bodyPr/>
+          <a:lstStyle/>
+          <a:p>
+            <a:fld id="{6C000152-5583-4B4B-A72B-EFD48442328A}" type="slidenum">
+              <a:rPr lang="en-US" smtClean="0"/>
+              <a:t>19</a:t>
+            </a:fld>
+            <a:endParaRPr lang="en-US"/>
+          </a:p>
+        </p:txBody>
+      </p:sp>
+    </p:spTree>
+    <p:extLst>
+      <p:ext uri="{BB962C8B-B14F-4D97-AF65-F5344CB8AC3E}">
+        <p14:creationId xmlns:p14="http://schemas.microsoft.com/office/powerpoint/2010/main" val="66597288"/>
+      </p:ext>
+    </p:extLst>
+  </p:cSld>
+  <p:clrMapOvr>
+    <a:masterClrMapping/>
+  </p:clrMapOvr>
+</p:notes>
+</file>
+
+<file path=ppt/notesSlides/notesSlide16.xml><?xml version="1.0" encoding="utf-8"?>
+<p:notes xmlns:a="http://schemas.openxmlformats.org/drawingml/2006/main" xmlns:r="http://schemas.openxmlformats.org/officeDocument/2006/relationships" xmlns:p="http://schemas.openxmlformats.org/presentationml/2006/main">
+  <p:cSld>
+    <p:spTree>
+      <p:nvGrpSpPr>
+        <p:cNvPr id="1" name=""/>
+        <p:cNvGrpSpPr/>
+        <p:nvPr/>
+      </p:nvGrpSpPr>
+      <p:grpSpPr>
+        <a:xfrm>
+          <a:off x="0" y="0"/>
+          <a:ext cx="0" cy="0"/>
+          <a:chOff x="0" y="0"/>
+          <a:chExt cx="0" cy="0"/>
+        </a:xfrm>
+      </p:grpSpPr>
+      <p:sp>
+        <p:nvSpPr>
+          <p:cNvPr id="2" name="Slide Image Placeholder 1"/>
+          <p:cNvSpPr>
+            <a:spLocks noGrp="1" noRot="1" noChangeAspect="1"/>
+          </p:cNvSpPr>
+          <p:nvPr>
+            <p:ph type="sldImg"/>
+          </p:nvPr>
+        </p:nvSpPr>
+        <p:spPr/>
+      </p:sp>
+      <p:sp>
+        <p:nvSpPr>
+          <p:cNvPr id="3" name="Notes Placeholder 2"/>
+          <p:cNvSpPr>
+            <a:spLocks noGrp="1"/>
+          </p:cNvSpPr>
+          <p:nvPr>
+            <p:ph type="body" idx="1"/>
+          </p:nvPr>
+        </p:nvSpPr>
+        <p:spPr/>
+        <p:txBody>
+          <a:bodyPr/>
+          <a:lstStyle/>
+          <a:p>
+            <a:endParaRPr lang="en-US" dirty="0"/>
+          </a:p>
+        </p:txBody>
+      </p:sp>
+      <p:sp>
+        <p:nvSpPr>
+          <p:cNvPr id="4" name="Slide Number Placeholder 3"/>
+          <p:cNvSpPr>
+            <a:spLocks noGrp="1"/>
+          </p:cNvSpPr>
+          <p:nvPr>
+            <p:ph type="sldNum" sz="quarter" idx="5"/>
+          </p:nvPr>
+        </p:nvSpPr>
+        <p:spPr/>
+        <p:txBody>
+          <a:bodyPr/>
+          <a:lstStyle/>
+          <a:p>
+            <a:fld id="{6C000152-5583-4B4B-A72B-EFD48442328A}" type="slidenum">
+              <a:rPr lang="en-US" smtClean="0"/>
+              <a:t>20</a:t>
+            </a:fld>
+            <a:endParaRPr lang="en-US"/>
+          </a:p>
+        </p:txBody>
+      </p:sp>
+    </p:spTree>
+    <p:extLst>
+      <p:ext uri="{BB962C8B-B14F-4D97-AF65-F5344CB8AC3E}">
+        <p14:creationId xmlns:p14="http://schemas.microsoft.com/office/powerpoint/2010/main" val="238923238"/>
+      </p:ext>
+    </p:extLst>
+  </p:cSld>
+  <p:clrMapOvr>
+    <a:masterClrMapping/>
+  </p:clrMapOvr>
+</p:notes>
+</file>
+
+<file path=ppt/notesSlides/notesSlide17.xml><?xml version="1.0" encoding="utf-8"?>
+<p:notes xmlns:a="http://schemas.openxmlformats.org/drawingml/2006/main" xmlns:r="http://schemas.openxmlformats.org/officeDocument/2006/relationships" xmlns:p="http://schemas.openxmlformats.org/presentationml/2006/main">
+  <p:cSld>
+    <p:spTree>
+      <p:nvGrpSpPr>
+        <p:cNvPr id="1" name=""/>
+        <p:cNvGrpSpPr/>
+        <p:nvPr/>
+      </p:nvGrpSpPr>
+      <p:grpSpPr>
+        <a:xfrm>
+          <a:off x="0" y="0"/>
+          <a:ext cx="0" cy="0"/>
+          <a:chOff x="0" y="0"/>
+          <a:chExt cx="0" cy="0"/>
+        </a:xfrm>
+      </p:grpSpPr>
+      <p:sp>
+        <p:nvSpPr>
+          <p:cNvPr id="2" name="Slide Image Placeholder 1"/>
+          <p:cNvSpPr>
+            <a:spLocks noGrp="1" noRot="1" noChangeAspect="1"/>
+          </p:cNvSpPr>
+          <p:nvPr>
+            <p:ph type="sldImg"/>
+          </p:nvPr>
+        </p:nvSpPr>
+        <p:spPr/>
+      </p:sp>
+      <p:sp>
+        <p:nvSpPr>
+          <p:cNvPr id="3" name="Notes Placeholder 2"/>
+          <p:cNvSpPr>
+            <a:spLocks noGrp="1"/>
+          </p:cNvSpPr>
+          <p:nvPr>
+            <p:ph type="body" idx="1"/>
+          </p:nvPr>
+        </p:nvSpPr>
+        <p:spPr/>
+        <p:txBody>
+          <a:bodyPr/>
+          <a:lstStyle/>
+          <a:p>
+            <a:endParaRPr lang="en-US" dirty="0"/>
+          </a:p>
+        </p:txBody>
+      </p:sp>
+      <p:sp>
+        <p:nvSpPr>
+          <p:cNvPr id="4" name="Slide Number Placeholder 3"/>
+          <p:cNvSpPr>
+            <a:spLocks noGrp="1"/>
+          </p:cNvSpPr>
+          <p:nvPr>
+            <p:ph type="sldNum" sz="quarter" idx="5"/>
+          </p:nvPr>
+        </p:nvSpPr>
+        <p:spPr/>
+        <p:txBody>
+          <a:bodyPr/>
+          <a:lstStyle/>
+          <a:p>
+            <a:fld id="{6C000152-5583-4B4B-A72B-EFD48442328A}" type="slidenum">
+              <a:rPr lang="en-US" smtClean="0"/>
+              <a:t>21</a:t>
+            </a:fld>
+            <a:endParaRPr lang="en-US"/>
+          </a:p>
+        </p:txBody>
+      </p:sp>
+    </p:spTree>
+    <p:extLst>
+      <p:ext uri="{BB962C8B-B14F-4D97-AF65-F5344CB8AC3E}">
+        <p14:creationId xmlns:p14="http://schemas.microsoft.com/office/powerpoint/2010/main" val="569249575"/>
+      </p:ext>
+    </p:extLst>
+  </p:cSld>
+  <p:clrMapOvr>
+    <a:masterClrMapping/>
+  </p:clrMapOvr>
+</p:notes>
+</file>
+
+<file path=ppt/notesSlides/notesSlide18.xml><?xml version="1.0" encoding="utf-8"?>
+<p:notes xmlns:a="http://schemas.openxmlformats.org/drawingml/2006/main" xmlns:r="http://schemas.openxmlformats.org/officeDocument/2006/relationships" xmlns:p="http://schemas.openxmlformats.org/presentationml/2006/main">
+  <p:cSld>
+    <p:spTree>
+      <p:nvGrpSpPr>
+        <p:cNvPr id="1" name=""/>
+        <p:cNvGrpSpPr/>
+        <p:nvPr/>
+      </p:nvGrpSpPr>
+      <p:grpSpPr>
+        <a:xfrm>
+          <a:off x="0" y="0"/>
+          <a:ext cx="0" cy="0"/>
+          <a:chOff x="0" y="0"/>
+          <a:chExt cx="0" cy="0"/>
+        </a:xfrm>
+      </p:grpSpPr>
+      <p:sp>
+        <p:nvSpPr>
+          <p:cNvPr id="2" name="Slide Image Placeholder 1"/>
+          <p:cNvSpPr>
+            <a:spLocks noGrp="1" noRot="1" noChangeAspect="1"/>
+          </p:cNvSpPr>
+          <p:nvPr>
+            <p:ph type="sldImg"/>
+          </p:nvPr>
+        </p:nvSpPr>
+        <p:spPr/>
+      </p:sp>
+      <p:sp>
+        <p:nvSpPr>
+          <p:cNvPr id="3" name="Notes Placeholder 2"/>
+          <p:cNvSpPr>
+            <a:spLocks noGrp="1"/>
+          </p:cNvSpPr>
+          <p:nvPr>
+            <p:ph type="body" idx="1"/>
+          </p:nvPr>
+        </p:nvSpPr>
+        <p:spPr/>
+        <p:txBody>
+          <a:bodyPr/>
+          <a:lstStyle/>
+          <a:p>
+            <a:endParaRPr lang="en-US" dirty="0"/>
+          </a:p>
+        </p:txBody>
+      </p:sp>
+      <p:sp>
+        <p:nvSpPr>
+          <p:cNvPr id="4" name="Slide Number Placeholder 3"/>
+          <p:cNvSpPr>
+            <a:spLocks noGrp="1"/>
+          </p:cNvSpPr>
+          <p:nvPr>
+            <p:ph type="sldNum" sz="quarter" idx="5"/>
+          </p:nvPr>
+        </p:nvSpPr>
+        <p:spPr/>
+        <p:txBody>
+          <a:bodyPr/>
+          <a:lstStyle/>
+          <a:p>
+            <a:fld id="{6C000152-5583-4B4B-A72B-EFD48442328A}" type="slidenum">
+              <a:rPr lang="en-US" smtClean="0"/>
+              <a:t>22</a:t>
+            </a:fld>
+            <a:endParaRPr lang="en-US"/>
+          </a:p>
+        </p:txBody>
+      </p:sp>
+    </p:spTree>
+    <p:extLst>
+      <p:ext uri="{BB962C8B-B14F-4D97-AF65-F5344CB8AC3E}">
+        <p14:creationId xmlns:p14="http://schemas.microsoft.com/office/powerpoint/2010/main" val="3774562413"/>
+      </p:ext>
+    </p:extLst>
+  </p:cSld>
+  <p:clrMapOvr>
+    <a:masterClrMapping/>
+  </p:clrMapOvr>
+</p:notes>
+</file>
+
+<file path=ppt/notesSlides/notesSlide19.xml><?xml version="1.0" encoding="utf-8"?>
+<p:notes xmlns:a="http://schemas.openxmlformats.org/drawingml/2006/main" xmlns:r="http://schemas.openxmlformats.org/officeDocument/2006/relationships" xmlns:p="http://schemas.openxmlformats.org/presentationml/2006/main">
+  <p:cSld>
+    <p:spTree>
+      <p:nvGrpSpPr>
+        <p:cNvPr id="1" name=""/>
+        <p:cNvGrpSpPr/>
+        <p:nvPr/>
+      </p:nvGrpSpPr>
+      <p:grpSpPr>
+        <a:xfrm>
+          <a:off x="0" y="0"/>
+          <a:ext cx="0" cy="0"/>
+          <a:chOff x="0" y="0"/>
+          <a:chExt cx="0" cy="0"/>
+        </a:xfrm>
+      </p:grpSpPr>
+      <p:sp>
+        <p:nvSpPr>
+          <p:cNvPr id="2" name="Slide Image Placeholder 1"/>
+          <p:cNvSpPr>
+            <a:spLocks noGrp="1" noRot="1" noChangeAspect="1"/>
+          </p:cNvSpPr>
+          <p:nvPr>
+            <p:ph type="sldImg"/>
+          </p:nvPr>
+        </p:nvSpPr>
+        <p:spPr/>
+      </p:sp>
+      <p:sp>
+        <p:nvSpPr>
+          <p:cNvPr id="3" name="Notes Placeholder 2"/>
+          <p:cNvSpPr>
+            <a:spLocks noGrp="1"/>
+          </p:cNvSpPr>
+          <p:nvPr>
+            <p:ph type="body" idx="1"/>
+          </p:nvPr>
+        </p:nvSpPr>
+        <p:spPr/>
+        <p:txBody>
+          <a:bodyPr/>
+          <a:lstStyle/>
+          <a:p>
+            <a:endParaRPr lang="en-US" dirty="0"/>
+          </a:p>
+        </p:txBody>
+      </p:sp>
+      <p:sp>
+        <p:nvSpPr>
+          <p:cNvPr id="4" name="Slide Number Placeholder 3"/>
+          <p:cNvSpPr>
+            <a:spLocks noGrp="1"/>
+          </p:cNvSpPr>
+          <p:nvPr>
+            <p:ph type="sldNum" sz="quarter" idx="5"/>
+          </p:nvPr>
+        </p:nvSpPr>
+        <p:spPr/>
+        <p:txBody>
+          <a:bodyPr/>
+          <a:lstStyle/>
+          <a:p>
+            <a:fld id="{6C000152-5583-4B4B-A72B-EFD48442328A}" type="slidenum">
+              <a:rPr lang="en-US" smtClean="0"/>
+              <a:t>23</a:t>
+            </a:fld>
+            <a:endParaRPr lang="en-US"/>
+          </a:p>
+        </p:txBody>
+      </p:sp>
+    </p:spTree>
+    <p:extLst>
+      <p:ext uri="{BB962C8B-B14F-4D97-AF65-F5344CB8AC3E}">
+        <p14:creationId xmlns:p14="http://schemas.microsoft.com/office/powerpoint/2010/main" val="2228851331"/>
+      </p:ext>
+    </p:extLst>
+  </p:cSld>
+  <p:clrMapOvr>
+    <a:masterClrMapping/>
+  </p:clrMapOvr>
+</p:notes>
+</file>
+
+<file path=ppt/notesSlides/notesSlide2.xml><?xml version="1.0" encoding="utf-8"?>
+<p:notes xmlns:a="http://schemas.openxmlformats.org/drawingml/2006/main" xmlns:r="http://schemas.openxmlformats.org/officeDocument/2006/relationships" xmlns:p="http://schemas.openxmlformats.org/presentationml/2006/main">
+  <p:cSld>
+    <p:spTree>
+      <p:nvGrpSpPr>
+        <p:cNvPr id="1" name=""/>
+        <p:cNvGrpSpPr/>
+        <p:nvPr/>
+      </p:nvGrpSpPr>
+      <p:grpSpPr>
+        <a:xfrm>
+          <a:off x="0" y="0"/>
+          <a:ext cx="0" cy="0"/>
+          <a:chOff x="0" y="0"/>
+          <a:chExt cx="0" cy="0"/>
+        </a:xfrm>
+      </p:grpSpPr>
+      <p:sp>
+        <p:nvSpPr>
+          <p:cNvPr id="2" name="Slide Image Placeholder 1"/>
+          <p:cNvSpPr>
+            <a:spLocks noGrp="1" noRot="1" noChangeAspect="1"/>
+          </p:cNvSpPr>
+          <p:nvPr>
+            <p:ph type="sldImg"/>
+          </p:nvPr>
+        </p:nvSpPr>
+        <p:spPr/>
+      </p:sp>
+      <p:sp>
+        <p:nvSpPr>
+          <p:cNvPr id="3" name="Notes Placeholder 2"/>
+          <p:cNvSpPr>
+            <a:spLocks noGrp="1"/>
+          </p:cNvSpPr>
+          <p:nvPr>
+            <p:ph type="body" idx="1"/>
+          </p:nvPr>
+        </p:nvSpPr>
+        <p:spPr/>
+        <p:txBody>
+          <a:bodyPr/>
+          <a:lstStyle/>
+          <a:p>
+            <a:endParaRPr lang="en-US" dirty="0"/>
+          </a:p>
+        </p:txBody>
+      </p:sp>
+      <p:sp>
+        <p:nvSpPr>
+          <p:cNvPr id="4" name="Slide Number Placeholder 3"/>
+          <p:cNvSpPr>
+            <a:spLocks noGrp="1"/>
+          </p:cNvSpPr>
+          <p:nvPr>
+            <p:ph type="sldNum" sz="quarter" idx="5"/>
+          </p:nvPr>
+        </p:nvSpPr>
+        <p:spPr/>
+        <p:txBody>
+          <a:bodyPr/>
+          <a:lstStyle/>
+          <a:p>
+            <a:fld id="{6C000152-5583-4B4B-A72B-EFD48442328A}" type="slidenum">
+              <a:rPr lang="en-US" smtClean="0"/>
+              <a:t>6</a:t>
+            </a:fld>
+            <a:endParaRPr lang="en-US"/>
+          </a:p>
+        </p:txBody>
+      </p:sp>
+    </p:spTree>
+    <p:extLst>
+      <p:ext uri="{BB962C8B-B14F-4D97-AF65-F5344CB8AC3E}">
+        <p14:creationId xmlns:p14="http://schemas.microsoft.com/office/powerpoint/2010/main" val="2243992558"/>
+      </p:ext>
+    </p:extLst>
+  </p:cSld>
+  <p:clrMapOvr>
+    <a:masterClrMapping/>
+  </p:clrMapOvr>
+</p:notes>
+</file>
+
+<file path=ppt/notesSlides/notesSlide20.xml><?xml version="1.0" encoding="utf-8"?>
+<p:notes xmlns:a="http://schemas.openxmlformats.org/drawingml/2006/main" xmlns:r="http://schemas.openxmlformats.org/officeDocument/2006/relationships" xmlns:p="http://schemas.openxmlformats.org/presentationml/2006/main">
+  <p:cSld>
+    <p:spTree>
+      <p:nvGrpSpPr>
+        <p:cNvPr id="1" name=""/>
+        <p:cNvGrpSpPr/>
+        <p:nvPr/>
+      </p:nvGrpSpPr>
+      <p:grpSpPr>
+        <a:xfrm>
+          <a:off x="0" y="0"/>
+          <a:ext cx="0" cy="0"/>
+          <a:chOff x="0" y="0"/>
+          <a:chExt cx="0" cy="0"/>
+        </a:xfrm>
+      </p:grpSpPr>
+      <p:sp>
+        <p:nvSpPr>
+          <p:cNvPr id="2" name="Slide Image Placeholder 1"/>
+          <p:cNvSpPr>
+            <a:spLocks noGrp="1" noRot="1" noChangeAspect="1"/>
+          </p:cNvSpPr>
+          <p:nvPr>
+            <p:ph type="sldImg"/>
+          </p:nvPr>
+        </p:nvSpPr>
+        <p:spPr/>
+      </p:sp>
+      <p:sp>
+        <p:nvSpPr>
+          <p:cNvPr id="3" name="Notes Placeholder 2"/>
+          <p:cNvSpPr>
+            <a:spLocks noGrp="1"/>
+          </p:cNvSpPr>
+          <p:nvPr>
+            <p:ph type="body" idx="1"/>
+          </p:nvPr>
+        </p:nvSpPr>
+        <p:spPr/>
+        <p:txBody>
+          <a:bodyPr/>
+          <a:lstStyle/>
+          <a:p>
+            <a:endParaRPr lang="en-US" dirty="0"/>
+          </a:p>
+        </p:txBody>
+      </p:sp>
+      <p:sp>
+        <p:nvSpPr>
+          <p:cNvPr id="4" name="Slide Number Placeholder 3"/>
+          <p:cNvSpPr>
+            <a:spLocks noGrp="1"/>
+          </p:cNvSpPr>
+          <p:nvPr>
+            <p:ph type="sldNum" sz="quarter" idx="5"/>
+          </p:nvPr>
+        </p:nvSpPr>
+        <p:spPr/>
+        <p:txBody>
+          <a:bodyPr/>
+          <a:lstStyle/>
+          <a:p>
+            <a:fld id="{6C000152-5583-4B4B-A72B-EFD48442328A}" type="slidenum">
+              <a:rPr lang="en-US" smtClean="0"/>
+              <a:t>24</a:t>
+            </a:fld>
+            <a:endParaRPr lang="en-US"/>
+          </a:p>
+        </p:txBody>
+      </p:sp>
+    </p:spTree>
+    <p:extLst>
+      <p:ext uri="{BB962C8B-B14F-4D97-AF65-F5344CB8AC3E}">
+        <p14:creationId xmlns:p14="http://schemas.microsoft.com/office/powerpoint/2010/main" val="1407787927"/>
+      </p:ext>
+    </p:extLst>
+  </p:cSld>
+  <p:clrMapOvr>
+    <a:masterClrMapping/>
+  </p:clrMapOvr>
+</p:notes>
+</file>
+
+<file path=ppt/notesSlides/notesSlide21.xml><?xml version="1.0" encoding="utf-8"?>
+<p:notes xmlns:a="http://schemas.openxmlformats.org/drawingml/2006/main" xmlns:r="http://schemas.openxmlformats.org/officeDocument/2006/relationships" xmlns:p="http://schemas.openxmlformats.org/presentationml/2006/main">
+  <p:cSld>
+    <p:spTree>
+      <p:nvGrpSpPr>
+        <p:cNvPr id="1" name=""/>
+        <p:cNvGrpSpPr/>
+        <p:nvPr/>
+      </p:nvGrpSpPr>
+      <p:grpSpPr>
+        <a:xfrm>
+          <a:off x="0" y="0"/>
+          <a:ext cx="0" cy="0"/>
+          <a:chOff x="0" y="0"/>
+          <a:chExt cx="0" cy="0"/>
+        </a:xfrm>
+      </p:grpSpPr>
+      <p:sp>
+        <p:nvSpPr>
+          <p:cNvPr id="2" name="Slide Image Placeholder 1"/>
+          <p:cNvSpPr>
+            <a:spLocks noGrp="1" noRot="1" noChangeAspect="1"/>
+          </p:cNvSpPr>
+          <p:nvPr>
+            <p:ph type="sldImg"/>
+          </p:nvPr>
+        </p:nvSpPr>
+        <p:spPr/>
+      </p:sp>
+      <p:sp>
+        <p:nvSpPr>
+          <p:cNvPr id="3" name="Notes Placeholder 2"/>
+          <p:cNvSpPr>
+            <a:spLocks noGrp="1"/>
+          </p:cNvSpPr>
+          <p:nvPr>
+            <p:ph type="body" idx="1"/>
+          </p:nvPr>
+        </p:nvSpPr>
+        <p:spPr/>
+        <p:txBody>
+          <a:bodyPr/>
+          <a:lstStyle/>
+          <a:p>
+            <a:endParaRPr lang="en-US" dirty="0"/>
+          </a:p>
+        </p:txBody>
+      </p:sp>
+      <p:sp>
+        <p:nvSpPr>
+          <p:cNvPr id="4" name="Slide Number Placeholder 3"/>
+          <p:cNvSpPr>
+            <a:spLocks noGrp="1"/>
+          </p:cNvSpPr>
+          <p:nvPr>
+            <p:ph type="sldNum" sz="quarter" idx="5"/>
+          </p:nvPr>
+        </p:nvSpPr>
+        <p:spPr/>
+        <p:txBody>
+          <a:bodyPr/>
+          <a:lstStyle/>
+          <a:p>
+            <a:fld id="{6C000152-5583-4B4B-A72B-EFD48442328A}" type="slidenum">
+              <a:rPr lang="en-US" smtClean="0"/>
+              <a:t>25</a:t>
+            </a:fld>
+            <a:endParaRPr lang="en-US"/>
+          </a:p>
+        </p:txBody>
+      </p:sp>
+    </p:spTree>
+    <p:extLst>
+      <p:ext uri="{BB962C8B-B14F-4D97-AF65-F5344CB8AC3E}">
+        <p14:creationId xmlns:p14="http://schemas.microsoft.com/office/powerpoint/2010/main" val="360868423"/>
+      </p:ext>
+    </p:extLst>
+  </p:cSld>
+  <p:clrMapOvr>
+    <a:masterClrMapping/>
+  </p:clrMapOvr>
+</p:notes>
+</file>
+
+<file path=ppt/notesSlides/notesSlide22.xml><?xml version="1.0" encoding="utf-8"?>
+<p:notes xmlns:a="http://schemas.openxmlformats.org/drawingml/2006/main" xmlns:r="http://schemas.openxmlformats.org/officeDocument/2006/relationships" xmlns:p="http://schemas.openxmlformats.org/presentationml/2006/main">
+  <p:cSld>
+    <p:spTree>
+      <p:nvGrpSpPr>
+        <p:cNvPr id="1" name=""/>
+        <p:cNvGrpSpPr/>
+        <p:nvPr/>
+      </p:nvGrpSpPr>
+      <p:grpSpPr>
+        <a:xfrm>
+          <a:off x="0" y="0"/>
+          <a:ext cx="0" cy="0"/>
+          <a:chOff x="0" y="0"/>
+          <a:chExt cx="0" cy="0"/>
+        </a:xfrm>
+      </p:grpSpPr>
+      <p:sp>
+        <p:nvSpPr>
+          <p:cNvPr id="2" name="Slide Image Placeholder 1"/>
+          <p:cNvSpPr>
+            <a:spLocks noGrp="1" noRot="1" noChangeAspect="1"/>
+          </p:cNvSpPr>
+          <p:nvPr>
+            <p:ph type="sldImg"/>
+          </p:nvPr>
+        </p:nvSpPr>
+        <p:spPr/>
+      </p:sp>
+      <p:sp>
+        <p:nvSpPr>
+          <p:cNvPr id="3" name="Notes Placeholder 2"/>
+          <p:cNvSpPr>
+            <a:spLocks noGrp="1"/>
+          </p:cNvSpPr>
+          <p:nvPr>
+            <p:ph type="body" idx="1"/>
+          </p:nvPr>
+        </p:nvSpPr>
+        <p:spPr/>
+        <p:txBody>
+          <a:bodyPr/>
+          <a:lstStyle/>
+          <a:p>
+            <a:endParaRPr lang="en-US" dirty="0"/>
+          </a:p>
+        </p:txBody>
+      </p:sp>
+      <p:sp>
+        <p:nvSpPr>
+          <p:cNvPr id="4" name="Slide Number Placeholder 3"/>
+          <p:cNvSpPr>
+            <a:spLocks noGrp="1"/>
+          </p:cNvSpPr>
+          <p:nvPr>
+            <p:ph type="sldNum" sz="quarter" idx="5"/>
+          </p:nvPr>
+        </p:nvSpPr>
+        <p:spPr/>
+        <p:txBody>
+          <a:bodyPr/>
+          <a:lstStyle/>
+          <a:p>
+            <a:fld id="{6C000152-5583-4B4B-A72B-EFD48442328A}" type="slidenum">
+              <a:rPr lang="en-US" smtClean="0"/>
+              <a:t>26</a:t>
+            </a:fld>
+            <a:endParaRPr lang="en-US"/>
+          </a:p>
+        </p:txBody>
+      </p:sp>
+    </p:spTree>
+    <p:extLst>
+      <p:ext uri="{BB962C8B-B14F-4D97-AF65-F5344CB8AC3E}">
+        <p14:creationId xmlns:p14="http://schemas.microsoft.com/office/powerpoint/2010/main" val="753596404"/>
+      </p:ext>
+    </p:extLst>
+  </p:cSld>
+  <p:clrMapOvr>
+    <a:masterClrMapping/>
+  </p:clrMapOvr>
+</p:notes>
+</file>
+
+<file path=ppt/notesSlides/notesSlide23.xml><?xml version="1.0" encoding="utf-8"?>
+<p:notes xmlns:a="http://schemas.openxmlformats.org/drawingml/2006/main" xmlns:r="http://schemas.openxmlformats.org/officeDocument/2006/relationships" xmlns:p="http://schemas.openxmlformats.org/presentationml/2006/main">
+  <p:cSld>
+    <p:spTree>
+      <p:nvGrpSpPr>
+        <p:cNvPr id="1" name=""/>
+        <p:cNvGrpSpPr/>
+        <p:nvPr/>
+      </p:nvGrpSpPr>
+      <p:grpSpPr>
+        <a:xfrm>
+          <a:off x="0" y="0"/>
+          <a:ext cx="0" cy="0"/>
+          <a:chOff x="0" y="0"/>
+          <a:chExt cx="0" cy="0"/>
+        </a:xfrm>
+      </p:grpSpPr>
+      <p:sp>
+        <p:nvSpPr>
+          <p:cNvPr id="2" name="Slide Image Placeholder 1"/>
+          <p:cNvSpPr>
+            <a:spLocks noGrp="1" noRot="1" noChangeAspect="1"/>
+          </p:cNvSpPr>
+          <p:nvPr>
+            <p:ph type="sldImg"/>
+          </p:nvPr>
+        </p:nvSpPr>
+        <p:spPr/>
+      </p:sp>
+      <p:sp>
+        <p:nvSpPr>
+          <p:cNvPr id="3" name="Notes Placeholder 2"/>
+          <p:cNvSpPr>
+            <a:spLocks noGrp="1"/>
+          </p:cNvSpPr>
+          <p:nvPr>
+            <p:ph type="body" idx="1"/>
+          </p:nvPr>
+        </p:nvSpPr>
+        <p:spPr/>
+        <p:txBody>
+          <a:bodyPr/>
+          <a:lstStyle/>
+          <a:p>
+            <a:endParaRPr lang="en-US" dirty="0"/>
+          </a:p>
+        </p:txBody>
+      </p:sp>
+      <p:sp>
+        <p:nvSpPr>
+          <p:cNvPr id="4" name="Slide Number Placeholder 3"/>
+          <p:cNvSpPr>
+            <a:spLocks noGrp="1"/>
+          </p:cNvSpPr>
+          <p:nvPr>
+            <p:ph type="sldNum" sz="quarter" idx="5"/>
+          </p:nvPr>
+        </p:nvSpPr>
+        <p:spPr/>
+        <p:txBody>
+          <a:bodyPr/>
+          <a:lstStyle/>
+          <a:p>
+            <a:fld id="{6C000152-5583-4B4B-A72B-EFD48442328A}" type="slidenum">
+              <a:rPr lang="en-US" smtClean="0"/>
+              <a:t>27</a:t>
+            </a:fld>
+            <a:endParaRPr lang="en-US"/>
+          </a:p>
+        </p:txBody>
+      </p:sp>
+    </p:spTree>
+    <p:extLst>
+      <p:ext uri="{BB962C8B-B14F-4D97-AF65-F5344CB8AC3E}">
+        <p14:creationId xmlns:p14="http://schemas.microsoft.com/office/powerpoint/2010/main" val="2239747124"/>
+      </p:ext>
+    </p:extLst>
+  </p:cSld>
+  <p:clrMapOvr>
+    <a:masterClrMapping/>
+  </p:clrMapOvr>
+</p:notes>
+</file>
+
+<file path=ppt/notesSlides/notesSlide24.xml><?xml version="1.0" encoding="utf-8"?>
+<p:notes xmlns:a="http://schemas.openxmlformats.org/drawingml/2006/main" xmlns:r="http://schemas.openxmlformats.org/officeDocument/2006/relationships" xmlns:p="http://schemas.openxmlformats.org/presentationml/2006/main">
+  <p:cSld>
+    <p:spTree>
+      <p:nvGrpSpPr>
+        <p:cNvPr id="1" name=""/>
+        <p:cNvGrpSpPr/>
+        <p:nvPr/>
+      </p:nvGrpSpPr>
+      <p:grpSpPr>
+        <a:xfrm>
+          <a:off x="0" y="0"/>
+          <a:ext cx="0" cy="0"/>
+          <a:chOff x="0" y="0"/>
+          <a:chExt cx="0" cy="0"/>
+        </a:xfrm>
+      </p:grpSpPr>
+      <p:sp>
+        <p:nvSpPr>
+          <p:cNvPr id="2" name="Slide Image Placeholder 1"/>
+          <p:cNvSpPr>
+            <a:spLocks noGrp="1" noRot="1" noChangeAspect="1"/>
+          </p:cNvSpPr>
+          <p:nvPr>
+            <p:ph type="sldImg"/>
+          </p:nvPr>
+        </p:nvSpPr>
+        <p:spPr/>
+      </p:sp>
+      <p:sp>
+        <p:nvSpPr>
+          <p:cNvPr id="3" name="Notes Placeholder 2"/>
+          <p:cNvSpPr>
+            <a:spLocks noGrp="1"/>
+          </p:cNvSpPr>
+          <p:nvPr>
+            <p:ph type="body" idx="1"/>
+          </p:nvPr>
+        </p:nvSpPr>
+        <p:spPr/>
+        <p:txBody>
+          <a:bodyPr/>
+          <a:lstStyle/>
+          <a:p>
+            <a:endParaRPr lang="en-US" dirty="0"/>
+          </a:p>
+        </p:txBody>
+      </p:sp>
+      <p:sp>
+        <p:nvSpPr>
+          <p:cNvPr id="4" name="Slide Number Placeholder 3"/>
+          <p:cNvSpPr>
+            <a:spLocks noGrp="1"/>
+          </p:cNvSpPr>
+          <p:nvPr>
+            <p:ph type="sldNum" sz="quarter" idx="5"/>
+          </p:nvPr>
+        </p:nvSpPr>
+        <p:spPr/>
+        <p:txBody>
+          <a:bodyPr/>
+          <a:lstStyle/>
+          <a:p>
+            <a:fld id="{6C000152-5583-4B4B-A72B-EFD48442328A}" type="slidenum">
+              <a:rPr lang="en-US" smtClean="0"/>
+              <a:t>28</a:t>
+            </a:fld>
+            <a:endParaRPr lang="en-US"/>
+          </a:p>
+        </p:txBody>
+      </p:sp>
+    </p:spTree>
+    <p:extLst>
+      <p:ext uri="{BB962C8B-B14F-4D97-AF65-F5344CB8AC3E}">
+        <p14:creationId xmlns:p14="http://schemas.microsoft.com/office/powerpoint/2010/main" val="3060443173"/>
+      </p:ext>
+    </p:extLst>
+  </p:cSld>
+  <p:clrMapOvr>
+    <a:masterClrMapping/>
+  </p:clrMapOvr>
+</p:notes>
+</file>
+
+<file path=ppt/notesSlides/notesSlide25.xml><?xml version="1.0" encoding="utf-8"?>
+<p:notes xmlns:a="http://schemas.openxmlformats.org/drawingml/2006/main" xmlns:r="http://schemas.openxmlformats.org/officeDocument/2006/relationships" xmlns:p="http://schemas.openxmlformats.org/presentationml/2006/main">
+  <p:cSld>
+    <p:spTree>
+      <p:nvGrpSpPr>
+        <p:cNvPr id="1" name=""/>
+        <p:cNvGrpSpPr/>
+        <p:nvPr/>
+      </p:nvGrpSpPr>
+      <p:grpSpPr>
+        <a:xfrm>
+          <a:off x="0" y="0"/>
+          <a:ext cx="0" cy="0"/>
+          <a:chOff x="0" y="0"/>
+          <a:chExt cx="0" cy="0"/>
+        </a:xfrm>
+      </p:grpSpPr>
+      <p:sp>
+        <p:nvSpPr>
+          <p:cNvPr id="2" name="Slide Image Placeholder 1"/>
+          <p:cNvSpPr>
+            <a:spLocks noGrp="1" noRot="1" noChangeAspect="1"/>
+          </p:cNvSpPr>
+          <p:nvPr>
+            <p:ph type="sldImg"/>
+          </p:nvPr>
+        </p:nvSpPr>
+        <p:spPr/>
+      </p:sp>
+      <p:sp>
+        <p:nvSpPr>
+          <p:cNvPr id="3" name="Notes Placeholder 2"/>
+          <p:cNvSpPr>
+            <a:spLocks noGrp="1"/>
+          </p:cNvSpPr>
+          <p:nvPr>
+            <p:ph type="body" idx="1"/>
+          </p:nvPr>
+        </p:nvSpPr>
+        <p:spPr/>
+        <p:txBody>
+          <a:bodyPr/>
+          <a:lstStyle/>
+          <a:p>
+            <a:endParaRPr lang="en-US" dirty="0"/>
+          </a:p>
+        </p:txBody>
+      </p:sp>
+      <p:sp>
+        <p:nvSpPr>
+          <p:cNvPr id="4" name="Slide Number Placeholder 3"/>
+          <p:cNvSpPr>
+            <a:spLocks noGrp="1"/>
+          </p:cNvSpPr>
+          <p:nvPr>
+            <p:ph type="sldNum" sz="quarter" idx="5"/>
+          </p:nvPr>
+        </p:nvSpPr>
+        <p:spPr/>
+        <p:txBody>
+          <a:bodyPr/>
+          <a:lstStyle/>
+          <a:p>
+            <a:fld id="{6C000152-5583-4B4B-A72B-EFD48442328A}" type="slidenum">
+              <a:rPr lang="en-US" smtClean="0"/>
+              <a:t>29</a:t>
+            </a:fld>
+            <a:endParaRPr lang="en-US"/>
+          </a:p>
+        </p:txBody>
+      </p:sp>
+    </p:spTree>
+    <p:extLst>
+      <p:ext uri="{BB962C8B-B14F-4D97-AF65-F5344CB8AC3E}">
+        <p14:creationId xmlns:p14="http://schemas.microsoft.com/office/powerpoint/2010/main" val="1046984668"/>
+      </p:ext>
+    </p:extLst>
+  </p:cSld>
+  <p:clrMapOvr>
+    <a:masterClrMapping/>
+  </p:clrMapOvr>
+</p:notes>
+</file>
+
+<file path=ppt/notesSlides/notesSlide26.xml><?xml version="1.0" encoding="utf-8"?>
+<p:notes xmlns:a="http://schemas.openxmlformats.org/drawingml/2006/main" xmlns:r="http://schemas.openxmlformats.org/officeDocument/2006/relationships" xmlns:p="http://schemas.openxmlformats.org/presentationml/2006/main">
+  <p:cSld>
+    <p:spTree>
+      <p:nvGrpSpPr>
+        <p:cNvPr id="1" name=""/>
+        <p:cNvGrpSpPr/>
+        <p:nvPr/>
+      </p:nvGrpSpPr>
+      <p:grpSpPr>
+        <a:xfrm>
+          <a:off x="0" y="0"/>
+          <a:ext cx="0" cy="0"/>
+          <a:chOff x="0" y="0"/>
+          <a:chExt cx="0" cy="0"/>
+        </a:xfrm>
+      </p:grpSpPr>
+      <p:sp>
+        <p:nvSpPr>
+          <p:cNvPr id="2" name="Slide Image Placeholder 1"/>
+          <p:cNvSpPr>
+            <a:spLocks noGrp="1" noRot="1" noChangeAspect="1"/>
+          </p:cNvSpPr>
+          <p:nvPr>
+            <p:ph type="sldImg"/>
+          </p:nvPr>
+        </p:nvSpPr>
+        <p:spPr/>
+      </p:sp>
+      <p:sp>
+        <p:nvSpPr>
+          <p:cNvPr id="3" name="Notes Placeholder 2"/>
+          <p:cNvSpPr>
+            <a:spLocks noGrp="1"/>
+          </p:cNvSpPr>
+          <p:nvPr>
+            <p:ph type="body" idx="1"/>
+          </p:nvPr>
+        </p:nvSpPr>
+        <p:spPr/>
+        <p:txBody>
+          <a:bodyPr/>
+          <a:lstStyle/>
+          <a:p>
+            <a:endParaRPr lang="en-US" dirty="0"/>
+          </a:p>
+        </p:txBody>
+      </p:sp>
+      <p:sp>
+        <p:nvSpPr>
+          <p:cNvPr id="4" name="Slide Number Placeholder 3"/>
+          <p:cNvSpPr>
+            <a:spLocks noGrp="1"/>
+          </p:cNvSpPr>
+          <p:nvPr>
+            <p:ph type="sldNum" sz="quarter" idx="5"/>
+          </p:nvPr>
+        </p:nvSpPr>
+        <p:spPr/>
+        <p:txBody>
+          <a:bodyPr/>
+          <a:lstStyle/>
+          <a:p>
+            <a:fld id="{6C000152-5583-4B4B-A72B-EFD48442328A}" type="slidenum">
+              <a:rPr lang="en-US" smtClean="0"/>
+              <a:t>30</a:t>
+            </a:fld>
+            <a:endParaRPr lang="en-US"/>
+          </a:p>
+        </p:txBody>
+      </p:sp>
+    </p:spTree>
+    <p:extLst>
+      <p:ext uri="{BB962C8B-B14F-4D97-AF65-F5344CB8AC3E}">
+        <p14:creationId xmlns:p14="http://schemas.microsoft.com/office/powerpoint/2010/main" val="977767823"/>
+      </p:ext>
+    </p:extLst>
+  </p:cSld>
+  <p:clrMapOvr>
+    <a:masterClrMapping/>
+  </p:clrMapOvr>
+</p:notes>
+</file>
+
+<file path=ppt/notesSlides/notesSlide27.xml><?xml version="1.0" encoding="utf-8"?>
+<p:notes xmlns:a="http://schemas.openxmlformats.org/drawingml/2006/main" xmlns:r="http://schemas.openxmlformats.org/officeDocument/2006/relationships" xmlns:p="http://schemas.openxmlformats.org/presentationml/2006/main">
+  <p:cSld>
+    <p:spTree>
+      <p:nvGrpSpPr>
+        <p:cNvPr id="1" name=""/>
+        <p:cNvGrpSpPr/>
+        <p:nvPr/>
+      </p:nvGrpSpPr>
+      <p:grpSpPr>
+        <a:xfrm>
+          <a:off x="0" y="0"/>
+          <a:ext cx="0" cy="0"/>
+          <a:chOff x="0" y="0"/>
+          <a:chExt cx="0" cy="0"/>
+        </a:xfrm>
+      </p:grpSpPr>
+      <p:sp>
+        <p:nvSpPr>
+          <p:cNvPr id="2" name="Slide Image Placeholder 1"/>
+          <p:cNvSpPr>
+            <a:spLocks noGrp="1" noRot="1" noChangeAspect="1"/>
+          </p:cNvSpPr>
+          <p:nvPr>
+            <p:ph type="sldImg"/>
+          </p:nvPr>
+        </p:nvSpPr>
+        <p:spPr/>
+      </p:sp>
+      <p:sp>
+        <p:nvSpPr>
+          <p:cNvPr id="3" name="Notes Placeholder 2"/>
+          <p:cNvSpPr>
+            <a:spLocks noGrp="1"/>
+          </p:cNvSpPr>
+          <p:nvPr>
+            <p:ph type="body" idx="1"/>
+          </p:nvPr>
+        </p:nvSpPr>
+        <p:spPr/>
+        <p:txBody>
+          <a:bodyPr/>
+          <a:lstStyle/>
+          <a:p>
+            <a:endParaRPr lang="en-US" dirty="0"/>
+          </a:p>
+        </p:txBody>
+      </p:sp>
+      <p:sp>
+        <p:nvSpPr>
+          <p:cNvPr id="4" name="Slide Number Placeholder 3"/>
+          <p:cNvSpPr>
+            <a:spLocks noGrp="1"/>
+          </p:cNvSpPr>
+          <p:nvPr>
+            <p:ph type="sldNum" sz="quarter" idx="5"/>
+          </p:nvPr>
+        </p:nvSpPr>
+        <p:spPr/>
+        <p:txBody>
+          <a:bodyPr/>
+          <a:lstStyle/>
+          <a:p>
+            <a:fld id="{6C000152-5583-4B4B-A72B-EFD48442328A}" type="slidenum">
+              <a:rPr lang="en-US" smtClean="0"/>
+              <a:t>31</a:t>
+            </a:fld>
+            <a:endParaRPr lang="en-US"/>
+          </a:p>
+        </p:txBody>
+      </p:sp>
+    </p:spTree>
+    <p:extLst>
+      <p:ext uri="{BB962C8B-B14F-4D97-AF65-F5344CB8AC3E}">
+        <p14:creationId xmlns:p14="http://schemas.microsoft.com/office/powerpoint/2010/main" val="696694271"/>
+      </p:ext>
+    </p:extLst>
+  </p:cSld>
+  <p:clrMapOvr>
+    <a:masterClrMapping/>
+  </p:clrMapOvr>
+</p:notes>
+</file>
+
+<file path=ppt/notesSlides/notesSlide3.xml><?xml version="1.0" encoding="utf-8"?>
+<p:notes xmlns:a="http://schemas.openxmlformats.org/drawingml/2006/main" xmlns:r="http://schemas.openxmlformats.org/officeDocument/2006/relationships" xmlns:p="http://schemas.openxmlformats.org/presentationml/2006/main">
+  <p:cSld>
+    <p:spTree>
+      <p:nvGrpSpPr>
+        <p:cNvPr id="1" name=""/>
+        <p:cNvGrpSpPr/>
+        <p:nvPr/>
+      </p:nvGrpSpPr>
+      <p:grpSpPr>
+        <a:xfrm>
+          <a:off x="0" y="0"/>
+          <a:ext cx="0" cy="0"/>
+          <a:chOff x="0" y="0"/>
+          <a:chExt cx="0" cy="0"/>
+        </a:xfrm>
+      </p:grpSpPr>
+      <p:sp>
+        <p:nvSpPr>
+          <p:cNvPr id="2" name="Slide Image Placeholder 1"/>
+          <p:cNvSpPr>
+            <a:spLocks noGrp="1" noRot="1" noChangeAspect="1"/>
+          </p:cNvSpPr>
+          <p:nvPr>
+            <p:ph type="sldImg"/>
+          </p:nvPr>
+        </p:nvSpPr>
+        <p:spPr/>
+      </p:sp>
+      <p:sp>
+        <p:nvSpPr>
+          <p:cNvPr id="3" name="Notes Placeholder 2"/>
+          <p:cNvSpPr>
+            <a:spLocks noGrp="1"/>
+          </p:cNvSpPr>
+          <p:nvPr>
+            <p:ph type="body" idx="1"/>
+          </p:nvPr>
+        </p:nvSpPr>
+        <p:spPr/>
+        <p:txBody>
+          <a:bodyPr/>
+          <a:lstStyle/>
+          <a:p>
+            <a:endParaRPr lang="en-US" dirty="0"/>
+          </a:p>
+        </p:txBody>
+      </p:sp>
+      <p:sp>
+        <p:nvSpPr>
+          <p:cNvPr id="4" name="Slide Number Placeholder 3"/>
+          <p:cNvSpPr>
+            <a:spLocks noGrp="1"/>
+          </p:cNvSpPr>
+          <p:nvPr>
+            <p:ph type="sldNum" sz="quarter" idx="5"/>
+          </p:nvPr>
+        </p:nvSpPr>
+        <p:spPr/>
+        <p:txBody>
+          <a:bodyPr/>
+          <a:lstStyle/>
+          <a:p>
+            <a:fld id="{6C000152-5583-4B4B-A72B-EFD48442328A}" type="slidenum">
+              <a:rPr lang="en-US" smtClean="0"/>
+              <a:t>7</a:t>
+            </a:fld>
+            <a:endParaRPr lang="en-US"/>
+          </a:p>
+        </p:txBody>
+      </p:sp>
+    </p:spTree>
+    <p:extLst>
+      <p:ext uri="{BB962C8B-B14F-4D97-AF65-F5344CB8AC3E}">
+        <p14:creationId xmlns:p14="http://schemas.microsoft.com/office/powerpoint/2010/main" val="10864380"/>
+      </p:ext>
+    </p:extLst>
+  </p:cSld>
+  <p:clrMapOvr>
+    <a:masterClrMapping/>
+  </p:clrMapOvr>
+</p:notes>
+</file>
+
+<file path=ppt/notesSlides/notesSlide4.xml><?xml version="1.0" encoding="utf-8"?>
+<p:notes xmlns:a="http://schemas.openxmlformats.org/drawingml/2006/main" xmlns:r="http://schemas.openxmlformats.org/officeDocument/2006/relationships" xmlns:p="http://schemas.openxmlformats.org/presentationml/2006/main">
+  <p:cSld>
+    <p:spTree>
+      <p:nvGrpSpPr>
+        <p:cNvPr id="1" name=""/>
+        <p:cNvGrpSpPr/>
+        <p:nvPr/>
+      </p:nvGrpSpPr>
+      <p:grpSpPr>
+        <a:xfrm>
+          <a:off x="0" y="0"/>
+          <a:ext cx="0" cy="0"/>
+          <a:chOff x="0" y="0"/>
+          <a:chExt cx="0" cy="0"/>
+        </a:xfrm>
+      </p:grpSpPr>
+      <p:sp>
+        <p:nvSpPr>
+          <p:cNvPr id="2" name="Slide Image Placeholder 1"/>
+          <p:cNvSpPr>
+            <a:spLocks noGrp="1" noRot="1" noChangeAspect="1"/>
+          </p:cNvSpPr>
+          <p:nvPr>
+            <p:ph type="sldImg"/>
+          </p:nvPr>
+        </p:nvSpPr>
+        <p:spPr/>
+      </p:sp>
+      <p:sp>
+        <p:nvSpPr>
+          <p:cNvPr id="3" name="Notes Placeholder 2"/>
+          <p:cNvSpPr>
+            <a:spLocks noGrp="1"/>
+          </p:cNvSpPr>
+          <p:nvPr>
+            <p:ph type="body" idx="1"/>
+          </p:nvPr>
+        </p:nvSpPr>
+        <p:spPr/>
+        <p:txBody>
+          <a:bodyPr/>
+          <a:lstStyle/>
+          <a:p>
+            <a:endParaRPr lang="en-US" dirty="0"/>
+          </a:p>
+        </p:txBody>
+      </p:sp>
+      <p:sp>
+        <p:nvSpPr>
+          <p:cNvPr id="4" name="Slide Number Placeholder 3"/>
+          <p:cNvSpPr>
+            <a:spLocks noGrp="1"/>
+          </p:cNvSpPr>
+          <p:nvPr>
+            <p:ph type="sldNum" sz="quarter" idx="5"/>
+          </p:nvPr>
+        </p:nvSpPr>
+        <p:spPr/>
+        <p:txBody>
+          <a:bodyPr/>
+          <a:lstStyle/>
+          <a:p>
+            <a:fld id="{6C000152-5583-4B4B-A72B-EFD48442328A}" type="slidenum">
+              <a:rPr lang="en-US" smtClean="0"/>
+              <a:t>8</a:t>
+            </a:fld>
+            <a:endParaRPr lang="en-US"/>
+          </a:p>
+        </p:txBody>
+      </p:sp>
+    </p:spTree>
+    <p:extLst>
+      <p:ext uri="{BB962C8B-B14F-4D97-AF65-F5344CB8AC3E}">
+        <p14:creationId xmlns:p14="http://schemas.microsoft.com/office/powerpoint/2010/main" val="2310707329"/>
+      </p:ext>
+    </p:extLst>
+  </p:cSld>
+  <p:clrMapOvr>
+    <a:masterClrMapping/>
+  </p:clrMapOvr>
+</p:notes>
+</file>
+
+<file path=ppt/notesSlides/notesSlide5.xml><?xml version="1.0" encoding="utf-8"?>
+<p:notes xmlns:a="http://schemas.openxmlformats.org/drawingml/2006/main" xmlns:r="http://schemas.openxmlformats.org/officeDocument/2006/relationships" xmlns:p="http://schemas.openxmlformats.org/presentationml/2006/main">
+  <p:cSld>
+    <p:spTree>
+      <p:nvGrpSpPr>
+        <p:cNvPr id="1" name=""/>
+        <p:cNvGrpSpPr/>
+        <p:nvPr/>
+      </p:nvGrpSpPr>
+      <p:grpSpPr>
+        <a:xfrm>
+          <a:off x="0" y="0"/>
+          <a:ext cx="0" cy="0"/>
+          <a:chOff x="0" y="0"/>
+          <a:chExt cx="0" cy="0"/>
+        </a:xfrm>
+      </p:grpSpPr>
+      <p:sp>
+        <p:nvSpPr>
+          <p:cNvPr id="2" name="Slide Image Placeholder 1"/>
+          <p:cNvSpPr>
+            <a:spLocks noGrp="1" noRot="1" noChangeAspect="1"/>
+          </p:cNvSpPr>
+          <p:nvPr>
+            <p:ph type="sldImg"/>
+          </p:nvPr>
+        </p:nvSpPr>
+        <p:spPr/>
+      </p:sp>
+      <p:sp>
+        <p:nvSpPr>
+          <p:cNvPr id="3" name="Notes Placeholder 2"/>
+          <p:cNvSpPr>
+            <a:spLocks noGrp="1"/>
+          </p:cNvSpPr>
+          <p:nvPr>
+            <p:ph type="body" idx="1"/>
+          </p:nvPr>
+        </p:nvSpPr>
+        <p:spPr/>
+        <p:txBody>
+          <a:bodyPr/>
+          <a:lstStyle/>
+          <a:p>
+            <a:endParaRPr lang="en-US" dirty="0"/>
+          </a:p>
+        </p:txBody>
+      </p:sp>
+      <p:sp>
+        <p:nvSpPr>
+          <p:cNvPr id="4" name="Slide Number Placeholder 3"/>
+          <p:cNvSpPr>
+            <a:spLocks noGrp="1"/>
+          </p:cNvSpPr>
+          <p:nvPr>
+            <p:ph type="sldNum" sz="quarter" idx="5"/>
+          </p:nvPr>
+        </p:nvSpPr>
+        <p:spPr/>
+        <p:txBody>
+          <a:bodyPr/>
+          <a:lstStyle/>
+          <a:p>
+            <a:fld id="{6C000152-5583-4B4B-A72B-EFD48442328A}" type="slidenum">
+              <a:rPr lang="en-US" smtClean="0"/>
+              <a:t>9</a:t>
+            </a:fld>
+            <a:endParaRPr lang="en-US"/>
+          </a:p>
+        </p:txBody>
+      </p:sp>
+    </p:spTree>
+    <p:extLst>
+      <p:ext uri="{BB962C8B-B14F-4D97-AF65-F5344CB8AC3E}">
+        <p14:creationId xmlns:p14="http://schemas.microsoft.com/office/powerpoint/2010/main" val="939276873"/>
+      </p:ext>
+    </p:extLst>
+  </p:cSld>
+  <p:clrMapOvr>
+    <a:masterClrMapping/>
+  </p:clrMapOvr>
+</p:notes>
+</file>
+
+<file path=ppt/notesSlides/notesSlide6.xml><?xml version="1.0" encoding="utf-8"?>
+<p:notes xmlns:a="http://schemas.openxmlformats.org/drawingml/2006/main" xmlns:r="http://schemas.openxmlformats.org/officeDocument/2006/relationships" xmlns:p="http://schemas.openxmlformats.org/presentationml/2006/main">
+  <p:cSld>
+    <p:spTree>
+      <p:nvGrpSpPr>
+        <p:cNvPr id="1" name=""/>
+        <p:cNvGrpSpPr/>
+        <p:nvPr/>
+      </p:nvGrpSpPr>
+      <p:grpSpPr>
+        <a:xfrm>
+          <a:off x="0" y="0"/>
+          <a:ext cx="0" cy="0"/>
+          <a:chOff x="0" y="0"/>
+          <a:chExt cx="0" cy="0"/>
+        </a:xfrm>
+      </p:grpSpPr>
+      <p:sp>
+        <p:nvSpPr>
+          <p:cNvPr id="2" name="Slide Image Placeholder 1"/>
+          <p:cNvSpPr>
+            <a:spLocks noGrp="1" noRot="1" noChangeAspect="1"/>
+          </p:cNvSpPr>
+          <p:nvPr>
+            <p:ph type="sldImg"/>
+          </p:nvPr>
+        </p:nvSpPr>
+        <p:spPr/>
+      </p:sp>
+      <p:sp>
+        <p:nvSpPr>
+          <p:cNvPr id="3" name="Notes Placeholder 2"/>
+          <p:cNvSpPr>
+            <a:spLocks noGrp="1"/>
+          </p:cNvSpPr>
+          <p:nvPr>
+            <p:ph type="body" idx="1"/>
+          </p:nvPr>
+        </p:nvSpPr>
+        <p:spPr/>
+        <p:txBody>
+          <a:bodyPr/>
+          <a:lstStyle/>
+          <a:p>
+            <a:endParaRPr lang="en-US" dirty="0"/>
+          </a:p>
+        </p:txBody>
+      </p:sp>
+      <p:sp>
+        <p:nvSpPr>
+          <p:cNvPr id="4" name="Slide Number Placeholder 3"/>
+          <p:cNvSpPr>
+            <a:spLocks noGrp="1"/>
+          </p:cNvSpPr>
+          <p:nvPr>
+            <p:ph type="sldNum" sz="quarter" idx="5"/>
+          </p:nvPr>
+        </p:nvSpPr>
+        <p:spPr/>
+        <p:txBody>
+          <a:bodyPr/>
+          <a:lstStyle/>
+          <a:p>
+            <a:fld id="{6C000152-5583-4B4B-A72B-EFD48442328A}" type="slidenum">
+              <a:rPr lang="en-US" smtClean="0"/>
+              <a:t>10</a:t>
+            </a:fld>
+            <a:endParaRPr lang="en-US"/>
+          </a:p>
+        </p:txBody>
+      </p:sp>
+    </p:spTree>
+    <p:extLst>
+      <p:ext uri="{BB962C8B-B14F-4D97-AF65-F5344CB8AC3E}">
+        <p14:creationId xmlns:p14="http://schemas.microsoft.com/office/powerpoint/2010/main" val="3961733564"/>
+      </p:ext>
+    </p:extLst>
+  </p:cSld>
+  <p:clrMapOvr>
+    <a:masterClrMapping/>
+  </p:clrMapOvr>
+</p:notes>
+</file>
+
+<file path=ppt/notesSlides/notesSlide7.xml><?xml version="1.0" encoding="utf-8"?>
+<p:notes xmlns:a="http://schemas.openxmlformats.org/drawingml/2006/main" xmlns:r="http://schemas.openxmlformats.org/officeDocument/2006/relationships" xmlns:p="http://schemas.openxmlformats.org/presentationml/2006/main">
+  <p:cSld>
+    <p:spTree>
+      <p:nvGrpSpPr>
+        <p:cNvPr id="1" name=""/>
+        <p:cNvGrpSpPr/>
+        <p:nvPr/>
+      </p:nvGrpSpPr>
+      <p:grpSpPr>
+        <a:xfrm>
+          <a:off x="0" y="0"/>
+          <a:ext cx="0" cy="0"/>
+          <a:chOff x="0" y="0"/>
+          <a:chExt cx="0" cy="0"/>
+        </a:xfrm>
+      </p:grpSpPr>
+      <p:sp>
+        <p:nvSpPr>
+          <p:cNvPr id="2" name="Slide Image Placeholder 1"/>
+          <p:cNvSpPr>
+            <a:spLocks noGrp="1" noRot="1" noChangeAspect="1"/>
+          </p:cNvSpPr>
+          <p:nvPr>
+            <p:ph type="sldImg"/>
+          </p:nvPr>
+        </p:nvSpPr>
+        <p:spPr/>
+      </p:sp>
+      <p:sp>
+        <p:nvSpPr>
+          <p:cNvPr id="3" name="Notes Placeholder 2"/>
+          <p:cNvSpPr>
+            <a:spLocks noGrp="1"/>
+          </p:cNvSpPr>
+          <p:nvPr>
+            <p:ph type="body" idx="1"/>
+          </p:nvPr>
+        </p:nvSpPr>
+        <p:spPr/>
+        <p:txBody>
+          <a:bodyPr/>
+          <a:lstStyle/>
+          <a:p>
+            <a:endParaRPr lang="en-US" dirty="0"/>
+          </a:p>
+        </p:txBody>
+      </p:sp>
+      <p:sp>
+        <p:nvSpPr>
+          <p:cNvPr id="4" name="Slide Number Placeholder 3"/>
+          <p:cNvSpPr>
+            <a:spLocks noGrp="1"/>
+          </p:cNvSpPr>
+          <p:nvPr>
+            <p:ph type="sldNum" sz="quarter" idx="5"/>
+          </p:nvPr>
+        </p:nvSpPr>
+        <p:spPr/>
+        <p:txBody>
+          <a:bodyPr/>
+          <a:lstStyle/>
+          <a:p>
+            <a:fld id="{6C000152-5583-4B4B-A72B-EFD48442328A}" type="slidenum">
+              <a:rPr lang="en-US" smtClean="0"/>
+              <a:t>11</a:t>
+            </a:fld>
+            <a:endParaRPr lang="en-US"/>
+          </a:p>
+        </p:txBody>
+      </p:sp>
+    </p:spTree>
+    <p:extLst>
+      <p:ext uri="{BB962C8B-B14F-4D97-AF65-F5344CB8AC3E}">
+        <p14:creationId xmlns:p14="http://schemas.microsoft.com/office/powerpoint/2010/main" val="927083581"/>
+      </p:ext>
+    </p:extLst>
+  </p:cSld>
+  <p:clrMapOvr>
+    <a:masterClrMapping/>
+  </p:clrMapOvr>
+</p:notes>
+</file>
+
+<file path=ppt/notesSlides/notesSlide8.xml><?xml version="1.0" encoding="utf-8"?>
+<p:notes xmlns:a="http://schemas.openxmlformats.org/drawingml/2006/main" xmlns:r="http://schemas.openxmlformats.org/officeDocument/2006/relationships" xmlns:p="http://schemas.openxmlformats.org/presentationml/2006/main">
+  <p:cSld>
+    <p:spTree>
+      <p:nvGrpSpPr>
+        <p:cNvPr id="1" name=""/>
+        <p:cNvGrpSpPr/>
+        <p:nvPr/>
+      </p:nvGrpSpPr>
+      <p:grpSpPr>
+        <a:xfrm>
+          <a:off x="0" y="0"/>
+          <a:ext cx="0" cy="0"/>
+          <a:chOff x="0" y="0"/>
+          <a:chExt cx="0" cy="0"/>
+        </a:xfrm>
+      </p:grpSpPr>
+      <p:sp>
+        <p:nvSpPr>
+          <p:cNvPr id="2" name="Slide Image Placeholder 1"/>
+          <p:cNvSpPr>
+            <a:spLocks noGrp="1" noRot="1" noChangeAspect="1"/>
+          </p:cNvSpPr>
+          <p:nvPr>
+            <p:ph type="sldImg"/>
+          </p:nvPr>
+        </p:nvSpPr>
+        <p:spPr/>
+      </p:sp>
+      <p:sp>
+        <p:nvSpPr>
+          <p:cNvPr id="3" name="Notes Placeholder 2"/>
+          <p:cNvSpPr>
+            <a:spLocks noGrp="1"/>
+          </p:cNvSpPr>
+          <p:nvPr>
+            <p:ph type="body" idx="1"/>
+          </p:nvPr>
+        </p:nvSpPr>
+        <p:spPr/>
+        <p:txBody>
+          <a:bodyPr/>
+          <a:lstStyle/>
+          <a:p>
+            <a:endParaRPr lang="en-US" dirty="0"/>
+          </a:p>
+        </p:txBody>
+      </p:sp>
+      <p:sp>
+        <p:nvSpPr>
+          <p:cNvPr id="4" name="Slide Number Placeholder 3"/>
+          <p:cNvSpPr>
+            <a:spLocks noGrp="1"/>
+          </p:cNvSpPr>
+          <p:nvPr>
+            <p:ph type="sldNum" sz="quarter" idx="5"/>
+          </p:nvPr>
+        </p:nvSpPr>
+        <p:spPr/>
+        <p:txBody>
+          <a:bodyPr/>
+          <a:lstStyle/>
+          <a:p>
+            <a:fld id="{6C000152-5583-4B4B-A72B-EFD48442328A}" type="slidenum">
+              <a:rPr lang="en-US" smtClean="0"/>
+              <a:t>12</a:t>
+            </a:fld>
+            <a:endParaRPr lang="en-US"/>
+          </a:p>
+        </p:txBody>
+      </p:sp>
+    </p:spTree>
+    <p:extLst>
+      <p:ext uri="{BB962C8B-B14F-4D97-AF65-F5344CB8AC3E}">
+        <p14:creationId xmlns:p14="http://schemas.microsoft.com/office/powerpoint/2010/main" val="3080709405"/>
+      </p:ext>
+    </p:extLst>
+  </p:cSld>
+  <p:clrMapOvr>
+    <a:masterClrMapping/>
+  </p:clrMapOvr>
+</p:notes>
+</file>
+
+<file path=ppt/notesSlides/notesSlide9.xml><?xml version="1.0" encoding="utf-8"?>
+<p:notes xmlns:a="http://schemas.openxmlformats.org/drawingml/2006/main" xmlns:r="http://schemas.openxmlformats.org/officeDocument/2006/relationships" xmlns:p="http://schemas.openxmlformats.org/presentationml/2006/main">
+  <p:cSld>
+    <p:spTree>
+      <p:nvGrpSpPr>
+        <p:cNvPr id="1" name=""/>
+        <p:cNvGrpSpPr/>
+        <p:nvPr/>
+      </p:nvGrpSpPr>
+      <p:grpSpPr>
+        <a:xfrm>
+          <a:off x="0" y="0"/>
+          <a:ext cx="0" cy="0"/>
+          <a:chOff x="0" y="0"/>
+          <a:chExt cx="0" cy="0"/>
+        </a:xfrm>
+      </p:grpSpPr>
+      <p:sp>
+        <p:nvSpPr>
+          <p:cNvPr id="2" name="Slide Image Placeholder 1"/>
+          <p:cNvSpPr>
+            <a:spLocks noGrp="1" noRot="1" noChangeAspect="1"/>
+          </p:cNvSpPr>
+          <p:nvPr>
+            <p:ph type="sldImg"/>
+          </p:nvPr>
+        </p:nvSpPr>
+        <p:spPr/>
+      </p:sp>
+      <p:sp>
+        <p:nvSpPr>
+          <p:cNvPr id="3" name="Notes Placeholder 2"/>
+          <p:cNvSpPr>
+            <a:spLocks noGrp="1"/>
+          </p:cNvSpPr>
+          <p:nvPr>
+            <p:ph type="body" idx="1"/>
+          </p:nvPr>
+        </p:nvSpPr>
+        <p:spPr/>
+        <p:txBody>
+          <a:bodyPr/>
+          <a:lstStyle/>
+          <a:p>
+            <a:endParaRPr lang="en-US" dirty="0"/>
+          </a:p>
+        </p:txBody>
+      </p:sp>
+      <p:sp>
+        <p:nvSpPr>
+          <p:cNvPr id="4" name="Slide Number Placeholder 3"/>
+          <p:cNvSpPr>
+            <a:spLocks noGrp="1"/>
+          </p:cNvSpPr>
+          <p:nvPr>
+            <p:ph type="sldNum" sz="quarter" idx="5"/>
+          </p:nvPr>
+        </p:nvSpPr>
+        <p:spPr/>
+        <p:txBody>
+          <a:bodyPr/>
+          <a:lstStyle/>
+          <a:p>
+            <a:fld id="{6C000152-5583-4B4B-A72B-EFD48442328A}" type="slidenum">
+              <a:rPr lang="en-US" smtClean="0"/>
+              <a:t>13</a:t>
+            </a:fld>
+            <a:endParaRPr lang="en-US"/>
+          </a:p>
+        </p:txBody>
+      </p:sp>
+    </p:spTree>
+    <p:extLst>
+      <p:ext uri="{BB962C8B-B14F-4D97-AF65-F5344CB8AC3E}">
+        <p14:creationId xmlns:p14="http://schemas.microsoft.com/office/powerpoint/2010/main" val="2520171636"/>
       </p:ext>
     </p:extLst>
   </p:cSld>
@@ -3842,12 +6057,1312 @@
   <p:clrMapOvr>
     <a:masterClrMapping/>
   </p:clrMapOvr>
+  <mc:AlternateContent xmlns:mc="http://schemas.openxmlformats.org/markup-compatibility/2006" xmlns:p14="http://schemas.microsoft.com/office/powerpoint/2010/main">
+    <mc:Choice Requires="p14">
+      <p:transition p14:dur="10"/>
+    </mc:Choice>
+    <mc:Fallback xmlns="">
+      <p:transition/>
+    </mc:Fallback>
+  </mc:AlternateContent>
+</p:sld>
+</file>
+
+<file path=ppt/slides/slide10.xml><?xml version="1.0" encoding="utf-8"?>
+<p:sld xmlns:a="http://schemas.openxmlformats.org/drawingml/2006/main" xmlns:r="http://schemas.openxmlformats.org/officeDocument/2006/relationships" xmlns:p="http://schemas.openxmlformats.org/presentationml/2006/main">
+  <p:cSld>
+    <p:spTree>
+      <p:nvGrpSpPr>
+        <p:cNvPr id="1" name=""/>
+        <p:cNvGrpSpPr/>
+        <p:nvPr/>
+      </p:nvGrpSpPr>
+      <p:grpSpPr>
+        <a:xfrm>
+          <a:off x="0" y="0"/>
+          <a:ext cx="0" cy="0"/>
+          <a:chOff x="0" y="0"/>
+          <a:chExt cx="0" cy="0"/>
+        </a:xfrm>
+      </p:grpSpPr>
+      <p:sp>
+        <p:nvSpPr>
+          <p:cNvPr id="2" name="Title 1">
+            <a:extLst>
+              <a:ext uri="{FF2B5EF4-FFF2-40B4-BE49-F238E27FC236}">
+                <a16:creationId xmlns:a16="http://schemas.microsoft.com/office/drawing/2014/main" id="{3105A310-F6C9-42C5-8659-4F56739BAEC2}"/>
+              </a:ext>
+            </a:extLst>
+          </p:cNvPr>
+          <p:cNvSpPr>
+            <a:spLocks noGrp="1"/>
+          </p:cNvSpPr>
+          <p:nvPr>
+            <p:ph type="title"/>
+          </p:nvPr>
+        </p:nvSpPr>
+        <p:spPr/>
+        <p:txBody>
+          <a:bodyPr/>
+          <a:lstStyle/>
+          <a:p>
+            <a:endParaRPr lang="en-US"/>
+          </a:p>
+        </p:txBody>
+      </p:sp>
+      <p:sp>
+        <p:nvSpPr>
+          <p:cNvPr id="3" name="Content Placeholder 2">
+            <a:extLst>
+              <a:ext uri="{FF2B5EF4-FFF2-40B4-BE49-F238E27FC236}">
+                <a16:creationId xmlns:a16="http://schemas.microsoft.com/office/drawing/2014/main" id="{85071AE1-689D-47F9-8C68-7357761CD9C3}"/>
+              </a:ext>
+            </a:extLst>
+          </p:cNvPr>
+          <p:cNvSpPr>
+            <a:spLocks noGrp="1"/>
+          </p:cNvSpPr>
+          <p:nvPr>
+            <p:ph idx="1"/>
+          </p:nvPr>
+        </p:nvSpPr>
+        <p:spPr/>
+        <p:txBody>
+          <a:bodyPr/>
+          <a:lstStyle/>
+          <a:p>
+            <a:endParaRPr lang="en-US"/>
+          </a:p>
+        </p:txBody>
+      </p:sp>
+      <p:pic>
+        <p:nvPicPr>
+          <p:cNvPr id="5" name="Picture 4">
+            <a:extLst>
+              <a:ext uri="{FF2B5EF4-FFF2-40B4-BE49-F238E27FC236}">
+                <a16:creationId xmlns:a16="http://schemas.microsoft.com/office/drawing/2014/main" id="{320B8B0E-F81E-499D-8585-362C1AF9FAE9}"/>
+              </a:ext>
+            </a:extLst>
+          </p:cNvPr>
+          <p:cNvPicPr>
+            <a:picLocks noChangeAspect="1"/>
+          </p:cNvPicPr>
+          <p:nvPr/>
+        </p:nvPicPr>
+        <p:blipFill>
+          <a:blip r:embed="rId4"/>
+          <a:stretch>
+            <a:fillRect/>
+          </a:stretch>
+        </p:blipFill>
+        <p:spPr>
+          <a:xfrm>
+            <a:off x="0" y="2995650"/>
+            <a:ext cx="12192000" cy="866699"/>
+          </a:xfrm>
+          <a:prstGeom prst="rect">
+            <a:avLst/>
+          </a:prstGeom>
+        </p:spPr>
+      </p:pic>
+    </p:spTree>
+    <p:extLst>
+      <p:ext uri="{BB962C8B-B14F-4D97-AF65-F5344CB8AC3E}">
+        <p14:creationId xmlns:p14="http://schemas.microsoft.com/office/powerpoint/2010/main" val="3130010264"/>
+      </p:ext>
+    </p:extLst>
+  </p:cSld>
+  <p:clrMapOvr>
+    <a:masterClrMapping/>
+  </p:clrMapOvr>
   <mc:AlternateContent xmlns:mc="http://schemas.openxmlformats.org/markup-compatibility/2006">
     <mc:Choice xmlns:p14="http://schemas.microsoft.com/office/powerpoint/2010/main" Requires="p14">
-      <p:transition p14:dur="10"/>
+      <p:transition p14:dur="10" advTm="30000">
+        <p:sndAc>
+          <p:stSnd>
+            <p:snd r:embed="rId3" name="click.wav"/>
+          </p:stSnd>
+        </p:sndAc>
+      </p:transition>
     </mc:Choice>
     <mc:Fallback>
-      <p:transition/>
+      <p:transition advTm="30000">
+        <p:sndAc>
+          <p:stSnd>
+            <p:snd r:embed="rId3" name="click.wav"/>
+          </p:stSnd>
+        </p:sndAc>
+      </p:transition>
+    </mc:Fallback>
+  </mc:AlternateContent>
+</p:sld>
+</file>
+
+<file path=ppt/slides/slide11.xml><?xml version="1.0" encoding="utf-8"?>
+<p:sld xmlns:a="http://schemas.openxmlformats.org/drawingml/2006/main" xmlns:r="http://schemas.openxmlformats.org/officeDocument/2006/relationships" xmlns:p="http://schemas.openxmlformats.org/presentationml/2006/main">
+  <p:cSld>
+    <p:spTree>
+      <p:nvGrpSpPr>
+        <p:cNvPr id="1" name=""/>
+        <p:cNvGrpSpPr/>
+        <p:nvPr/>
+      </p:nvGrpSpPr>
+      <p:grpSpPr>
+        <a:xfrm>
+          <a:off x="0" y="0"/>
+          <a:ext cx="0" cy="0"/>
+          <a:chOff x="0" y="0"/>
+          <a:chExt cx="0" cy="0"/>
+        </a:xfrm>
+      </p:grpSpPr>
+      <p:sp>
+        <p:nvSpPr>
+          <p:cNvPr id="2" name="Title 1">
+            <a:extLst>
+              <a:ext uri="{FF2B5EF4-FFF2-40B4-BE49-F238E27FC236}">
+                <a16:creationId xmlns:a16="http://schemas.microsoft.com/office/drawing/2014/main" id="{3105A310-F6C9-42C5-8659-4F56739BAEC2}"/>
+              </a:ext>
+            </a:extLst>
+          </p:cNvPr>
+          <p:cNvSpPr>
+            <a:spLocks noGrp="1"/>
+          </p:cNvSpPr>
+          <p:nvPr>
+            <p:ph type="title"/>
+          </p:nvPr>
+        </p:nvSpPr>
+        <p:spPr/>
+        <p:txBody>
+          <a:bodyPr/>
+          <a:lstStyle/>
+          <a:p>
+            <a:endParaRPr lang="en-US"/>
+          </a:p>
+        </p:txBody>
+      </p:sp>
+      <p:sp>
+        <p:nvSpPr>
+          <p:cNvPr id="3" name="Content Placeholder 2">
+            <a:extLst>
+              <a:ext uri="{FF2B5EF4-FFF2-40B4-BE49-F238E27FC236}">
+                <a16:creationId xmlns:a16="http://schemas.microsoft.com/office/drawing/2014/main" id="{85071AE1-689D-47F9-8C68-7357761CD9C3}"/>
+              </a:ext>
+            </a:extLst>
+          </p:cNvPr>
+          <p:cNvSpPr>
+            <a:spLocks noGrp="1"/>
+          </p:cNvSpPr>
+          <p:nvPr>
+            <p:ph idx="1"/>
+          </p:nvPr>
+        </p:nvSpPr>
+        <p:spPr/>
+        <p:txBody>
+          <a:bodyPr/>
+          <a:lstStyle/>
+          <a:p>
+            <a:endParaRPr lang="en-US"/>
+          </a:p>
+        </p:txBody>
+      </p:sp>
+      <p:pic>
+        <p:nvPicPr>
+          <p:cNvPr id="4" name="Picture 3">
+            <a:extLst>
+              <a:ext uri="{FF2B5EF4-FFF2-40B4-BE49-F238E27FC236}">
+                <a16:creationId xmlns:a16="http://schemas.microsoft.com/office/drawing/2014/main" id="{793F08E9-2DE4-4A23-BD8A-8D95AB390CAD}"/>
+              </a:ext>
+            </a:extLst>
+          </p:cNvPr>
+          <p:cNvPicPr>
+            <a:picLocks noChangeAspect="1"/>
+          </p:cNvPicPr>
+          <p:nvPr/>
+        </p:nvPicPr>
+        <p:blipFill>
+          <a:blip r:embed="rId4"/>
+          <a:stretch>
+            <a:fillRect/>
+          </a:stretch>
+        </p:blipFill>
+        <p:spPr>
+          <a:xfrm>
+            <a:off x="0" y="2617995"/>
+            <a:ext cx="12192000" cy="1622009"/>
+          </a:xfrm>
+          <a:prstGeom prst="rect">
+            <a:avLst/>
+          </a:prstGeom>
+        </p:spPr>
+      </p:pic>
+    </p:spTree>
+    <p:extLst>
+      <p:ext uri="{BB962C8B-B14F-4D97-AF65-F5344CB8AC3E}">
+        <p14:creationId xmlns:p14="http://schemas.microsoft.com/office/powerpoint/2010/main" val="1605074123"/>
+      </p:ext>
+    </p:extLst>
+  </p:cSld>
+  <p:clrMapOvr>
+    <a:masterClrMapping/>
+  </p:clrMapOvr>
+  <mc:AlternateContent xmlns:mc="http://schemas.openxmlformats.org/markup-compatibility/2006">
+    <mc:Choice xmlns:p14="http://schemas.microsoft.com/office/powerpoint/2010/main" Requires="p14">
+      <p:transition p14:dur="10" advTm="30000">
+        <p:sndAc>
+          <p:stSnd>
+            <p:snd r:embed="rId3" name="click.wav"/>
+          </p:stSnd>
+        </p:sndAc>
+      </p:transition>
+    </mc:Choice>
+    <mc:Fallback>
+      <p:transition advTm="30000">
+        <p:sndAc>
+          <p:stSnd>
+            <p:snd r:embed="rId3" name="click.wav"/>
+          </p:stSnd>
+        </p:sndAc>
+      </p:transition>
+    </mc:Fallback>
+  </mc:AlternateContent>
+</p:sld>
+</file>
+
+<file path=ppt/slides/slide12.xml><?xml version="1.0" encoding="utf-8"?>
+<p:sld xmlns:a="http://schemas.openxmlformats.org/drawingml/2006/main" xmlns:r="http://schemas.openxmlformats.org/officeDocument/2006/relationships" xmlns:p="http://schemas.openxmlformats.org/presentationml/2006/main">
+  <p:cSld>
+    <p:spTree>
+      <p:nvGrpSpPr>
+        <p:cNvPr id="1" name=""/>
+        <p:cNvGrpSpPr/>
+        <p:nvPr/>
+      </p:nvGrpSpPr>
+      <p:grpSpPr>
+        <a:xfrm>
+          <a:off x="0" y="0"/>
+          <a:ext cx="0" cy="0"/>
+          <a:chOff x="0" y="0"/>
+          <a:chExt cx="0" cy="0"/>
+        </a:xfrm>
+      </p:grpSpPr>
+      <p:sp>
+        <p:nvSpPr>
+          <p:cNvPr id="2" name="Title 1">
+            <a:extLst>
+              <a:ext uri="{FF2B5EF4-FFF2-40B4-BE49-F238E27FC236}">
+                <a16:creationId xmlns:a16="http://schemas.microsoft.com/office/drawing/2014/main" id="{3105A310-F6C9-42C5-8659-4F56739BAEC2}"/>
+              </a:ext>
+            </a:extLst>
+          </p:cNvPr>
+          <p:cNvSpPr>
+            <a:spLocks noGrp="1"/>
+          </p:cNvSpPr>
+          <p:nvPr>
+            <p:ph type="title"/>
+          </p:nvPr>
+        </p:nvSpPr>
+        <p:spPr/>
+        <p:txBody>
+          <a:bodyPr/>
+          <a:lstStyle/>
+          <a:p>
+            <a:endParaRPr lang="en-US"/>
+          </a:p>
+        </p:txBody>
+      </p:sp>
+      <p:sp>
+        <p:nvSpPr>
+          <p:cNvPr id="3" name="Content Placeholder 2">
+            <a:extLst>
+              <a:ext uri="{FF2B5EF4-FFF2-40B4-BE49-F238E27FC236}">
+                <a16:creationId xmlns:a16="http://schemas.microsoft.com/office/drawing/2014/main" id="{85071AE1-689D-47F9-8C68-7357761CD9C3}"/>
+              </a:ext>
+            </a:extLst>
+          </p:cNvPr>
+          <p:cNvSpPr>
+            <a:spLocks noGrp="1"/>
+          </p:cNvSpPr>
+          <p:nvPr>
+            <p:ph idx="1"/>
+          </p:nvPr>
+        </p:nvSpPr>
+        <p:spPr/>
+        <p:txBody>
+          <a:bodyPr/>
+          <a:lstStyle/>
+          <a:p>
+            <a:endParaRPr lang="en-US"/>
+          </a:p>
+        </p:txBody>
+      </p:sp>
+      <p:pic>
+        <p:nvPicPr>
+          <p:cNvPr id="5" name="Picture 4">
+            <a:extLst>
+              <a:ext uri="{FF2B5EF4-FFF2-40B4-BE49-F238E27FC236}">
+                <a16:creationId xmlns:a16="http://schemas.microsoft.com/office/drawing/2014/main" id="{4C7F9F92-BEB6-451C-B2E5-FF899C099483}"/>
+              </a:ext>
+            </a:extLst>
+          </p:cNvPr>
+          <p:cNvPicPr>
+            <a:picLocks noChangeAspect="1"/>
+          </p:cNvPicPr>
+          <p:nvPr/>
+        </p:nvPicPr>
+        <p:blipFill>
+          <a:blip r:embed="rId4"/>
+          <a:stretch>
+            <a:fillRect/>
+          </a:stretch>
+        </p:blipFill>
+        <p:spPr>
+          <a:xfrm>
+            <a:off x="0" y="2596781"/>
+            <a:ext cx="12192000" cy="1664437"/>
+          </a:xfrm>
+          <a:prstGeom prst="rect">
+            <a:avLst/>
+          </a:prstGeom>
+        </p:spPr>
+      </p:pic>
+    </p:spTree>
+    <p:extLst>
+      <p:ext uri="{BB962C8B-B14F-4D97-AF65-F5344CB8AC3E}">
+        <p14:creationId xmlns:p14="http://schemas.microsoft.com/office/powerpoint/2010/main" val="3165313970"/>
+      </p:ext>
+    </p:extLst>
+  </p:cSld>
+  <p:clrMapOvr>
+    <a:masterClrMapping/>
+  </p:clrMapOvr>
+  <mc:AlternateContent xmlns:mc="http://schemas.openxmlformats.org/markup-compatibility/2006">
+    <mc:Choice xmlns:p14="http://schemas.microsoft.com/office/powerpoint/2010/main" Requires="p14">
+      <p:transition p14:dur="10" advTm="30000">
+        <p:sndAc>
+          <p:stSnd>
+            <p:snd r:embed="rId3" name="click.wav"/>
+          </p:stSnd>
+        </p:sndAc>
+      </p:transition>
+    </mc:Choice>
+    <mc:Fallback>
+      <p:transition advTm="30000">
+        <p:sndAc>
+          <p:stSnd>
+            <p:snd r:embed="rId3" name="click.wav"/>
+          </p:stSnd>
+        </p:sndAc>
+      </p:transition>
+    </mc:Fallback>
+  </mc:AlternateContent>
+</p:sld>
+</file>
+
+<file path=ppt/slides/slide13.xml><?xml version="1.0" encoding="utf-8"?>
+<p:sld xmlns:a="http://schemas.openxmlformats.org/drawingml/2006/main" xmlns:r="http://schemas.openxmlformats.org/officeDocument/2006/relationships" xmlns:p="http://schemas.openxmlformats.org/presentationml/2006/main">
+  <p:cSld>
+    <p:spTree>
+      <p:nvGrpSpPr>
+        <p:cNvPr id="1" name=""/>
+        <p:cNvGrpSpPr/>
+        <p:nvPr/>
+      </p:nvGrpSpPr>
+      <p:grpSpPr>
+        <a:xfrm>
+          <a:off x="0" y="0"/>
+          <a:ext cx="0" cy="0"/>
+          <a:chOff x="0" y="0"/>
+          <a:chExt cx="0" cy="0"/>
+        </a:xfrm>
+      </p:grpSpPr>
+      <p:sp>
+        <p:nvSpPr>
+          <p:cNvPr id="2" name="Title 1">
+            <a:extLst>
+              <a:ext uri="{FF2B5EF4-FFF2-40B4-BE49-F238E27FC236}">
+                <a16:creationId xmlns:a16="http://schemas.microsoft.com/office/drawing/2014/main" id="{3105A310-F6C9-42C5-8659-4F56739BAEC2}"/>
+              </a:ext>
+            </a:extLst>
+          </p:cNvPr>
+          <p:cNvSpPr>
+            <a:spLocks noGrp="1"/>
+          </p:cNvSpPr>
+          <p:nvPr>
+            <p:ph type="title"/>
+          </p:nvPr>
+        </p:nvSpPr>
+        <p:spPr/>
+        <p:txBody>
+          <a:bodyPr/>
+          <a:lstStyle/>
+          <a:p>
+            <a:endParaRPr lang="en-US"/>
+          </a:p>
+        </p:txBody>
+      </p:sp>
+      <p:sp>
+        <p:nvSpPr>
+          <p:cNvPr id="3" name="Content Placeholder 2">
+            <a:extLst>
+              <a:ext uri="{FF2B5EF4-FFF2-40B4-BE49-F238E27FC236}">
+                <a16:creationId xmlns:a16="http://schemas.microsoft.com/office/drawing/2014/main" id="{85071AE1-689D-47F9-8C68-7357761CD9C3}"/>
+              </a:ext>
+            </a:extLst>
+          </p:cNvPr>
+          <p:cNvSpPr>
+            <a:spLocks noGrp="1"/>
+          </p:cNvSpPr>
+          <p:nvPr>
+            <p:ph idx="1"/>
+          </p:nvPr>
+        </p:nvSpPr>
+        <p:spPr/>
+        <p:txBody>
+          <a:bodyPr/>
+          <a:lstStyle/>
+          <a:p>
+            <a:endParaRPr lang="en-US"/>
+          </a:p>
+        </p:txBody>
+      </p:sp>
+      <p:pic>
+        <p:nvPicPr>
+          <p:cNvPr id="4" name="Picture 3">
+            <a:extLst>
+              <a:ext uri="{FF2B5EF4-FFF2-40B4-BE49-F238E27FC236}">
+                <a16:creationId xmlns:a16="http://schemas.microsoft.com/office/drawing/2014/main" id="{47A2AD35-D061-4DF2-A4B8-5099597B4D37}"/>
+              </a:ext>
+            </a:extLst>
+          </p:cNvPr>
+          <p:cNvPicPr>
+            <a:picLocks noChangeAspect="1"/>
+          </p:cNvPicPr>
+          <p:nvPr/>
+        </p:nvPicPr>
+        <p:blipFill>
+          <a:blip r:embed="rId4"/>
+          <a:stretch>
+            <a:fillRect/>
+          </a:stretch>
+        </p:blipFill>
+        <p:spPr>
+          <a:xfrm>
+            <a:off x="0" y="2885133"/>
+            <a:ext cx="12192000" cy="1087733"/>
+          </a:xfrm>
+          <a:prstGeom prst="rect">
+            <a:avLst/>
+          </a:prstGeom>
+        </p:spPr>
+      </p:pic>
+    </p:spTree>
+    <p:extLst>
+      <p:ext uri="{BB962C8B-B14F-4D97-AF65-F5344CB8AC3E}">
+        <p14:creationId xmlns:p14="http://schemas.microsoft.com/office/powerpoint/2010/main" val="4216488587"/>
+      </p:ext>
+    </p:extLst>
+  </p:cSld>
+  <p:clrMapOvr>
+    <a:masterClrMapping/>
+  </p:clrMapOvr>
+  <mc:AlternateContent xmlns:mc="http://schemas.openxmlformats.org/markup-compatibility/2006">
+    <mc:Choice xmlns:p14="http://schemas.microsoft.com/office/powerpoint/2010/main" Requires="p14">
+      <p:transition p14:dur="10" advTm="30000">
+        <p:sndAc>
+          <p:stSnd>
+            <p:snd r:embed="rId3" name="click.wav"/>
+          </p:stSnd>
+        </p:sndAc>
+      </p:transition>
+    </mc:Choice>
+    <mc:Fallback>
+      <p:transition advTm="30000">
+        <p:sndAc>
+          <p:stSnd>
+            <p:snd r:embed="rId3" name="click.wav"/>
+          </p:stSnd>
+        </p:sndAc>
+      </p:transition>
+    </mc:Fallback>
+  </mc:AlternateContent>
+</p:sld>
+</file>
+
+<file path=ppt/slides/slide14.xml><?xml version="1.0" encoding="utf-8"?>
+<p:sld xmlns:a="http://schemas.openxmlformats.org/drawingml/2006/main" xmlns:r="http://schemas.openxmlformats.org/officeDocument/2006/relationships" xmlns:p="http://schemas.openxmlformats.org/presentationml/2006/main">
+  <p:cSld>
+    <p:spTree>
+      <p:nvGrpSpPr>
+        <p:cNvPr id="1" name=""/>
+        <p:cNvGrpSpPr/>
+        <p:nvPr/>
+      </p:nvGrpSpPr>
+      <p:grpSpPr>
+        <a:xfrm>
+          <a:off x="0" y="0"/>
+          <a:ext cx="0" cy="0"/>
+          <a:chOff x="0" y="0"/>
+          <a:chExt cx="0" cy="0"/>
+        </a:xfrm>
+      </p:grpSpPr>
+      <p:sp>
+        <p:nvSpPr>
+          <p:cNvPr id="2" name="Title 1">
+            <a:extLst>
+              <a:ext uri="{FF2B5EF4-FFF2-40B4-BE49-F238E27FC236}">
+                <a16:creationId xmlns:a16="http://schemas.microsoft.com/office/drawing/2014/main" id="{3105A310-F6C9-42C5-8659-4F56739BAEC2}"/>
+              </a:ext>
+            </a:extLst>
+          </p:cNvPr>
+          <p:cNvSpPr>
+            <a:spLocks noGrp="1"/>
+          </p:cNvSpPr>
+          <p:nvPr>
+            <p:ph type="title"/>
+          </p:nvPr>
+        </p:nvSpPr>
+        <p:spPr/>
+        <p:txBody>
+          <a:bodyPr/>
+          <a:lstStyle/>
+          <a:p>
+            <a:endParaRPr lang="en-US"/>
+          </a:p>
+        </p:txBody>
+      </p:sp>
+      <p:sp>
+        <p:nvSpPr>
+          <p:cNvPr id="3" name="Content Placeholder 2">
+            <a:extLst>
+              <a:ext uri="{FF2B5EF4-FFF2-40B4-BE49-F238E27FC236}">
+                <a16:creationId xmlns:a16="http://schemas.microsoft.com/office/drawing/2014/main" id="{85071AE1-689D-47F9-8C68-7357761CD9C3}"/>
+              </a:ext>
+            </a:extLst>
+          </p:cNvPr>
+          <p:cNvSpPr>
+            <a:spLocks noGrp="1"/>
+          </p:cNvSpPr>
+          <p:nvPr>
+            <p:ph idx="1"/>
+          </p:nvPr>
+        </p:nvSpPr>
+        <p:spPr/>
+        <p:txBody>
+          <a:bodyPr/>
+          <a:lstStyle/>
+          <a:p>
+            <a:endParaRPr lang="en-US"/>
+          </a:p>
+        </p:txBody>
+      </p:sp>
+      <p:pic>
+        <p:nvPicPr>
+          <p:cNvPr id="5" name="Picture 4">
+            <a:extLst>
+              <a:ext uri="{FF2B5EF4-FFF2-40B4-BE49-F238E27FC236}">
+                <a16:creationId xmlns:a16="http://schemas.microsoft.com/office/drawing/2014/main" id="{DCB06035-E332-4983-99BC-7FC1D425FE20}"/>
+              </a:ext>
+            </a:extLst>
+          </p:cNvPr>
+          <p:cNvPicPr>
+            <a:picLocks noChangeAspect="1"/>
+          </p:cNvPicPr>
+          <p:nvPr/>
+        </p:nvPicPr>
+        <p:blipFill>
+          <a:blip r:embed="rId4"/>
+          <a:stretch>
+            <a:fillRect/>
+          </a:stretch>
+        </p:blipFill>
+        <p:spPr>
+          <a:xfrm>
+            <a:off x="0" y="2729013"/>
+            <a:ext cx="12192000" cy="1399973"/>
+          </a:xfrm>
+          <a:prstGeom prst="rect">
+            <a:avLst/>
+          </a:prstGeom>
+        </p:spPr>
+      </p:pic>
+    </p:spTree>
+    <p:extLst>
+      <p:ext uri="{BB962C8B-B14F-4D97-AF65-F5344CB8AC3E}">
+        <p14:creationId xmlns:p14="http://schemas.microsoft.com/office/powerpoint/2010/main" val="1728257291"/>
+      </p:ext>
+    </p:extLst>
+  </p:cSld>
+  <p:clrMapOvr>
+    <a:masterClrMapping/>
+  </p:clrMapOvr>
+  <mc:AlternateContent xmlns:mc="http://schemas.openxmlformats.org/markup-compatibility/2006">
+    <mc:Choice xmlns:p14="http://schemas.microsoft.com/office/powerpoint/2010/main" Requires="p14">
+      <p:transition p14:dur="10" advTm="30000">
+        <p:sndAc>
+          <p:stSnd>
+            <p:snd r:embed="rId3" name="click.wav"/>
+          </p:stSnd>
+        </p:sndAc>
+      </p:transition>
+    </mc:Choice>
+    <mc:Fallback>
+      <p:transition advTm="30000">
+        <p:sndAc>
+          <p:stSnd>
+            <p:snd r:embed="rId3" name="click.wav"/>
+          </p:stSnd>
+        </p:sndAc>
+      </p:transition>
+    </mc:Fallback>
+  </mc:AlternateContent>
+</p:sld>
+</file>
+
+<file path=ppt/slides/slide15.xml><?xml version="1.0" encoding="utf-8"?>
+<p:sld xmlns:a="http://schemas.openxmlformats.org/drawingml/2006/main" xmlns:r="http://schemas.openxmlformats.org/officeDocument/2006/relationships" xmlns:p="http://schemas.openxmlformats.org/presentationml/2006/main">
+  <p:cSld>
+    <p:spTree>
+      <p:nvGrpSpPr>
+        <p:cNvPr id="1" name=""/>
+        <p:cNvGrpSpPr/>
+        <p:nvPr/>
+      </p:nvGrpSpPr>
+      <p:grpSpPr>
+        <a:xfrm>
+          <a:off x="0" y="0"/>
+          <a:ext cx="0" cy="0"/>
+          <a:chOff x="0" y="0"/>
+          <a:chExt cx="0" cy="0"/>
+        </a:xfrm>
+      </p:grpSpPr>
+      <p:sp>
+        <p:nvSpPr>
+          <p:cNvPr id="2" name="Title 1">
+            <a:extLst>
+              <a:ext uri="{FF2B5EF4-FFF2-40B4-BE49-F238E27FC236}">
+                <a16:creationId xmlns:a16="http://schemas.microsoft.com/office/drawing/2014/main" id="{3105A310-F6C9-42C5-8659-4F56739BAEC2}"/>
+              </a:ext>
+            </a:extLst>
+          </p:cNvPr>
+          <p:cNvSpPr>
+            <a:spLocks noGrp="1"/>
+          </p:cNvSpPr>
+          <p:nvPr>
+            <p:ph type="title"/>
+          </p:nvPr>
+        </p:nvSpPr>
+        <p:spPr/>
+        <p:txBody>
+          <a:bodyPr/>
+          <a:lstStyle/>
+          <a:p>
+            <a:endParaRPr lang="en-US"/>
+          </a:p>
+        </p:txBody>
+      </p:sp>
+      <p:sp>
+        <p:nvSpPr>
+          <p:cNvPr id="3" name="Content Placeholder 2">
+            <a:extLst>
+              <a:ext uri="{FF2B5EF4-FFF2-40B4-BE49-F238E27FC236}">
+                <a16:creationId xmlns:a16="http://schemas.microsoft.com/office/drawing/2014/main" id="{85071AE1-689D-47F9-8C68-7357761CD9C3}"/>
+              </a:ext>
+            </a:extLst>
+          </p:cNvPr>
+          <p:cNvSpPr>
+            <a:spLocks noGrp="1"/>
+          </p:cNvSpPr>
+          <p:nvPr>
+            <p:ph idx="1"/>
+          </p:nvPr>
+        </p:nvSpPr>
+        <p:spPr/>
+        <p:txBody>
+          <a:bodyPr/>
+          <a:lstStyle/>
+          <a:p>
+            <a:endParaRPr lang="en-US"/>
+          </a:p>
+        </p:txBody>
+      </p:sp>
+      <p:pic>
+        <p:nvPicPr>
+          <p:cNvPr id="4" name="Picture 3">
+            <a:extLst>
+              <a:ext uri="{FF2B5EF4-FFF2-40B4-BE49-F238E27FC236}">
+                <a16:creationId xmlns:a16="http://schemas.microsoft.com/office/drawing/2014/main" id="{5C12672E-7219-41D3-B42E-13BFBB7DB14D}"/>
+              </a:ext>
+            </a:extLst>
+          </p:cNvPr>
+          <p:cNvPicPr>
+            <a:picLocks noChangeAspect="1"/>
+          </p:cNvPicPr>
+          <p:nvPr/>
+        </p:nvPicPr>
+        <p:blipFill>
+          <a:blip r:embed="rId4"/>
+          <a:stretch>
+            <a:fillRect/>
+          </a:stretch>
+        </p:blipFill>
+        <p:spPr>
+          <a:xfrm>
+            <a:off x="0" y="2837242"/>
+            <a:ext cx="12192000" cy="1183516"/>
+          </a:xfrm>
+          <a:prstGeom prst="rect">
+            <a:avLst/>
+          </a:prstGeom>
+        </p:spPr>
+      </p:pic>
+    </p:spTree>
+    <p:extLst>
+      <p:ext uri="{BB962C8B-B14F-4D97-AF65-F5344CB8AC3E}">
+        <p14:creationId xmlns:p14="http://schemas.microsoft.com/office/powerpoint/2010/main" val="1360330418"/>
+      </p:ext>
+    </p:extLst>
+  </p:cSld>
+  <p:clrMapOvr>
+    <a:masterClrMapping/>
+  </p:clrMapOvr>
+  <mc:AlternateContent xmlns:mc="http://schemas.openxmlformats.org/markup-compatibility/2006">
+    <mc:Choice xmlns:p14="http://schemas.microsoft.com/office/powerpoint/2010/main" Requires="p14">
+      <p:transition p14:dur="10" advTm="30000">
+        <p:sndAc>
+          <p:stSnd>
+            <p:snd r:embed="rId3" name="click.wav"/>
+          </p:stSnd>
+        </p:sndAc>
+      </p:transition>
+    </mc:Choice>
+    <mc:Fallback>
+      <p:transition advTm="30000">
+        <p:sndAc>
+          <p:stSnd>
+            <p:snd r:embed="rId3" name="click.wav"/>
+          </p:stSnd>
+        </p:sndAc>
+      </p:transition>
+    </mc:Fallback>
+  </mc:AlternateContent>
+</p:sld>
+</file>
+
+<file path=ppt/slides/slide16.xml><?xml version="1.0" encoding="utf-8"?>
+<p:sld xmlns:a="http://schemas.openxmlformats.org/drawingml/2006/main" xmlns:r="http://schemas.openxmlformats.org/officeDocument/2006/relationships" xmlns:p="http://schemas.openxmlformats.org/presentationml/2006/main">
+  <p:cSld>
+    <p:spTree>
+      <p:nvGrpSpPr>
+        <p:cNvPr id="1" name=""/>
+        <p:cNvGrpSpPr/>
+        <p:nvPr/>
+      </p:nvGrpSpPr>
+      <p:grpSpPr>
+        <a:xfrm>
+          <a:off x="0" y="0"/>
+          <a:ext cx="0" cy="0"/>
+          <a:chOff x="0" y="0"/>
+          <a:chExt cx="0" cy="0"/>
+        </a:xfrm>
+      </p:grpSpPr>
+      <p:sp>
+        <p:nvSpPr>
+          <p:cNvPr id="2" name="Title 1">
+            <a:extLst>
+              <a:ext uri="{FF2B5EF4-FFF2-40B4-BE49-F238E27FC236}">
+                <a16:creationId xmlns:a16="http://schemas.microsoft.com/office/drawing/2014/main" id="{3105A310-F6C9-42C5-8659-4F56739BAEC2}"/>
+              </a:ext>
+            </a:extLst>
+          </p:cNvPr>
+          <p:cNvSpPr>
+            <a:spLocks noGrp="1"/>
+          </p:cNvSpPr>
+          <p:nvPr>
+            <p:ph type="title"/>
+          </p:nvPr>
+        </p:nvSpPr>
+        <p:spPr/>
+        <p:txBody>
+          <a:bodyPr/>
+          <a:lstStyle/>
+          <a:p>
+            <a:endParaRPr lang="en-US"/>
+          </a:p>
+        </p:txBody>
+      </p:sp>
+      <p:sp>
+        <p:nvSpPr>
+          <p:cNvPr id="3" name="Content Placeholder 2">
+            <a:extLst>
+              <a:ext uri="{FF2B5EF4-FFF2-40B4-BE49-F238E27FC236}">
+                <a16:creationId xmlns:a16="http://schemas.microsoft.com/office/drawing/2014/main" id="{85071AE1-689D-47F9-8C68-7357761CD9C3}"/>
+              </a:ext>
+            </a:extLst>
+          </p:cNvPr>
+          <p:cNvSpPr>
+            <a:spLocks noGrp="1"/>
+          </p:cNvSpPr>
+          <p:nvPr>
+            <p:ph idx="1"/>
+          </p:nvPr>
+        </p:nvSpPr>
+        <p:spPr/>
+        <p:txBody>
+          <a:bodyPr/>
+          <a:lstStyle/>
+          <a:p>
+            <a:endParaRPr lang="en-US"/>
+          </a:p>
+        </p:txBody>
+      </p:sp>
+      <p:pic>
+        <p:nvPicPr>
+          <p:cNvPr id="5" name="Picture 4">
+            <a:extLst>
+              <a:ext uri="{FF2B5EF4-FFF2-40B4-BE49-F238E27FC236}">
+                <a16:creationId xmlns:a16="http://schemas.microsoft.com/office/drawing/2014/main" id="{B03782D1-ED34-4780-95D5-EEFC4346B99F}"/>
+              </a:ext>
+            </a:extLst>
+          </p:cNvPr>
+          <p:cNvPicPr>
+            <a:picLocks noChangeAspect="1"/>
+          </p:cNvPicPr>
+          <p:nvPr/>
+        </p:nvPicPr>
+        <p:blipFill>
+          <a:blip r:embed="rId4"/>
+          <a:stretch>
+            <a:fillRect/>
+          </a:stretch>
+        </p:blipFill>
+        <p:spPr>
+          <a:xfrm>
+            <a:off x="0" y="805782"/>
+            <a:ext cx="12192000" cy="5246435"/>
+          </a:xfrm>
+          <a:prstGeom prst="rect">
+            <a:avLst/>
+          </a:prstGeom>
+        </p:spPr>
+      </p:pic>
+    </p:spTree>
+    <p:extLst>
+      <p:ext uri="{BB962C8B-B14F-4D97-AF65-F5344CB8AC3E}">
+        <p14:creationId xmlns:p14="http://schemas.microsoft.com/office/powerpoint/2010/main" val="3233960183"/>
+      </p:ext>
+    </p:extLst>
+  </p:cSld>
+  <p:clrMapOvr>
+    <a:masterClrMapping/>
+  </p:clrMapOvr>
+  <mc:AlternateContent xmlns:mc="http://schemas.openxmlformats.org/markup-compatibility/2006">
+    <mc:Choice xmlns:p14="http://schemas.microsoft.com/office/powerpoint/2010/main" Requires="p14">
+      <p:transition p14:dur="10" advTm="30000">
+        <p:sndAc>
+          <p:stSnd>
+            <p:snd r:embed="rId3" name="click.wav"/>
+          </p:stSnd>
+        </p:sndAc>
+      </p:transition>
+    </mc:Choice>
+    <mc:Fallback>
+      <p:transition advTm="30000">
+        <p:sndAc>
+          <p:stSnd>
+            <p:snd r:embed="rId3" name="click.wav"/>
+          </p:stSnd>
+        </p:sndAc>
+      </p:transition>
+    </mc:Fallback>
+  </mc:AlternateContent>
+</p:sld>
+</file>
+
+<file path=ppt/slides/slide17.xml><?xml version="1.0" encoding="utf-8"?>
+<p:sld xmlns:a="http://schemas.openxmlformats.org/drawingml/2006/main" xmlns:r="http://schemas.openxmlformats.org/officeDocument/2006/relationships" xmlns:p="http://schemas.openxmlformats.org/presentationml/2006/main">
+  <p:cSld>
+    <p:spTree>
+      <p:nvGrpSpPr>
+        <p:cNvPr id="1" name=""/>
+        <p:cNvGrpSpPr/>
+        <p:nvPr/>
+      </p:nvGrpSpPr>
+      <p:grpSpPr>
+        <a:xfrm>
+          <a:off x="0" y="0"/>
+          <a:ext cx="0" cy="0"/>
+          <a:chOff x="0" y="0"/>
+          <a:chExt cx="0" cy="0"/>
+        </a:xfrm>
+      </p:grpSpPr>
+      <p:sp>
+        <p:nvSpPr>
+          <p:cNvPr id="2" name="Title 1">
+            <a:extLst>
+              <a:ext uri="{FF2B5EF4-FFF2-40B4-BE49-F238E27FC236}">
+                <a16:creationId xmlns:a16="http://schemas.microsoft.com/office/drawing/2014/main" id="{3105A310-F6C9-42C5-8659-4F56739BAEC2}"/>
+              </a:ext>
+            </a:extLst>
+          </p:cNvPr>
+          <p:cNvSpPr>
+            <a:spLocks noGrp="1"/>
+          </p:cNvSpPr>
+          <p:nvPr>
+            <p:ph type="title"/>
+          </p:nvPr>
+        </p:nvSpPr>
+        <p:spPr/>
+        <p:txBody>
+          <a:bodyPr/>
+          <a:lstStyle/>
+          <a:p>
+            <a:endParaRPr lang="en-US"/>
+          </a:p>
+        </p:txBody>
+      </p:sp>
+      <p:sp>
+        <p:nvSpPr>
+          <p:cNvPr id="3" name="Content Placeholder 2">
+            <a:extLst>
+              <a:ext uri="{FF2B5EF4-FFF2-40B4-BE49-F238E27FC236}">
+                <a16:creationId xmlns:a16="http://schemas.microsoft.com/office/drawing/2014/main" id="{85071AE1-689D-47F9-8C68-7357761CD9C3}"/>
+              </a:ext>
+            </a:extLst>
+          </p:cNvPr>
+          <p:cNvSpPr>
+            <a:spLocks noGrp="1"/>
+          </p:cNvSpPr>
+          <p:nvPr>
+            <p:ph idx="1"/>
+          </p:nvPr>
+        </p:nvSpPr>
+        <p:spPr/>
+        <p:txBody>
+          <a:bodyPr/>
+          <a:lstStyle/>
+          <a:p>
+            <a:endParaRPr lang="en-US"/>
+          </a:p>
+        </p:txBody>
+      </p:sp>
+      <p:pic>
+        <p:nvPicPr>
+          <p:cNvPr id="4" name="Picture 3">
+            <a:extLst>
+              <a:ext uri="{FF2B5EF4-FFF2-40B4-BE49-F238E27FC236}">
+                <a16:creationId xmlns:a16="http://schemas.microsoft.com/office/drawing/2014/main" id="{5FF3C183-B9D0-440F-83EB-74F8C49FFFBF}"/>
+              </a:ext>
+            </a:extLst>
+          </p:cNvPr>
+          <p:cNvPicPr>
+            <a:picLocks noChangeAspect="1"/>
+          </p:cNvPicPr>
+          <p:nvPr/>
+        </p:nvPicPr>
+        <p:blipFill>
+          <a:blip r:embed="rId4"/>
+          <a:stretch>
+            <a:fillRect/>
+          </a:stretch>
+        </p:blipFill>
+        <p:spPr>
+          <a:xfrm>
+            <a:off x="0" y="2893722"/>
+            <a:ext cx="12192000" cy="1070555"/>
+          </a:xfrm>
+          <a:prstGeom prst="rect">
+            <a:avLst/>
+          </a:prstGeom>
+        </p:spPr>
+      </p:pic>
+    </p:spTree>
+    <p:extLst>
+      <p:ext uri="{BB962C8B-B14F-4D97-AF65-F5344CB8AC3E}">
+        <p14:creationId xmlns:p14="http://schemas.microsoft.com/office/powerpoint/2010/main" val="3056766766"/>
+      </p:ext>
+    </p:extLst>
+  </p:cSld>
+  <p:clrMapOvr>
+    <a:masterClrMapping/>
+  </p:clrMapOvr>
+  <mc:AlternateContent xmlns:mc="http://schemas.openxmlformats.org/markup-compatibility/2006">
+    <mc:Choice xmlns:p14="http://schemas.microsoft.com/office/powerpoint/2010/main" Requires="p14">
+      <p:transition p14:dur="10" advTm="30000">
+        <p:sndAc>
+          <p:stSnd>
+            <p:snd r:embed="rId3" name="click.wav"/>
+          </p:stSnd>
+        </p:sndAc>
+      </p:transition>
+    </mc:Choice>
+    <mc:Fallback>
+      <p:transition advTm="30000">
+        <p:sndAc>
+          <p:stSnd>
+            <p:snd r:embed="rId3" name="click.wav"/>
+          </p:stSnd>
+        </p:sndAc>
+      </p:transition>
+    </mc:Fallback>
+  </mc:AlternateContent>
+</p:sld>
+</file>
+
+<file path=ppt/slides/slide18.xml><?xml version="1.0" encoding="utf-8"?>
+<p:sld xmlns:a="http://schemas.openxmlformats.org/drawingml/2006/main" xmlns:r="http://schemas.openxmlformats.org/officeDocument/2006/relationships" xmlns:p="http://schemas.openxmlformats.org/presentationml/2006/main">
+  <p:cSld>
+    <p:spTree>
+      <p:nvGrpSpPr>
+        <p:cNvPr id="1" name=""/>
+        <p:cNvGrpSpPr/>
+        <p:nvPr/>
+      </p:nvGrpSpPr>
+      <p:grpSpPr>
+        <a:xfrm>
+          <a:off x="0" y="0"/>
+          <a:ext cx="0" cy="0"/>
+          <a:chOff x="0" y="0"/>
+          <a:chExt cx="0" cy="0"/>
+        </a:xfrm>
+      </p:grpSpPr>
+      <p:sp>
+        <p:nvSpPr>
+          <p:cNvPr id="2" name="Title 1">
+            <a:extLst>
+              <a:ext uri="{FF2B5EF4-FFF2-40B4-BE49-F238E27FC236}">
+                <a16:creationId xmlns:a16="http://schemas.microsoft.com/office/drawing/2014/main" id="{3105A310-F6C9-42C5-8659-4F56739BAEC2}"/>
+              </a:ext>
+            </a:extLst>
+          </p:cNvPr>
+          <p:cNvSpPr>
+            <a:spLocks noGrp="1"/>
+          </p:cNvSpPr>
+          <p:nvPr>
+            <p:ph type="title"/>
+          </p:nvPr>
+        </p:nvSpPr>
+        <p:spPr/>
+        <p:txBody>
+          <a:bodyPr/>
+          <a:lstStyle/>
+          <a:p>
+            <a:endParaRPr lang="en-US"/>
+          </a:p>
+        </p:txBody>
+      </p:sp>
+      <p:sp>
+        <p:nvSpPr>
+          <p:cNvPr id="3" name="Content Placeholder 2">
+            <a:extLst>
+              <a:ext uri="{FF2B5EF4-FFF2-40B4-BE49-F238E27FC236}">
+                <a16:creationId xmlns:a16="http://schemas.microsoft.com/office/drawing/2014/main" id="{85071AE1-689D-47F9-8C68-7357761CD9C3}"/>
+              </a:ext>
+            </a:extLst>
+          </p:cNvPr>
+          <p:cNvSpPr>
+            <a:spLocks noGrp="1"/>
+          </p:cNvSpPr>
+          <p:nvPr>
+            <p:ph idx="1"/>
+          </p:nvPr>
+        </p:nvSpPr>
+        <p:spPr/>
+        <p:txBody>
+          <a:bodyPr/>
+          <a:lstStyle/>
+          <a:p>
+            <a:endParaRPr lang="en-US"/>
+          </a:p>
+        </p:txBody>
+      </p:sp>
+      <p:pic>
+        <p:nvPicPr>
+          <p:cNvPr id="5" name="Picture 4">
+            <a:extLst>
+              <a:ext uri="{FF2B5EF4-FFF2-40B4-BE49-F238E27FC236}">
+                <a16:creationId xmlns:a16="http://schemas.microsoft.com/office/drawing/2014/main" id="{B96AFAFD-F79E-4200-92E4-B7087313631C}"/>
+              </a:ext>
+            </a:extLst>
+          </p:cNvPr>
+          <p:cNvPicPr>
+            <a:picLocks noChangeAspect="1"/>
+          </p:cNvPicPr>
+          <p:nvPr/>
+        </p:nvPicPr>
+        <p:blipFill>
+          <a:blip r:embed="rId4"/>
+          <a:stretch>
+            <a:fillRect/>
+          </a:stretch>
+        </p:blipFill>
+        <p:spPr>
+          <a:xfrm>
+            <a:off x="0" y="2796908"/>
+            <a:ext cx="12192000" cy="1264183"/>
+          </a:xfrm>
+          <a:prstGeom prst="rect">
+            <a:avLst/>
+          </a:prstGeom>
+        </p:spPr>
+      </p:pic>
+    </p:spTree>
+    <p:extLst>
+      <p:ext uri="{BB962C8B-B14F-4D97-AF65-F5344CB8AC3E}">
+        <p14:creationId xmlns:p14="http://schemas.microsoft.com/office/powerpoint/2010/main" val="2527137906"/>
+      </p:ext>
+    </p:extLst>
+  </p:cSld>
+  <p:clrMapOvr>
+    <a:masterClrMapping/>
+  </p:clrMapOvr>
+  <mc:AlternateContent xmlns:mc="http://schemas.openxmlformats.org/markup-compatibility/2006">
+    <mc:Choice xmlns:p14="http://schemas.microsoft.com/office/powerpoint/2010/main" Requires="p14">
+      <p:transition p14:dur="10" advTm="30000">
+        <p:sndAc>
+          <p:stSnd>
+            <p:snd r:embed="rId3" name="click.wav"/>
+          </p:stSnd>
+        </p:sndAc>
+      </p:transition>
+    </mc:Choice>
+    <mc:Fallback>
+      <p:transition advTm="30000">
+        <p:sndAc>
+          <p:stSnd>
+            <p:snd r:embed="rId3" name="click.wav"/>
+          </p:stSnd>
+        </p:sndAc>
+      </p:transition>
+    </mc:Fallback>
+  </mc:AlternateContent>
+</p:sld>
+</file>
+
+<file path=ppt/slides/slide19.xml><?xml version="1.0" encoding="utf-8"?>
+<p:sld xmlns:a="http://schemas.openxmlformats.org/drawingml/2006/main" xmlns:r="http://schemas.openxmlformats.org/officeDocument/2006/relationships" xmlns:p="http://schemas.openxmlformats.org/presentationml/2006/main">
+  <p:cSld>
+    <p:spTree>
+      <p:nvGrpSpPr>
+        <p:cNvPr id="1" name=""/>
+        <p:cNvGrpSpPr/>
+        <p:nvPr/>
+      </p:nvGrpSpPr>
+      <p:grpSpPr>
+        <a:xfrm>
+          <a:off x="0" y="0"/>
+          <a:ext cx="0" cy="0"/>
+          <a:chOff x="0" y="0"/>
+          <a:chExt cx="0" cy="0"/>
+        </a:xfrm>
+      </p:grpSpPr>
+      <p:sp>
+        <p:nvSpPr>
+          <p:cNvPr id="2" name="Title 1">
+            <a:extLst>
+              <a:ext uri="{FF2B5EF4-FFF2-40B4-BE49-F238E27FC236}">
+                <a16:creationId xmlns:a16="http://schemas.microsoft.com/office/drawing/2014/main" id="{3105A310-F6C9-42C5-8659-4F56739BAEC2}"/>
+              </a:ext>
+            </a:extLst>
+          </p:cNvPr>
+          <p:cNvSpPr>
+            <a:spLocks noGrp="1"/>
+          </p:cNvSpPr>
+          <p:nvPr>
+            <p:ph type="title"/>
+          </p:nvPr>
+        </p:nvSpPr>
+        <p:spPr/>
+        <p:txBody>
+          <a:bodyPr/>
+          <a:lstStyle/>
+          <a:p>
+            <a:endParaRPr lang="en-US"/>
+          </a:p>
+        </p:txBody>
+      </p:sp>
+      <p:sp>
+        <p:nvSpPr>
+          <p:cNvPr id="3" name="Content Placeholder 2">
+            <a:extLst>
+              <a:ext uri="{FF2B5EF4-FFF2-40B4-BE49-F238E27FC236}">
+                <a16:creationId xmlns:a16="http://schemas.microsoft.com/office/drawing/2014/main" id="{85071AE1-689D-47F9-8C68-7357761CD9C3}"/>
+              </a:ext>
+            </a:extLst>
+          </p:cNvPr>
+          <p:cNvSpPr>
+            <a:spLocks noGrp="1"/>
+          </p:cNvSpPr>
+          <p:nvPr>
+            <p:ph idx="1"/>
+          </p:nvPr>
+        </p:nvSpPr>
+        <p:spPr/>
+        <p:txBody>
+          <a:bodyPr/>
+          <a:lstStyle/>
+          <a:p>
+            <a:endParaRPr lang="en-US"/>
+          </a:p>
+        </p:txBody>
+      </p:sp>
+      <p:pic>
+        <p:nvPicPr>
+          <p:cNvPr id="4" name="Picture 3">
+            <a:extLst>
+              <a:ext uri="{FF2B5EF4-FFF2-40B4-BE49-F238E27FC236}">
+                <a16:creationId xmlns:a16="http://schemas.microsoft.com/office/drawing/2014/main" id="{E07B8271-A87F-4DB4-9412-60F9A6C536A7}"/>
+              </a:ext>
+            </a:extLst>
+          </p:cNvPr>
+          <p:cNvPicPr>
+            <a:picLocks noChangeAspect="1"/>
+          </p:cNvPicPr>
+          <p:nvPr/>
+        </p:nvPicPr>
+        <p:blipFill>
+          <a:blip r:embed="rId4"/>
+          <a:stretch>
+            <a:fillRect/>
+          </a:stretch>
+        </p:blipFill>
+        <p:spPr>
+          <a:xfrm>
+            <a:off x="0" y="881845"/>
+            <a:ext cx="12192000" cy="5094310"/>
+          </a:xfrm>
+          <a:prstGeom prst="rect">
+            <a:avLst/>
+          </a:prstGeom>
+        </p:spPr>
+      </p:pic>
+    </p:spTree>
+    <p:extLst>
+      <p:ext uri="{BB962C8B-B14F-4D97-AF65-F5344CB8AC3E}">
+        <p14:creationId xmlns:p14="http://schemas.microsoft.com/office/powerpoint/2010/main" val="2647378334"/>
+      </p:ext>
+    </p:extLst>
+  </p:cSld>
+  <p:clrMapOvr>
+    <a:masterClrMapping/>
+  </p:clrMapOvr>
+  <mc:AlternateContent xmlns:mc="http://schemas.openxmlformats.org/markup-compatibility/2006">
+    <mc:Choice xmlns:p14="http://schemas.microsoft.com/office/powerpoint/2010/main" Requires="p14">
+      <p:transition p14:dur="10" advTm="30000">
+        <p:sndAc>
+          <p:stSnd>
+            <p:snd r:embed="rId3" name="click.wav"/>
+          </p:stSnd>
+        </p:sndAc>
+      </p:transition>
+    </mc:Choice>
+    <mc:Fallback>
+      <p:transition advTm="30000">
+        <p:sndAc>
+          <p:stSnd>
+            <p:snd r:embed="rId3" name="click.wav"/>
+          </p:stSnd>
+        </p:sndAc>
+      </p:transition>
     </mc:Fallback>
   </mc:AlternateContent>
 </p:sld>
@@ -3960,8 +7475,8 @@
   <p:clrMapOvr>
     <a:masterClrMapping/>
   </p:clrMapOvr>
-  <mc:AlternateContent xmlns:mc="http://schemas.openxmlformats.org/markup-compatibility/2006">
-    <mc:Choice xmlns:p14="http://schemas.microsoft.com/office/powerpoint/2010/main" Requires="p14">
+  <mc:AlternateContent xmlns:mc="http://schemas.openxmlformats.org/markup-compatibility/2006" xmlns:p14="http://schemas.microsoft.com/office/powerpoint/2010/main">
+    <mc:Choice Requires="p14">
       <p:transition p14:dur="10" advTm="30000">
         <p:sndAc>
           <p:stSnd>
@@ -3970,11 +7485,1311 @@
         </p:sndAc>
       </p:transition>
     </mc:Choice>
+    <mc:Fallback xmlns="">
+      <p:transition advTm="30000">
+        <p:sndAc>
+          <p:stSnd>
+            <p:snd r:embed="rId4" name="explode.wav"/>
+          </p:stSnd>
+        </p:sndAc>
+      </p:transition>
+    </mc:Fallback>
+  </mc:AlternateContent>
+</p:sld>
+</file>
+
+<file path=ppt/slides/slide20.xml><?xml version="1.0" encoding="utf-8"?>
+<p:sld xmlns:a="http://schemas.openxmlformats.org/drawingml/2006/main" xmlns:r="http://schemas.openxmlformats.org/officeDocument/2006/relationships" xmlns:p="http://schemas.openxmlformats.org/presentationml/2006/main">
+  <p:cSld>
+    <p:spTree>
+      <p:nvGrpSpPr>
+        <p:cNvPr id="1" name=""/>
+        <p:cNvGrpSpPr/>
+        <p:nvPr/>
+      </p:nvGrpSpPr>
+      <p:grpSpPr>
+        <a:xfrm>
+          <a:off x="0" y="0"/>
+          <a:ext cx="0" cy="0"/>
+          <a:chOff x="0" y="0"/>
+          <a:chExt cx="0" cy="0"/>
+        </a:xfrm>
+      </p:grpSpPr>
+      <p:sp>
+        <p:nvSpPr>
+          <p:cNvPr id="2" name="Title 1">
+            <a:extLst>
+              <a:ext uri="{FF2B5EF4-FFF2-40B4-BE49-F238E27FC236}">
+                <a16:creationId xmlns:a16="http://schemas.microsoft.com/office/drawing/2014/main" id="{3105A310-F6C9-42C5-8659-4F56739BAEC2}"/>
+              </a:ext>
+            </a:extLst>
+          </p:cNvPr>
+          <p:cNvSpPr>
+            <a:spLocks noGrp="1"/>
+          </p:cNvSpPr>
+          <p:nvPr>
+            <p:ph type="title"/>
+          </p:nvPr>
+        </p:nvSpPr>
+        <p:spPr/>
+        <p:txBody>
+          <a:bodyPr/>
+          <a:lstStyle/>
+          <a:p>
+            <a:endParaRPr lang="en-US"/>
+          </a:p>
+        </p:txBody>
+      </p:sp>
+      <p:sp>
+        <p:nvSpPr>
+          <p:cNvPr id="3" name="Content Placeholder 2">
+            <a:extLst>
+              <a:ext uri="{FF2B5EF4-FFF2-40B4-BE49-F238E27FC236}">
+                <a16:creationId xmlns:a16="http://schemas.microsoft.com/office/drawing/2014/main" id="{85071AE1-689D-47F9-8C68-7357761CD9C3}"/>
+              </a:ext>
+            </a:extLst>
+          </p:cNvPr>
+          <p:cNvSpPr>
+            <a:spLocks noGrp="1"/>
+          </p:cNvSpPr>
+          <p:nvPr>
+            <p:ph idx="1"/>
+          </p:nvPr>
+        </p:nvSpPr>
+        <p:spPr/>
+        <p:txBody>
+          <a:bodyPr/>
+          <a:lstStyle/>
+          <a:p>
+            <a:endParaRPr lang="en-US"/>
+          </a:p>
+        </p:txBody>
+      </p:sp>
+      <p:pic>
+        <p:nvPicPr>
+          <p:cNvPr id="5" name="Picture 4">
+            <a:extLst>
+              <a:ext uri="{FF2B5EF4-FFF2-40B4-BE49-F238E27FC236}">
+                <a16:creationId xmlns:a16="http://schemas.microsoft.com/office/drawing/2014/main" id="{DE117C2D-6273-4834-9497-BC8887C7BA1C}"/>
+              </a:ext>
+            </a:extLst>
+          </p:cNvPr>
+          <p:cNvPicPr>
+            <a:picLocks noChangeAspect="1"/>
+          </p:cNvPicPr>
+          <p:nvPr/>
+        </p:nvPicPr>
+        <p:blipFill>
+          <a:blip r:embed="rId4"/>
+          <a:stretch>
+            <a:fillRect/>
+          </a:stretch>
+        </p:blipFill>
+        <p:spPr>
+          <a:xfrm>
+            <a:off x="0" y="2608926"/>
+            <a:ext cx="12192000" cy="1640148"/>
+          </a:xfrm>
+          <a:prstGeom prst="rect">
+            <a:avLst/>
+          </a:prstGeom>
+        </p:spPr>
+      </p:pic>
+    </p:spTree>
+    <p:extLst>
+      <p:ext uri="{BB962C8B-B14F-4D97-AF65-F5344CB8AC3E}">
+        <p14:creationId xmlns:p14="http://schemas.microsoft.com/office/powerpoint/2010/main" val="750011999"/>
+      </p:ext>
+    </p:extLst>
+  </p:cSld>
+  <p:clrMapOvr>
+    <a:masterClrMapping/>
+  </p:clrMapOvr>
+  <mc:AlternateContent xmlns:mc="http://schemas.openxmlformats.org/markup-compatibility/2006">
+    <mc:Choice xmlns:p14="http://schemas.microsoft.com/office/powerpoint/2010/main" Requires="p14">
+      <p:transition p14:dur="10" advTm="30000">
+        <p:sndAc>
+          <p:stSnd>
+            <p:snd r:embed="rId3" name="click.wav"/>
+          </p:stSnd>
+        </p:sndAc>
+      </p:transition>
+    </mc:Choice>
     <mc:Fallback>
       <p:transition advTm="30000">
         <p:sndAc>
           <p:stSnd>
-            <p:snd r:embed="rId2" name="explode.wav"/>
+            <p:snd r:embed="rId3" name="click.wav"/>
+          </p:stSnd>
+        </p:sndAc>
+      </p:transition>
+    </mc:Fallback>
+  </mc:AlternateContent>
+</p:sld>
+</file>
+
+<file path=ppt/slides/slide21.xml><?xml version="1.0" encoding="utf-8"?>
+<p:sld xmlns:a="http://schemas.openxmlformats.org/drawingml/2006/main" xmlns:r="http://schemas.openxmlformats.org/officeDocument/2006/relationships" xmlns:p="http://schemas.openxmlformats.org/presentationml/2006/main">
+  <p:cSld>
+    <p:spTree>
+      <p:nvGrpSpPr>
+        <p:cNvPr id="1" name=""/>
+        <p:cNvGrpSpPr/>
+        <p:nvPr/>
+      </p:nvGrpSpPr>
+      <p:grpSpPr>
+        <a:xfrm>
+          <a:off x="0" y="0"/>
+          <a:ext cx="0" cy="0"/>
+          <a:chOff x="0" y="0"/>
+          <a:chExt cx="0" cy="0"/>
+        </a:xfrm>
+      </p:grpSpPr>
+      <p:sp>
+        <p:nvSpPr>
+          <p:cNvPr id="2" name="Title 1">
+            <a:extLst>
+              <a:ext uri="{FF2B5EF4-FFF2-40B4-BE49-F238E27FC236}">
+                <a16:creationId xmlns:a16="http://schemas.microsoft.com/office/drawing/2014/main" id="{3105A310-F6C9-42C5-8659-4F56739BAEC2}"/>
+              </a:ext>
+            </a:extLst>
+          </p:cNvPr>
+          <p:cNvSpPr>
+            <a:spLocks noGrp="1"/>
+          </p:cNvSpPr>
+          <p:nvPr>
+            <p:ph type="title"/>
+          </p:nvPr>
+        </p:nvSpPr>
+        <p:spPr/>
+        <p:txBody>
+          <a:bodyPr/>
+          <a:lstStyle/>
+          <a:p>
+            <a:endParaRPr lang="en-US"/>
+          </a:p>
+        </p:txBody>
+      </p:sp>
+      <p:sp>
+        <p:nvSpPr>
+          <p:cNvPr id="3" name="Content Placeholder 2">
+            <a:extLst>
+              <a:ext uri="{FF2B5EF4-FFF2-40B4-BE49-F238E27FC236}">
+                <a16:creationId xmlns:a16="http://schemas.microsoft.com/office/drawing/2014/main" id="{85071AE1-689D-47F9-8C68-7357761CD9C3}"/>
+              </a:ext>
+            </a:extLst>
+          </p:cNvPr>
+          <p:cNvSpPr>
+            <a:spLocks noGrp="1"/>
+          </p:cNvSpPr>
+          <p:nvPr>
+            <p:ph idx="1"/>
+          </p:nvPr>
+        </p:nvSpPr>
+        <p:spPr/>
+        <p:txBody>
+          <a:bodyPr/>
+          <a:lstStyle/>
+          <a:p>
+            <a:endParaRPr lang="en-US"/>
+          </a:p>
+        </p:txBody>
+      </p:sp>
+      <p:pic>
+        <p:nvPicPr>
+          <p:cNvPr id="4" name="Picture 3">
+            <a:extLst>
+              <a:ext uri="{FF2B5EF4-FFF2-40B4-BE49-F238E27FC236}">
+                <a16:creationId xmlns:a16="http://schemas.microsoft.com/office/drawing/2014/main" id="{02A0DE96-E64B-4B41-9B63-ABBA100AA632}"/>
+              </a:ext>
+            </a:extLst>
+          </p:cNvPr>
+          <p:cNvPicPr>
+            <a:picLocks noChangeAspect="1"/>
+          </p:cNvPicPr>
+          <p:nvPr/>
+        </p:nvPicPr>
+        <p:blipFill>
+          <a:blip r:embed="rId4"/>
+          <a:stretch>
+            <a:fillRect/>
+          </a:stretch>
+        </p:blipFill>
+        <p:spPr>
+          <a:xfrm>
+            <a:off x="0" y="1267233"/>
+            <a:ext cx="12192000" cy="4323534"/>
+          </a:xfrm>
+          <a:prstGeom prst="rect">
+            <a:avLst/>
+          </a:prstGeom>
+        </p:spPr>
+      </p:pic>
+    </p:spTree>
+    <p:extLst>
+      <p:ext uri="{BB962C8B-B14F-4D97-AF65-F5344CB8AC3E}">
+        <p14:creationId xmlns:p14="http://schemas.microsoft.com/office/powerpoint/2010/main" val="589652450"/>
+      </p:ext>
+    </p:extLst>
+  </p:cSld>
+  <p:clrMapOvr>
+    <a:masterClrMapping/>
+  </p:clrMapOvr>
+  <mc:AlternateContent xmlns:mc="http://schemas.openxmlformats.org/markup-compatibility/2006">
+    <mc:Choice xmlns:p14="http://schemas.microsoft.com/office/powerpoint/2010/main" Requires="p14">
+      <p:transition p14:dur="10" advTm="30000">
+        <p:sndAc>
+          <p:stSnd>
+            <p:snd r:embed="rId3" name="click.wav"/>
+          </p:stSnd>
+        </p:sndAc>
+      </p:transition>
+    </mc:Choice>
+    <mc:Fallback>
+      <p:transition advTm="30000">
+        <p:sndAc>
+          <p:stSnd>
+            <p:snd r:embed="rId3" name="click.wav"/>
+          </p:stSnd>
+        </p:sndAc>
+      </p:transition>
+    </mc:Fallback>
+  </mc:AlternateContent>
+</p:sld>
+</file>
+
+<file path=ppt/slides/slide22.xml><?xml version="1.0" encoding="utf-8"?>
+<p:sld xmlns:a="http://schemas.openxmlformats.org/drawingml/2006/main" xmlns:r="http://schemas.openxmlformats.org/officeDocument/2006/relationships" xmlns:p="http://schemas.openxmlformats.org/presentationml/2006/main">
+  <p:cSld>
+    <p:spTree>
+      <p:nvGrpSpPr>
+        <p:cNvPr id="1" name=""/>
+        <p:cNvGrpSpPr/>
+        <p:nvPr/>
+      </p:nvGrpSpPr>
+      <p:grpSpPr>
+        <a:xfrm>
+          <a:off x="0" y="0"/>
+          <a:ext cx="0" cy="0"/>
+          <a:chOff x="0" y="0"/>
+          <a:chExt cx="0" cy="0"/>
+        </a:xfrm>
+      </p:grpSpPr>
+      <p:sp>
+        <p:nvSpPr>
+          <p:cNvPr id="2" name="Title 1">
+            <a:extLst>
+              <a:ext uri="{FF2B5EF4-FFF2-40B4-BE49-F238E27FC236}">
+                <a16:creationId xmlns:a16="http://schemas.microsoft.com/office/drawing/2014/main" id="{3105A310-F6C9-42C5-8659-4F56739BAEC2}"/>
+              </a:ext>
+            </a:extLst>
+          </p:cNvPr>
+          <p:cNvSpPr>
+            <a:spLocks noGrp="1"/>
+          </p:cNvSpPr>
+          <p:nvPr>
+            <p:ph type="title"/>
+          </p:nvPr>
+        </p:nvSpPr>
+        <p:spPr/>
+        <p:txBody>
+          <a:bodyPr/>
+          <a:lstStyle/>
+          <a:p>
+            <a:endParaRPr lang="en-US"/>
+          </a:p>
+        </p:txBody>
+      </p:sp>
+      <p:sp>
+        <p:nvSpPr>
+          <p:cNvPr id="3" name="Content Placeholder 2">
+            <a:extLst>
+              <a:ext uri="{FF2B5EF4-FFF2-40B4-BE49-F238E27FC236}">
+                <a16:creationId xmlns:a16="http://schemas.microsoft.com/office/drawing/2014/main" id="{85071AE1-689D-47F9-8C68-7357761CD9C3}"/>
+              </a:ext>
+            </a:extLst>
+          </p:cNvPr>
+          <p:cNvSpPr>
+            <a:spLocks noGrp="1"/>
+          </p:cNvSpPr>
+          <p:nvPr>
+            <p:ph idx="1"/>
+          </p:nvPr>
+        </p:nvSpPr>
+        <p:spPr/>
+        <p:txBody>
+          <a:bodyPr/>
+          <a:lstStyle/>
+          <a:p>
+            <a:endParaRPr lang="en-US"/>
+          </a:p>
+        </p:txBody>
+      </p:sp>
+      <p:pic>
+        <p:nvPicPr>
+          <p:cNvPr id="5" name="Picture 4">
+            <a:extLst>
+              <a:ext uri="{FF2B5EF4-FFF2-40B4-BE49-F238E27FC236}">
+                <a16:creationId xmlns:a16="http://schemas.microsoft.com/office/drawing/2014/main" id="{017F9AA1-34BE-4F54-98BD-0C7B8B0FA8EA}"/>
+              </a:ext>
+            </a:extLst>
+          </p:cNvPr>
+          <p:cNvPicPr>
+            <a:picLocks noChangeAspect="1"/>
+          </p:cNvPicPr>
+          <p:nvPr/>
+        </p:nvPicPr>
+        <p:blipFill>
+          <a:blip r:embed="rId4"/>
+          <a:stretch>
+            <a:fillRect/>
+          </a:stretch>
+        </p:blipFill>
+        <p:spPr>
+          <a:xfrm>
+            <a:off x="0" y="2221782"/>
+            <a:ext cx="12192000" cy="2414436"/>
+          </a:xfrm>
+          <a:prstGeom prst="rect">
+            <a:avLst/>
+          </a:prstGeom>
+        </p:spPr>
+      </p:pic>
+    </p:spTree>
+    <p:extLst>
+      <p:ext uri="{BB962C8B-B14F-4D97-AF65-F5344CB8AC3E}">
+        <p14:creationId xmlns:p14="http://schemas.microsoft.com/office/powerpoint/2010/main" val="4094001966"/>
+      </p:ext>
+    </p:extLst>
+  </p:cSld>
+  <p:clrMapOvr>
+    <a:masterClrMapping/>
+  </p:clrMapOvr>
+  <mc:AlternateContent xmlns:mc="http://schemas.openxmlformats.org/markup-compatibility/2006">
+    <mc:Choice xmlns:p14="http://schemas.microsoft.com/office/powerpoint/2010/main" Requires="p14">
+      <p:transition p14:dur="10" advTm="30000">
+        <p:sndAc>
+          <p:stSnd>
+            <p:snd r:embed="rId3" name="click.wav"/>
+          </p:stSnd>
+        </p:sndAc>
+      </p:transition>
+    </mc:Choice>
+    <mc:Fallback>
+      <p:transition advTm="30000">
+        <p:sndAc>
+          <p:stSnd>
+            <p:snd r:embed="rId3" name="click.wav"/>
+          </p:stSnd>
+        </p:sndAc>
+      </p:transition>
+    </mc:Fallback>
+  </mc:AlternateContent>
+</p:sld>
+</file>
+
+<file path=ppt/slides/slide23.xml><?xml version="1.0" encoding="utf-8"?>
+<p:sld xmlns:a="http://schemas.openxmlformats.org/drawingml/2006/main" xmlns:r="http://schemas.openxmlformats.org/officeDocument/2006/relationships" xmlns:p="http://schemas.openxmlformats.org/presentationml/2006/main">
+  <p:cSld>
+    <p:spTree>
+      <p:nvGrpSpPr>
+        <p:cNvPr id="1" name=""/>
+        <p:cNvGrpSpPr/>
+        <p:nvPr/>
+      </p:nvGrpSpPr>
+      <p:grpSpPr>
+        <a:xfrm>
+          <a:off x="0" y="0"/>
+          <a:ext cx="0" cy="0"/>
+          <a:chOff x="0" y="0"/>
+          <a:chExt cx="0" cy="0"/>
+        </a:xfrm>
+      </p:grpSpPr>
+      <p:sp>
+        <p:nvSpPr>
+          <p:cNvPr id="2" name="Title 1">
+            <a:extLst>
+              <a:ext uri="{FF2B5EF4-FFF2-40B4-BE49-F238E27FC236}">
+                <a16:creationId xmlns:a16="http://schemas.microsoft.com/office/drawing/2014/main" id="{3105A310-F6C9-42C5-8659-4F56739BAEC2}"/>
+              </a:ext>
+            </a:extLst>
+          </p:cNvPr>
+          <p:cNvSpPr>
+            <a:spLocks noGrp="1"/>
+          </p:cNvSpPr>
+          <p:nvPr>
+            <p:ph type="title"/>
+          </p:nvPr>
+        </p:nvSpPr>
+        <p:spPr/>
+        <p:txBody>
+          <a:bodyPr/>
+          <a:lstStyle/>
+          <a:p>
+            <a:endParaRPr lang="en-US"/>
+          </a:p>
+        </p:txBody>
+      </p:sp>
+      <p:sp>
+        <p:nvSpPr>
+          <p:cNvPr id="3" name="Content Placeholder 2">
+            <a:extLst>
+              <a:ext uri="{FF2B5EF4-FFF2-40B4-BE49-F238E27FC236}">
+                <a16:creationId xmlns:a16="http://schemas.microsoft.com/office/drawing/2014/main" id="{85071AE1-689D-47F9-8C68-7357761CD9C3}"/>
+              </a:ext>
+            </a:extLst>
+          </p:cNvPr>
+          <p:cNvSpPr>
+            <a:spLocks noGrp="1"/>
+          </p:cNvSpPr>
+          <p:nvPr>
+            <p:ph idx="1"/>
+          </p:nvPr>
+        </p:nvSpPr>
+        <p:spPr/>
+        <p:txBody>
+          <a:bodyPr/>
+          <a:lstStyle/>
+          <a:p>
+            <a:endParaRPr lang="en-US"/>
+          </a:p>
+        </p:txBody>
+      </p:sp>
+      <p:pic>
+        <p:nvPicPr>
+          <p:cNvPr id="4" name="Picture 3">
+            <a:extLst>
+              <a:ext uri="{FF2B5EF4-FFF2-40B4-BE49-F238E27FC236}">
+                <a16:creationId xmlns:a16="http://schemas.microsoft.com/office/drawing/2014/main" id="{D9992F88-19B5-4C46-80C5-1315B1571650}"/>
+              </a:ext>
+            </a:extLst>
+          </p:cNvPr>
+          <p:cNvPicPr>
+            <a:picLocks noChangeAspect="1"/>
+          </p:cNvPicPr>
+          <p:nvPr/>
+        </p:nvPicPr>
+        <p:blipFill>
+          <a:blip r:embed="rId4"/>
+          <a:stretch>
+            <a:fillRect/>
+          </a:stretch>
+        </p:blipFill>
+        <p:spPr>
+          <a:xfrm>
+            <a:off x="0" y="1983592"/>
+            <a:ext cx="12192000" cy="2890816"/>
+          </a:xfrm>
+          <a:prstGeom prst="rect">
+            <a:avLst/>
+          </a:prstGeom>
+        </p:spPr>
+      </p:pic>
+    </p:spTree>
+    <p:extLst>
+      <p:ext uri="{BB962C8B-B14F-4D97-AF65-F5344CB8AC3E}">
+        <p14:creationId xmlns:p14="http://schemas.microsoft.com/office/powerpoint/2010/main" val="219488088"/>
+      </p:ext>
+    </p:extLst>
+  </p:cSld>
+  <p:clrMapOvr>
+    <a:masterClrMapping/>
+  </p:clrMapOvr>
+  <mc:AlternateContent xmlns:mc="http://schemas.openxmlformats.org/markup-compatibility/2006">
+    <mc:Choice xmlns:p14="http://schemas.microsoft.com/office/powerpoint/2010/main" Requires="p14">
+      <p:transition p14:dur="10" advTm="30000">
+        <p:sndAc>
+          <p:stSnd>
+            <p:snd r:embed="rId3" name="click.wav"/>
+          </p:stSnd>
+        </p:sndAc>
+      </p:transition>
+    </mc:Choice>
+    <mc:Fallback>
+      <p:transition advTm="30000">
+        <p:sndAc>
+          <p:stSnd>
+            <p:snd r:embed="rId3" name="click.wav"/>
+          </p:stSnd>
+        </p:sndAc>
+      </p:transition>
+    </mc:Fallback>
+  </mc:AlternateContent>
+</p:sld>
+</file>
+
+<file path=ppt/slides/slide24.xml><?xml version="1.0" encoding="utf-8"?>
+<p:sld xmlns:a="http://schemas.openxmlformats.org/drawingml/2006/main" xmlns:r="http://schemas.openxmlformats.org/officeDocument/2006/relationships" xmlns:p="http://schemas.openxmlformats.org/presentationml/2006/main">
+  <p:cSld>
+    <p:spTree>
+      <p:nvGrpSpPr>
+        <p:cNvPr id="1" name=""/>
+        <p:cNvGrpSpPr/>
+        <p:nvPr/>
+      </p:nvGrpSpPr>
+      <p:grpSpPr>
+        <a:xfrm>
+          <a:off x="0" y="0"/>
+          <a:ext cx="0" cy="0"/>
+          <a:chOff x="0" y="0"/>
+          <a:chExt cx="0" cy="0"/>
+        </a:xfrm>
+      </p:grpSpPr>
+      <p:sp>
+        <p:nvSpPr>
+          <p:cNvPr id="2" name="Title 1">
+            <a:extLst>
+              <a:ext uri="{FF2B5EF4-FFF2-40B4-BE49-F238E27FC236}">
+                <a16:creationId xmlns:a16="http://schemas.microsoft.com/office/drawing/2014/main" id="{3105A310-F6C9-42C5-8659-4F56739BAEC2}"/>
+              </a:ext>
+            </a:extLst>
+          </p:cNvPr>
+          <p:cNvSpPr>
+            <a:spLocks noGrp="1"/>
+          </p:cNvSpPr>
+          <p:nvPr>
+            <p:ph type="title"/>
+          </p:nvPr>
+        </p:nvSpPr>
+        <p:spPr/>
+        <p:txBody>
+          <a:bodyPr/>
+          <a:lstStyle/>
+          <a:p>
+            <a:endParaRPr lang="en-US"/>
+          </a:p>
+        </p:txBody>
+      </p:sp>
+      <p:sp>
+        <p:nvSpPr>
+          <p:cNvPr id="3" name="Content Placeholder 2">
+            <a:extLst>
+              <a:ext uri="{FF2B5EF4-FFF2-40B4-BE49-F238E27FC236}">
+                <a16:creationId xmlns:a16="http://schemas.microsoft.com/office/drawing/2014/main" id="{85071AE1-689D-47F9-8C68-7357761CD9C3}"/>
+              </a:ext>
+            </a:extLst>
+          </p:cNvPr>
+          <p:cNvSpPr>
+            <a:spLocks noGrp="1"/>
+          </p:cNvSpPr>
+          <p:nvPr>
+            <p:ph idx="1"/>
+          </p:nvPr>
+        </p:nvSpPr>
+        <p:spPr/>
+        <p:txBody>
+          <a:bodyPr/>
+          <a:lstStyle/>
+          <a:p>
+            <a:endParaRPr lang="en-US"/>
+          </a:p>
+        </p:txBody>
+      </p:sp>
+      <p:pic>
+        <p:nvPicPr>
+          <p:cNvPr id="5" name="Picture 4">
+            <a:extLst>
+              <a:ext uri="{FF2B5EF4-FFF2-40B4-BE49-F238E27FC236}">
+                <a16:creationId xmlns:a16="http://schemas.microsoft.com/office/drawing/2014/main" id="{9C2852B4-7AB0-4DEC-ADBD-A46CD1F49804}"/>
+              </a:ext>
+            </a:extLst>
+          </p:cNvPr>
+          <p:cNvPicPr>
+            <a:picLocks noChangeAspect="1"/>
+          </p:cNvPicPr>
+          <p:nvPr/>
+        </p:nvPicPr>
+        <p:blipFill>
+          <a:blip r:embed="rId4"/>
+          <a:stretch>
+            <a:fillRect/>
+          </a:stretch>
+        </p:blipFill>
+        <p:spPr>
+          <a:xfrm>
+            <a:off x="0" y="1722614"/>
+            <a:ext cx="12192000" cy="3412771"/>
+          </a:xfrm>
+          <a:prstGeom prst="rect">
+            <a:avLst/>
+          </a:prstGeom>
+        </p:spPr>
+      </p:pic>
+    </p:spTree>
+    <p:extLst>
+      <p:ext uri="{BB962C8B-B14F-4D97-AF65-F5344CB8AC3E}">
+        <p14:creationId xmlns:p14="http://schemas.microsoft.com/office/powerpoint/2010/main" val="2342172516"/>
+      </p:ext>
+    </p:extLst>
+  </p:cSld>
+  <p:clrMapOvr>
+    <a:masterClrMapping/>
+  </p:clrMapOvr>
+  <mc:AlternateContent xmlns:mc="http://schemas.openxmlformats.org/markup-compatibility/2006">
+    <mc:Choice xmlns:p14="http://schemas.microsoft.com/office/powerpoint/2010/main" Requires="p14">
+      <p:transition p14:dur="10" advTm="30000">
+        <p:sndAc>
+          <p:stSnd>
+            <p:snd r:embed="rId3" name="click.wav"/>
+          </p:stSnd>
+        </p:sndAc>
+      </p:transition>
+    </mc:Choice>
+    <mc:Fallback>
+      <p:transition advTm="30000">
+        <p:sndAc>
+          <p:stSnd>
+            <p:snd r:embed="rId3" name="click.wav"/>
+          </p:stSnd>
+        </p:sndAc>
+      </p:transition>
+    </mc:Fallback>
+  </mc:AlternateContent>
+</p:sld>
+</file>
+
+<file path=ppt/slides/slide25.xml><?xml version="1.0" encoding="utf-8"?>
+<p:sld xmlns:a="http://schemas.openxmlformats.org/drawingml/2006/main" xmlns:r="http://schemas.openxmlformats.org/officeDocument/2006/relationships" xmlns:p="http://schemas.openxmlformats.org/presentationml/2006/main">
+  <p:cSld>
+    <p:spTree>
+      <p:nvGrpSpPr>
+        <p:cNvPr id="1" name=""/>
+        <p:cNvGrpSpPr/>
+        <p:nvPr/>
+      </p:nvGrpSpPr>
+      <p:grpSpPr>
+        <a:xfrm>
+          <a:off x="0" y="0"/>
+          <a:ext cx="0" cy="0"/>
+          <a:chOff x="0" y="0"/>
+          <a:chExt cx="0" cy="0"/>
+        </a:xfrm>
+      </p:grpSpPr>
+      <p:sp>
+        <p:nvSpPr>
+          <p:cNvPr id="2" name="Title 1">
+            <a:extLst>
+              <a:ext uri="{FF2B5EF4-FFF2-40B4-BE49-F238E27FC236}">
+                <a16:creationId xmlns:a16="http://schemas.microsoft.com/office/drawing/2014/main" id="{3105A310-F6C9-42C5-8659-4F56739BAEC2}"/>
+              </a:ext>
+            </a:extLst>
+          </p:cNvPr>
+          <p:cNvSpPr>
+            <a:spLocks noGrp="1"/>
+          </p:cNvSpPr>
+          <p:nvPr>
+            <p:ph type="title"/>
+          </p:nvPr>
+        </p:nvSpPr>
+        <p:spPr/>
+        <p:txBody>
+          <a:bodyPr/>
+          <a:lstStyle/>
+          <a:p>
+            <a:endParaRPr lang="en-US"/>
+          </a:p>
+        </p:txBody>
+      </p:sp>
+      <p:sp>
+        <p:nvSpPr>
+          <p:cNvPr id="3" name="Content Placeholder 2">
+            <a:extLst>
+              <a:ext uri="{FF2B5EF4-FFF2-40B4-BE49-F238E27FC236}">
+                <a16:creationId xmlns:a16="http://schemas.microsoft.com/office/drawing/2014/main" id="{85071AE1-689D-47F9-8C68-7357761CD9C3}"/>
+              </a:ext>
+            </a:extLst>
+          </p:cNvPr>
+          <p:cNvSpPr>
+            <a:spLocks noGrp="1"/>
+          </p:cNvSpPr>
+          <p:nvPr>
+            <p:ph idx="1"/>
+          </p:nvPr>
+        </p:nvSpPr>
+        <p:spPr/>
+        <p:txBody>
+          <a:bodyPr/>
+          <a:lstStyle/>
+          <a:p>
+            <a:endParaRPr lang="en-US"/>
+          </a:p>
+        </p:txBody>
+      </p:sp>
+      <p:pic>
+        <p:nvPicPr>
+          <p:cNvPr id="4" name="Picture 3">
+            <a:extLst>
+              <a:ext uri="{FF2B5EF4-FFF2-40B4-BE49-F238E27FC236}">
+                <a16:creationId xmlns:a16="http://schemas.microsoft.com/office/drawing/2014/main" id="{0DDA1828-4696-4D53-B4F8-538CFFB42972}"/>
+              </a:ext>
+            </a:extLst>
+          </p:cNvPr>
+          <p:cNvPicPr>
+            <a:picLocks noChangeAspect="1"/>
+          </p:cNvPicPr>
+          <p:nvPr/>
+        </p:nvPicPr>
+        <p:blipFill>
+          <a:blip r:embed="rId4"/>
+          <a:stretch>
+            <a:fillRect/>
+          </a:stretch>
+        </p:blipFill>
+        <p:spPr>
+          <a:xfrm>
+            <a:off x="0" y="1899376"/>
+            <a:ext cx="12192000" cy="3059247"/>
+          </a:xfrm>
+          <a:prstGeom prst="rect">
+            <a:avLst/>
+          </a:prstGeom>
+        </p:spPr>
+      </p:pic>
+    </p:spTree>
+    <p:extLst>
+      <p:ext uri="{BB962C8B-B14F-4D97-AF65-F5344CB8AC3E}">
+        <p14:creationId xmlns:p14="http://schemas.microsoft.com/office/powerpoint/2010/main" val="293453477"/>
+      </p:ext>
+    </p:extLst>
+  </p:cSld>
+  <p:clrMapOvr>
+    <a:masterClrMapping/>
+  </p:clrMapOvr>
+  <mc:AlternateContent xmlns:mc="http://schemas.openxmlformats.org/markup-compatibility/2006">
+    <mc:Choice xmlns:p14="http://schemas.microsoft.com/office/powerpoint/2010/main" Requires="p14">
+      <p:transition p14:dur="10" advTm="30000">
+        <p:sndAc>
+          <p:stSnd>
+            <p:snd r:embed="rId3" name="click.wav"/>
+          </p:stSnd>
+        </p:sndAc>
+      </p:transition>
+    </mc:Choice>
+    <mc:Fallback>
+      <p:transition advTm="30000">
+        <p:sndAc>
+          <p:stSnd>
+            <p:snd r:embed="rId3" name="click.wav"/>
+          </p:stSnd>
+        </p:sndAc>
+      </p:transition>
+    </mc:Fallback>
+  </mc:AlternateContent>
+</p:sld>
+</file>
+
+<file path=ppt/slides/slide26.xml><?xml version="1.0" encoding="utf-8"?>
+<p:sld xmlns:a="http://schemas.openxmlformats.org/drawingml/2006/main" xmlns:r="http://schemas.openxmlformats.org/officeDocument/2006/relationships" xmlns:p="http://schemas.openxmlformats.org/presentationml/2006/main">
+  <p:cSld>
+    <p:spTree>
+      <p:nvGrpSpPr>
+        <p:cNvPr id="1" name=""/>
+        <p:cNvGrpSpPr/>
+        <p:nvPr/>
+      </p:nvGrpSpPr>
+      <p:grpSpPr>
+        <a:xfrm>
+          <a:off x="0" y="0"/>
+          <a:ext cx="0" cy="0"/>
+          <a:chOff x="0" y="0"/>
+          <a:chExt cx="0" cy="0"/>
+        </a:xfrm>
+      </p:grpSpPr>
+      <p:sp>
+        <p:nvSpPr>
+          <p:cNvPr id="2" name="Title 1">
+            <a:extLst>
+              <a:ext uri="{FF2B5EF4-FFF2-40B4-BE49-F238E27FC236}">
+                <a16:creationId xmlns:a16="http://schemas.microsoft.com/office/drawing/2014/main" id="{3105A310-F6C9-42C5-8659-4F56739BAEC2}"/>
+              </a:ext>
+            </a:extLst>
+          </p:cNvPr>
+          <p:cNvSpPr>
+            <a:spLocks noGrp="1"/>
+          </p:cNvSpPr>
+          <p:nvPr>
+            <p:ph type="title"/>
+          </p:nvPr>
+        </p:nvSpPr>
+        <p:spPr/>
+        <p:txBody>
+          <a:bodyPr/>
+          <a:lstStyle/>
+          <a:p>
+            <a:endParaRPr lang="en-US"/>
+          </a:p>
+        </p:txBody>
+      </p:sp>
+      <p:sp>
+        <p:nvSpPr>
+          <p:cNvPr id="3" name="Content Placeholder 2">
+            <a:extLst>
+              <a:ext uri="{FF2B5EF4-FFF2-40B4-BE49-F238E27FC236}">
+                <a16:creationId xmlns:a16="http://schemas.microsoft.com/office/drawing/2014/main" id="{85071AE1-689D-47F9-8C68-7357761CD9C3}"/>
+              </a:ext>
+            </a:extLst>
+          </p:cNvPr>
+          <p:cNvSpPr>
+            <a:spLocks noGrp="1"/>
+          </p:cNvSpPr>
+          <p:nvPr>
+            <p:ph idx="1"/>
+          </p:nvPr>
+        </p:nvSpPr>
+        <p:spPr/>
+        <p:txBody>
+          <a:bodyPr/>
+          <a:lstStyle/>
+          <a:p>
+            <a:endParaRPr lang="en-US"/>
+          </a:p>
+        </p:txBody>
+      </p:sp>
+      <p:pic>
+        <p:nvPicPr>
+          <p:cNvPr id="5" name="Picture 4">
+            <a:extLst>
+              <a:ext uri="{FF2B5EF4-FFF2-40B4-BE49-F238E27FC236}">
+                <a16:creationId xmlns:a16="http://schemas.microsoft.com/office/drawing/2014/main" id="{8F0544BF-4AC8-48F7-A7FD-54FCADAFA942}"/>
+              </a:ext>
+            </a:extLst>
+          </p:cNvPr>
+          <p:cNvPicPr>
+            <a:picLocks noChangeAspect="1"/>
+          </p:cNvPicPr>
+          <p:nvPr/>
+        </p:nvPicPr>
+        <p:blipFill>
+          <a:blip r:embed="rId4"/>
+          <a:stretch>
+            <a:fillRect/>
+          </a:stretch>
+        </p:blipFill>
+        <p:spPr>
+          <a:xfrm>
+            <a:off x="0" y="2408457"/>
+            <a:ext cx="12192000" cy="2041085"/>
+          </a:xfrm>
+          <a:prstGeom prst="rect">
+            <a:avLst/>
+          </a:prstGeom>
+        </p:spPr>
+      </p:pic>
+    </p:spTree>
+    <p:extLst>
+      <p:ext uri="{BB962C8B-B14F-4D97-AF65-F5344CB8AC3E}">
+        <p14:creationId xmlns:p14="http://schemas.microsoft.com/office/powerpoint/2010/main" val="4136620485"/>
+      </p:ext>
+    </p:extLst>
+  </p:cSld>
+  <p:clrMapOvr>
+    <a:masterClrMapping/>
+  </p:clrMapOvr>
+  <mc:AlternateContent xmlns:mc="http://schemas.openxmlformats.org/markup-compatibility/2006">
+    <mc:Choice xmlns:p14="http://schemas.microsoft.com/office/powerpoint/2010/main" Requires="p14">
+      <p:transition p14:dur="10" advTm="30000">
+        <p:sndAc>
+          <p:stSnd>
+            <p:snd r:embed="rId3" name="click.wav"/>
+          </p:stSnd>
+        </p:sndAc>
+      </p:transition>
+    </mc:Choice>
+    <mc:Fallback>
+      <p:transition advTm="30000">
+        <p:sndAc>
+          <p:stSnd>
+            <p:snd r:embed="rId3" name="click.wav"/>
+          </p:stSnd>
+        </p:sndAc>
+      </p:transition>
+    </mc:Fallback>
+  </mc:AlternateContent>
+</p:sld>
+</file>
+
+<file path=ppt/slides/slide27.xml><?xml version="1.0" encoding="utf-8"?>
+<p:sld xmlns:a="http://schemas.openxmlformats.org/drawingml/2006/main" xmlns:r="http://schemas.openxmlformats.org/officeDocument/2006/relationships" xmlns:p="http://schemas.openxmlformats.org/presentationml/2006/main">
+  <p:cSld>
+    <p:spTree>
+      <p:nvGrpSpPr>
+        <p:cNvPr id="1" name=""/>
+        <p:cNvGrpSpPr/>
+        <p:nvPr/>
+      </p:nvGrpSpPr>
+      <p:grpSpPr>
+        <a:xfrm>
+          <a:off x="0" y="0"/>
+          <a:ext cx="0" cy="0"/>
+          <a:chOff x="0" y="0"/>
+          <a:chExt cx="0" cy="0"/>
+        </a:xfrm>
+      </p:grpSpPr>
+      <p:sp>
+        <p:nvSpPr>
+          <p:cNvPr id="2" name="Title 1">
+            <a:extLst>
+              <a:ext uri="{FF2B5EF4-FFF2-40B4-BE49-F238E27FC236}">
+                <a16:creationId xmlns:a16="http://schemas.microsoft.com/office/drawing/2014/main" id="{3105A310-F6C9-42C5-8659-4F56739BAEC2}"/>
+              </a:ext>
+            </a:extLst>
+          </p:cNvPr>
+          <p:cNvSpPr>
+            <a:spLocks noGrp="1"/>
+          </p:cNvSpPr>
+          <p:nvPr>
+            <p:ph type="title"/>
+          </p:nvPr>
+        </p:nvSpPr>
+        <p:spPr/>
+        <p:txBody>
+          <a:bodyPr/>
+          <a:lstStyle/>
+          <a:p>
+            <a:endParaRPr lang="en-US"/>
+          </a:p>
+        </p:txBody>
+      </p:sp>
+      <p:sp>
+        <p:nvSpPr>
+          <p:cNvPr id="3" name="Content Placeholder 2">
+            <a:extLst>
+              <a:ext uri="{FF2B5EF4-FFF2-40B4-BE49-F238E27FC236}">
+                <a16:creationId xmlns:a16="http://schemas.microsoft.com/office/drawing/2014/main" id="{85071AE1-689D-47F9-8C68-7357761CD9C3}"/>
+              </a:ext>
+            </a:extLst>
+          </p:cNvPr>
+          <p:cNvSpPr>
+            <a:spLocks noGrp="1"/>
+          </p:cNvSpPr>
+          <p:nvPr>
+            <p:ph idx="1"/>
+          </p:nvPr>
+        </p:nvSpPr>
+        <p:spPr/>
+        <p:txBody>
+          <a:bodyPr/>
+          <a:lstStyle/>
+          <a:p>
+            <a:endParaRPr lang="en-US"/>
+          </a:p>
+        </p:txBody>
+      </p:sp>
+      <p:pic>
+        <p:nvPicPr>
+          <p:cNvPr id="4" name="Picture 3">
+            <a:extLst>
+              <a:ext uri="{FF2B5EF4-FFF2-40B4-BE49-F238E27FC236}">
+                <a16:creationId xmlns:a16="http://schemas.microsoft.com/office/drawing/2014/main" id="{770396D1-174A-4D8C-AB98-CC72D1CC012C}"/>
+              </a:ext>
+            </a:extLst>
+          </p:cNvPr>
+          <p:cNvPicPr>
+            <a:picLocks noChangeAspect="1"/>
+          </p:cNvPicPr>
+          <p:nvPr/>
+        </p:nvPicPr>
+        <p:blipFill>
+          <a:blip r:embed="rId4"/>
+          <a:stretch>
+            <a:fillRect/>
+          </a:stretch>
+        </p:blipFill>
+        <p:spPr>
+          <a:xfrm>
+            <a:off x="0" y="2054757"/>
+            <a:ext cx="12192000" cy="2748485"/>
+          </a:xfrm>
+          <a:prstGeom prst="rect">
+            <a:avLst/>
+          </a:prstGeom>
+        </p:spPr>
+      </p:pic>
+    </p:spTree>
+    <p:extLst>
+      <p:ext uri="{BB962C8B-B14F-4D97-AF65-F5344CB8AC3E}">
+        <p14:creationId xmlns:p14="http://schemas.microsoft.com/office/powerpoint/2010/main" val="1091028"/>
+      </p:ext>
+    </p:extLst>
+  </p:cSld>
+  <p:clrMapOvr>
+    <a:masterClrMapping/>
+  </p:clrMapOvr>
+  <mc:AlternateContent xmlns:mc="http://schemas.openxmlformats.org/markup-compatibility/2006">
+    <mc:Choice xmlns:p14="http://schemas.microsoft.com/office/powerpoint/2010/main" Requires="p14">
+      <p:transition p14:dur="10" advTm="30000">
+        <p:sndAc>
+          <p:stSnd>
+            <p:snd r:embed="rId3" name="click.wav"/>
+          </p:stSnd>
+        </p:sndAc>
+      </p:transition>
+    </mc:Choice>
+    <mc:Fallback>
+      <p:transition advTm="30000">
+        <p:sndAc>
+          <p:stSnd>
+            <p:snd r:embed="rId3" name="click.wav"/>
+          </p:stSnd>
+        </p:sndAc>
+      </p:transition>
+    </mc:Fallback>
+  </mc:AlternateContent>
+</p:sld>
+</file>
+
+<file path=ppt/slides/slide28.xml><?xml version="1.0" encoding="utf-8"?>
+<p:sld xmlns:a="http://schemas.openxmlformats.org/drawingml/2006/main" xmlns:r="http://schemas.openxmlformats.org/officeDocument/2006/relationships" xmlns:p="http://schemas.openxmlformats.org/presentationml/2006/main">
+  <p:cSld>
+    <p:spTree>
+      <p:nvGrpSpPr>
+        <p:cNvPr id="1" name=""/>
+        <p:cNvGrpSpPr/>
+        <p:nvPr/>
+      </p:nvGrpSpPr>
+      <p:grpSpPr>
+        <a:xfrm>
+          <a:off x="0" y="0"/>
+          <a:ext cx="0" cy="0"/>
+          <a:chOff x="0" y="0"/>
+          <a:chExt cx="0" cy="0"/>
+        </a:xfrm>
+      </p:grpSpPr>
+      <p:sp>
+        <p:nvSpPr>
+          <p:cNvPr id="2" name="Title 1">
+            <a:extLst>
+              <a:ext uri="{FF2B5EF4-FFF2-40B4-BE49-F238E27FC236}">
+                <a16:creationId xmlns:a16="http://schemas.microsoft.com/office/drawing/2014/main" id="{3105A310-F6C9-42C5-8659-4F56739BAEC2}"/>
+              </a:ext>
+            </a:extLst>
+          </p:cNvPr>
+          <p:cNvSpPr>
+            <a:spLocks noGrp="1"/>
+          </p:cNvSpPr>
+          <p:nvPr>
+            <p:ph type="title"/>
+          </p:nvPr>
+        </p:nvSpPr>
+        <p:spPr/>
+        <p:txBody>
+          <a:bodyPr/>
+          <a:lstStyle/>
+          <a:p>
+            <a:endParaRPr lang="en-US"/>
+          </a:p>
+        </p:txBody>
+      </p:sp>
+      <p:sp>
+        <p:nvSpPr>
+          <p:cNvPr id="3" name="Content Placeholder 2">
+            <a:extLst>
+              <a:ext uri="{FF2B5EF4-FFF2-40B4-BE49-F238E27FC236}">
+                <a16:creationId xmlns:a16="http://schemas.microsoft.com/office/drawing/2014/main" id="{85071AE1-689D-47F9-8C68-7357761CD9C3}"/>
+              </a:ext>
+            </a:extLst>
+          </p:cNvPr>
+          <p:cNvSpPr>
+            <a:spLocks noGrp="1"/>
+          </p:cNvSpPr>
+          <p:nvPr>
+            <p:ph idx="1"/>
+          </p:nvPr>
+        </p:nvSpPr>
+        <p:spPr/>
+        <p:txBody>
+          <a:bodyPr/>
+          <a:lstStyle/>
+          <a:p>
+            <a:endParaRPr lang="en-US"/>
+          </a:p>
+        </p:txBody>
+      </p:sp>
+      <p:pic>
+        <p:nvPicPr>
+          <p:cNvPr id="5" name="Picture 4">
+            <a:extLst>
+              <a:ext uri="{FF2B5EF4-FFF2-40B4-BE49-F238E27FC236}">
+                <a16:creationId xmlns:a16="http://schemas.microsoft.com/office/drawing/2014/main" id="{A021CF7D-4076-429E-A9C8-C0A3B5FB2ED1}"/>
+              </a:ext>
+            </a:extLst>
+          </p:cNvPr>
+          <p:cNvPicPr>
+            <a:picLocks noChangeAspect="1"/>
+          </p:cNvPicPr>
+          <p:nvPr/>
+        </p:nvPicPr>
+        <p:blipFill>
+          <a:blip r:embed="rId4"/>
+          <a:stretch>
+            <a:fillRect/>
+          </a:stretch>
+        </p:blipFill>
+        <p:spPr>
+          <a:xfrm>
+            <a:off x="0" y="2117575"/>
+            <a:ext cx="12192000" cy="2622850"/>
+          </a:xfrm>
+          <a:prstGeom prst="rect">
+            <a:avLst/>
+          </a:prstGeom>
+        </p:spPr>
+      </p:pic>
+    </p:spTree>
+    <p:extLst>
+      <p:ext uri="{BB962C8B-B14F-4D97-AF65-F5344CB8AC3E}">
+        <p14:creationId xmlns:p14="http://schemas.microsoft.com/office/powerpoint/2010/main" val="423791140"/>
+      </p:ext>
+    </p:extLst>
+  </p:cSld>
+  <p:clrMapOvr>
+    <a:masterClrMapping/>
+  </p:clrMapOvr>
+  <mc:AlternateContent xmlns:mc="http://schemas.openxmlformats.org/markup-compatibility/2006">
+    <mc:Choice xmlns:p14="http://schemas.microsoft.com/office/powerpoint/2010/main" Requires="p14">
+      <p:transition p14:dur="10" advTm="30000">
+        <p:sndAc>
+          <p:stSnd>
+            <p:snd r:embed="rId3" name="click.wav"/>
+          </p:stSnd>
+        </p:sndAc>
+      </p:transition>
+    </mc:Choice>
+    <mc:Fallback>
+      <p:transition advTm="30000">
+        <p:sndAc>
+          <p:stSnd>
+            <p:snd r:embed="rId3" name="click.wav"/>
+          </p:stSnd>
+        </p:sndAc>
+      </p:transition>
+    </mc:Fallback>
+  </mc:AlternateContent>
+</p:sld>
+</file>
+
+<file path=ppt/slides/slide29.xml><?xml version="1.0" encoding="utf-8"?>
+<p:sld xmlns:a="http://schemas.openxmlformats.org/drawingml/2006/main" xmlns:r="http://schemas.openxmlformats.org/officeDocument/2006/relationships" xmlns:p="http://schemas.openxmlformats.org/presentationml/2006/main">
+  <p:cSld>
+    <p:spTree>
+      <p:nvGrpSpPr>
+        <p:cNvPr id="1" name=""/>
+        <p:cNvGrpSpPr/>
+        <p:nvPr/>
+      </p:nvGrpSpPr>
+      <p:grpSpPr>
+        <a:xfrm>
+          <a:off x="0" y="0"/>
+          <a:ext cx="0" cy="0"/>
+          <a:chOff x="0" y="0"/>
+          <a:chExt cx="0" cy="0"/>
+        </a:xfrm>
+      </p:grpSpPr>
+      <p:sp>
+        <p:nvSpPr>
+          <p:cNvPr id="2" name="Title 1">
+            <a:extLst>
+              <a:ext uri="{FF2B5EF4-FFF2-40B4-BE49-F238E27FC236}">
+                <a16:creationId xmlns:a16="http://schemas.microsoft.com/office/drawing/2014/main" id="{3105A310-F6C9-42C5-8659-4F56739BAEC2}"/>
+              </a:ext>
+            </a:extLst>
+          </p:cNvPr>
+          <p:cNvSpPr>
+            <a:spLocks noGrp="1"/>
+          </p:cNvSpPr>
+          <p:nvPr>
+            <p:ph type="title"/>
+          </p:nvPr>
+        </p:nvSpPr>
+        <p:spPr/>
+        <p:txBody>
+          <a:bodyPr/>
+          <a:lstStyle/>
+          <a:p>
+            <a:endParaRPr lang="en-US"/>
+          </a:p>
+        </p:txBody>
+      </p:sp>
+      <p:sp>
+        <p:nvSpPr>
+          <p:cNvPr id="3" name="Content Placeholder 2">
+            <a:extLst>
+              <a:ext uri="{FF2B5EF4-FFF2-40B4-BE49-F238E27FC236}">
+                <a16:creationId xmlns:a16="http://schemas.microsoft.com/office/drawing/2014/main" id="{85071AE1-689D-47F9-8C68-7357761CD9C3}"/>
+              </a:ext>
+            </a:extLst>
+          </p:cNvPr>
+          <p:cNvSpPr>
+            <a:spLocks noGrp="1"/>
+          </p:cNvSpPr>
+          <p:nvPr>
+            <p:ph idx="1"/>
+          </p:nvPr>
+        </p:nvSpPr>
+        <p:spPr/>
+        <p:txBody>
+          <a:bodyPr/>
+          <a:lstStyle/>
+          <a:p>
+            <a:endParaRPr lang="en-US"/>
+          </a:p>
+        </p:txBody>
+      </p:sp>
+      <p:pic>
+        <p:nvPicPr>
+          <p:cNvPr id="4" name="Picture 3">
+            <a:extLst>
+              <a:ext uri="{FF2B5EF4-FFF2-40B4-BE49-F238E27FC236}">
+                <a16:creationId xmlns:a16="http://schemas.microsoft.com/office/drawing/2014/main" id="{920ECAC3-35AC-4B63-AC17-1DCDEFF1B251}"/>
+              </a:ext>
+            </a:extLst>
+          </p:cNvPr>
+          <p:cNvPicPr>
+            <a:picLocks noChangeAspect="1"/>
+          </p:cNvPicPr>
+          <p:nvPr/>
+        </p:nvPicPr>
+        <p:blipFill>
+          <a:blip r:embed="rId4"/>
+          <a:stretch>
+            <a:fillRect/>
+          </a:stretch>
+        </p:blipFill>
+        <p:spPr>
+          <a:xfrm>
+            <a:off x="0" y="2997908"/>
+            <a:ext cx="12192000" cy="862183"/>
+          </a:xfrm>
+          <a:prstGeom prst="rect">
+            <a:avLst/>
+          </a:prstGeom>
+        </p:spPr>
+      </p:pic>
+    </p:spTree>
+    <p:extLst>
+      <p:ext uri="{BB962C8B-B14F-4D97-AF65-F5344CB8AC3E}">
+        <p14:creationId xmlns:p14="http://schemas.microsoft.com/office/powerpoint/2010/main" val="41224527"/>
+      </p:ext>
+    </p:extLst>
+  </p:cSld>
+  <p:clrMapOvr>
+    <a:masterClrMapping/>
+  </p:clrMapOvr>
+  <mc:AlternateContent xmlns:mc="http://schemas.openxmlformats.org/markup-compatibility/2006">
+    <mc:Choice xmlns:p14="http://schemas.microsoft.com/office/powerpoint/2010/main" Requires="p14">
+      <p:transition p14:dur="10" advTm="30000">
+        <p:sndAc>
+          <p:stSnd>
+            <p:snd r:embed="rId3" name="click.wav"/>
+          </p:stSnd>
+        </p:sndAc>
+      </p:transition>
+    </mc:Choice>
+    <mc:Fallback>
+      <p:transition advTm="30000">
+        <p:sndAc>
+          <p:stSnd>
+            <p:snd r:embed="rId3" name="click.wav"/>
           </p:stSnd>
         </p:sndAc>
       </p:transition>
@@ -4090,8 +8905,8 @@
   <p:clrMapOvr>
     <a:masterClrMapping/>
   </p:clrMapOvr>
-  <mc:AlternateContent xmlns:mc="http://schemas.openxmlformats.org/markup-compatibility/2006">
-    <mc:Choice xmlns:p14="http://schemas.microsoft.com/office/powerpoint/2010/main" Requires="p14">
+  <mc:AlternateContent xmlns:mc="http://schemas.openxmlformats.org/markup-compatibility/2006" xmlns:p14="http://schemas.microsoft.com/office/powerpoint/2010/main">
+    <mc:Choice Requires="p14">
       <p:transition p14:dur="10" advTm="30000">
         <p:sndAc>
           <p:stSnd>
@@ -4100,11 +8915,271 @@
         </p:sndAc>
       </p:transition>
     </mc:Choice>
+    <mc:Fallback xmlns="">
+      <p:transition advTm="30000">
+        <p:sndAc>
+          <p:stSnd>
+            <p:snd r:embed="rId4" name="click.wav"/>
+          </p:stSnd>
+        </p:sndAc>
+      </p:transition>
+    </mc:Fallback>
+  </mc:AlternateContent>
+</p:sld>
+</file>
+
+<file path=ppt/slides/slide30.xml><?xml version="1.0" encoding="utf-8"?>
+<p:sld xmlns:a="http://schemas.openxmlformats.org/drawingml/2006/main" xmlns:r="http://schemas.openxmlformats.org/officeDocument/2006/relationships" xmlns:p="http://schemas.openxmlformats.org/presentationml/2006/main">
+  <p:cSld>
+    <p:spTree>
+      <p:nvGrpSpPr>
+        <p:cNvPr id="1" name=""/>
+        <p:cNvGrpSpPr/>
+        <p:nvPr/>
+      </p:nvGrpSpPr>
+      <p:grpSpPr>
+        <a:xfrm>
+          <a:off x="0" y="0"/>
+          <a:ext cx="0" cy="0"/>
+          <a:chOff x="0" y="0"/>
+          <a:chExt cx="0" cy="0"/>
+        </a:xfrm>
+      </p:grpSpPr>
+      <p:sp>
+        <p:nvSpPr>
+          <p:cNvPr id="2" name="Title 1">
+            <a:extLst>
+              <a:ext uri="{FF2B5EF4-FFF2-40B4-BE49-F238E27FC236}">
+                <a16:creationId xmlns:a16="http://schemas.microsoft.com/office/drawing/2014/main" id="{3105A310-F6C9-42C5-8659-4F56739BAEC2}"/>
+              </a:ext>
+            </a:extLst>
+          </p:cNvPr>
+          <p:cNvSpPr>
+            <a:spLocks noGrp="1"/>
+          </p:cNvSpPr>
+          <p:nvPr>
+            <p:ph type="title"/>
+          </p:nvPr>
+        </p:nvSpPr>
+        <p:spPr/>
+        <p:txBody>
+          <a:bodyPr/>
+          <a:lstStyle/>
+          <a:p>
+            <a:endParaRPr lang="en-US"/>
+          </a:p>
+        </p:txBody>
+      </p:sp>
+      <p:sp>
+        <p:nvSpPr>
+          <p:cNvPr id="3" name="Content Placeholder 2">
+            <a:extLst>
+              <a:ext uri="{FF2B5EF4-FFF2-40B4-BE49-F238E27FC236}">
+                <a16:creationId xmlns:a16="http://schemas.microsoft.com/office/drawing/2014/main" id="{85071AE1-689D-47F9-8C68-7357761CD9C3}"/>
+              </a:ext>
+            </a:extLst>
+          </p:cNvPr>
+          <p:cNvSpPr>
+            <a:spLocks noGrp="1"/>
+          </p:cNvSpPr>
+          <p:nvPr>
+            <p:ph idx="1"/>
+          </p:nvPr>
+        </p:nvSpPr>
+        <p:spPr/>
+        <p:txBody>
+          <a:bodyPr/>
+          <a:lstStyle/>
+          <a:p>
+            <a:endParaRPr lang="en-US"/>
+          </a:p>
+        </p:txBody>
+      </p:sp>
+      <p:pic>
+        <p:nvPicPr>
+          <p:cNvPr id="5" name="Picture 4">
+            <a:extLst>
+              <a:ext uri="{FF2B5EF4-FFF2-40B4-BE49-F238E27FC236}">
+                <a16:creationId xmlns:a16="http://schemas.microsoft.com/office/drawing/2014/main" id="{BEA53970-EFAF-4332-82C8-F22E5BC2F784}"/>
+              </a:ext>
+            </a:extLst>
+          </p:cNvPr>
+          <p:cNvPicPr>
+            <a:picLocks noChangeAspect="1"/>
+          </p:cNvPicPr>
+          <p:nvPr/>
+        </p:nvPicPr>
+        <p:blipFill>
+          <a:blip r:embed="rId4"/>
+          <a:stretch>
+            <a:fillRect/>
+          </a:stretch>
+        </p:blipFill>
+        <p:spPr>
+          <a:xfrm>
+            <a:off x="0" y="2791448"/>
+            <a:ext cx="12192000" cy="1275104"/>
+          </a:xfrm>
+          <a:prstGeom prst="rect">
+            <a:avLst/>
+          </a:prstGeom>
+        </p:spPr>
+      </p:pic>
+    </p:spTree>
+    <p:extLst>
+      <p:ext uri="{BB962C8B-B14F-4D97-AF65-F5344CB8AC3E}">
+        <p14:creationId xmlns:p14="http://schemas.microsoft.com/office/powerpoint/2010/main" val="1122642562"/>
+      </p:ext>
+    </p:extLst>
+  </p:cSld>
+  <p:clrMapOvr>
+    <a:masterClrMapping/>
+  </p:clrMapOvr>
+  <mc:AlternateContent xmlns:mc="http://schemas.openxmlformats.org/markup-compatibility/2006">
+    <mc:Choice xmlns:p14="http://schemas.microsoft.com/office/powerpoint/2010/main" Requires="p14">
+      <p:transition p14:dur="10" advTm="30000">
+        <p:sndAc>
+          <p:stSnd>
+            <p:snd r:embed="rId3" name="click.wav"/>
+          </p:stSnd>
+        </p:sndAc>
+      </p:transition>
+    </mc:Choice>
     <mc:Fallback>
       <p:transition advTm="30000">
         <p:sndAc>
           <p:stSnd>
-            <p:snd r:embed="rId2" name="click.wav"/>
+            <p:snd r:embed="rId3" name="click.wav"/>
+          </p:stSnd>
+        </p:sndAc>
+      </p:transition>
+    </mc:Fallback>
+  </mc:AlternateContent>
+</p:sld>
+</file>
+
+<file path=ppt/slides/slide31.xml><?xml version="1.0" encoding="utf-8"?>
+<p:sld xmlns:a="http://schemas.openxmlformats.org/drawingml/2006/main" xmlns:r="http://schemas.openxmlformats.org/officeDocument/2006/relationships" xmlns:p="http://schemas.openxmlformats.org/presentationml/2006/main">
+  <p:cSld>
+    <p:spTree>
+      <p:nvGrpSpPr>
+        <p:cNvPr id="1" name=""/>
+        <p:cNvGrpSpPr/>
+        <p:nvPr/>
+      </p:nvGrpSpPr>
+      <p:grpSpPr>
+        <a:xfrm>
+          <a:off x="0" y="0"/>
+          <a:ext cx="0" cy="0"/>
+          <a:chOff x="0" y="0"/>
+          <a:chExt cx="0" cy="0"/>
+        </a:xfrm>
+      </p:grpSpPr>
+      <p:sp>
+        <p:nvSpPr>
+          <p:cNvPr id="2" name="Title 1">
+            <a:extLst>
+              <a:ext uri="{FF2B5EF4-FFF2-40B4-BE49-F238E27FC236}">
+                <a16:creationId xmlns:a16="http://schemas.microsoft.com/office/drawing/2014/main" id="{3105A310-F6C9-42C5-8659-4F56739BAEC2}"/>
+              </a:ext>
+            </a:extLst>
+          </p:cNvPr>
+          <p:cNvSpPr>
+            <a:spLocks noGrp="1"/>
+          </p:cNvSpPr>
+          <p:nvPr>
+            <p:ph type="title"/>
+          </p:nvPr>
+        </p:nvSpPr>
+        <p:spPr/>
+        <p:txBody>
+          <a:bodyPr/>
+          <a:lstStyle/>
+          <a:p>
+            <a:endParaRPr lang="en-US"/>
+          </a:p>
+        </p:txBody>
+      </p:sp>
+      <p:sp>
+        <p:nvSpPr>
+          <p:cNvPr id="3" name="Content Placeholder 2">
+            <a:extLst>
+              <a:ext uri="{FF2B5EF4-FFF2-40B4-BE49-F238E27FC236}">
+                <a16:creationId xmlns:a16="http://schemas.microsoft.com/office/drawing/2014/main" id="{85071AE1-689D-47F9-8C68-7357761CD9C3}"/>
+              </a:ext>
+            </a:extLst>
+          </p:cNvPr>
+          <p:cNvSpPr>
+            <a:spLocks noGrp="1"/>
+          </p:cNvSpPr>
+          <p:nvPr>
+            <p:ph idx="1"/>
+          </p:nvPr>
+        </p:nvSpPr>
+        <p:spPr/>
+        <p:txBody>
+          <a:bodyPr/>
+          <a:lstStyle/>
+          <a:p>
+            <a:endParaRPr lang="en-US"/>
+          </a:p>
+        </p:txBody>
+      </p:sp>
+      <p:pic>
+        <p:nvPicPr>
+          <p:cNvPr id="4" name="Picture 3">
+            <a:extLst>
+              <a:ext uri="{FF2B5EF4-FFF2-40B4-BE49-F238E27FC236}">
+                <a16:creationId xmlns:a16="http://schemas.microsoft.com/office/drawing/2014/main" id="{71BB7BFF-665F-4274-8955-C2C9BF47A935}"/>
+              </a:ext>
+            </a:extLst>
+          </p:cNvPr>
+          <p:cNvPicPr>
+            <a:picLocks noChangeAspect="1"/>
+          </p:cNvPicPr>
+          <p:nvPr/>
+        </p:nvPicPr>
+        <p:blipFill>
+          <a:blip r:embed="rId4"/>
+          <a:stretch>
+            <a:fillRect/>
+          </a:stretch>
+        </p:blipFill>
+        <p:spPr>
+          <a:xfrm>
+            <a:off x="0" y="2731211"/>
+            <a:ext cx="12192000" cy="1395577"/>
+          </a:xfrm>
+          <a:prstGeom prst="rect">
+            <a:avLst/>
+          </a:prstGeom>
+        </p:spPr>
+      </p:pic>
+    </p:spTree>
+    <p:extLst>
+      <p:ext uri="{BB962C8B-B14F-4D97-AF65-F5344CB8AC3E}">
+        <p14:creationId xmlns:p14="http://schemas.microsoft.com/office/powerpoint/2010/main" val="3142733401"/>
+      </p:ext>
+    </p:extLst>
+  </p:cSld>
+  <p:clrMapOvr>
+    <a:masterClrMapping/>
+  </p:clrMapOvr>
+  <mc:AlternateContent xmlns:mc="http://schemas.openxmlformats.org/markup-compatibility/2006">
+    <mc:Choice xmlns:p14="http://schemas.microsoft.com/office/powerpoint/2010/main" Requires="p14">
+      <p:transition p14:dur="10" advTm="30000">
+        <p:sndAc>
+          <p:stSnd>
+            <p:snd r:embed="rId3" name="click.wav"/>
+          </p:stSnd>
+        </p:sndAc>
+      </p:transition>
+    </mc:Choice>
+    <mc:Fallback>
+      <p:transition advTm="30000">
+        <p:sndAc>
+          <p:stSnd>
+            <p:snd r:embed="rId3" name="click.wav"/>
           </p:stSnd>
         </p:sndAc>
       </p:transition>
@@ -4220,8 +9295,8 @@
   <p:clrMapOvr>
     <a:masterClrMapping/>
   </p:clrMapOvr>
-  <mc:AlternateContent xmlns:mc="http://schemas.openxmlformats.org/markup-compatibility/2006">
-    <mc:Choice xmlns:p14="http://schemas.microsoft.com/office/powerpoint/2010/main" Requires="p14">
+  <mc:AlternateContent xmlns:mc="http://schemas.openxmlformats.org/markup-compatibility/2006" xmlns:p14="http://schemas.microsoft.com/office/powerpoint/2010/main">
+    <mc:Choice Requires="p14">
       <p:transition p14:dur="10" advTm="30000">
         <p:sndAc>
           <p:stSnd>
@@ -4230,11 +9305,11 @@
         </p:sndAc>
       </p:transition>
     </mc:Choice>
-    <mc:Fallback>
+    <mc:Fallback xmlns="">
       <p:transition advTm="30000">
         <p:sndAc>
           <p:stSnd>
-            <p:snd r:embed="rId2" name="click.wav"/>
+            <p:snd r:embed="rId4" name="click.wav"/>
           </p:stSnd>
         </p:sndAc>
       </p:transition>
@@ -4344,6 +9419,526 @@
     <p:extLst>
       <p:ext uri="{BB962C8B-B14F-4D97-AF65-F5344CB8AC3E}">
         <p14:creationId xmlns:p14="http://schemas.microsoft.com/office/powerpoint/2010/main" val="3656607987"/>
+      </p:ext>
+    </p:extLst>
+  </p:cSld>
+  <p:clrMapOvr>
+    <a:masterClrMapping/>
+  </p:clrMapOvr>
+  <mc:AlternateContent xmlns:mc="http://schemas.openxmlformats.org/markup-compatibility/2006" xmlns:p14="http://schemas.microsoft.com/office/powerpoint/2010/main">
+    <mc:Choice Requires="p14">
+      <p:transition p14:dur="10" advTm="30000">
+        <p:sndAc>
+          <p:stSnd>
+            <p:snd r:embed="rId3" name="click.wav"/>
+          </p:stSnd>
+        </p:sndAc>
+      </p:transition>
+    </mc:Choice>
+    <mc:Fallback xmlns="">
+      <p:transition advTm="30000">
+        <p:sndAc>
+          <p:stSnd>
+            <p:snd r:embed="rId5" name="click.wav"/>
+          </p:stSnd>
+        </p:sndAc>
+      </p:transition>
+    </mc:Fallback>
+  </mc:AlternateContent>
+</p:sld>
+</file>
+
+<file path=ppt/slides/slide6.xml><?xml version="1.0" encoding="utf-8"?>
+<p:sld xmlns:a="http://schemas.openxmlformats.org/drawingml/2006/main" xmlns:r="http://schemas.openxmlformats.org/officeDocument/2006/relationships" xmlns:p="http://schemas.openxmlformats.org/presentationml/2006/main">
+  <p:cSld>
+    <p:spTree>
+      <p:nvGrpSpPr>
+        <p:cNvPr id="1" name=""/>
+        <p:cNvGrpSpPr/>
+        <p:nvPr/>
+      </p:nvGrpSpPr>
+      <p:grpSpPr>
+        <a:xfrm>
+          <a:off x="0" y="0"/>
+          <a:ext cx="0" cy="0"/>
+          <a:chOff x="0" y="0"/>
+          <a:chExt cx="0" cy="0"/>
+        </a:xfrm>
+      </p:grpSpPr>
+      <p:sp>
+        <p:nvSpPr>
+          <p:cNvPr id="2" name="Title 1">
+            <a:extLst>
+              <a:ext uri="{FF2B5EF4-FFF2-40B4-BE49-F238E27FC236}">
+                <a16:creationId xmlns:a16="http://schemas.microsoft.com/office/drawing/2014/main" id="{3105A310-F6C9-42C5-8659-4F56739BAEC2}"/>
+              </a:ext>
+            </a:extLst>
+          </p:cNvPr>
+          <p:cNvSpPr>
+            <a:spLocks noGrp="1"/>
+          </p:cNvSpPr>
+          <p:nvPr>
+            <p:ph type="title"/>
+          </p:nvPr>
+        </p:nvSpPr>
+        <p:spPr/>
+        <p:txBody>
+          <a:bodyPr/>
+          <a:lstStyle/>
+          <a:p>
+            <a:endParaRPr lang="en-US"/>
+          </a:p>
+        </p:txBody>
+      </p:sp>
+      <p:sp>
+        <p:nvSpPr>
+          <p:cNvPr id="3" name="Content Placeholder 2">
+            <a:extLst>
+              <a:ext uri="{FF2B5EF4-FFF2-40B4-BE49-F238E27FC236}">
+                <a16:creationId xmlns:a16="http://schemas.microsoft.com/office/drawing/2014/main" id="{85071AE1-689D-47F9-8C68-7357761CD9C3}"/>
+              </a:ext>
+            </a:extLst>
+          </p:cNvPr>
+          <p:cNvSpPr>
+            <a:spLocks noGrp="1"/>
+          </p:cNvSpPr>
+          <p:nvPr>
+            <p:ph idx="1"/>
+          </p:nvPr>
+        </p:nvSpPr>
+        <p:spPr/>
+        <p:txBody>
+          <a:bodyPr/>
+          <a:lstStyle/>
+          <a:p>
+            <a:endParaRPr lang="en-US"/>
+          </a:p>
+        </p:txBody>
+      </p:sp>
+      <p:pic>
+        <p:nvPicPr>
+          <p:cNvPr id="5" name="Picture 4">
+            <a:extLst>
+              <a:ext uri="{FF2B5EF4-FFF2-40B4-BE49-F238E27FC236}">
+                <a16:creationId xmlns:a16="http://schemas.microsoft.com/office/drawing/2014/main" id="{1CC1E9ED-584E-453A-A4A5-97CA2BFEA434}"/>
+              </a:ext>
+            </a:extLst>
+          </p:cNvPr>
+          <p:cNvPicPr>
+            <a:picLocks noChangeAspect="1"/>
+          </p:cNvPicPr>
+          <p:nvPr/>
+        </p:nvPicPr>
+        <p:blipFill>
+          <a:blip r:embed="rId4"/>
+          <a:stretch>
+            <a:fillRect/>
+          </a:stretch>
+        </p:blipFill>
+        <p:spPr>
+          <a:xfrm>
+            <a:off x="0" y="2873444"/>
+            <a:ext cx="12192000" cy="1111112"/>
+          </a:xfrm>
+          <a:prstGeom prst="rect">
+            <a:avLst/>
+          </a:prstGeom>
+        </p:spPr>
+      </p:pic>
+    </p:spTree>
+    <p:extLst>
+      <p:ext uri="{BB962C8B-B14F-4D97-AF65-F5344CB8AC3E}">
+        <p14:creationId xmlns:p14="http://schemas.microsoft.com/office/powerpoint/2010/main" val="4105662206"/>
+      </p:ext>
+    </p:extLst>
+  </p:cSld>
+  <p:clrMapOvr>
+    <a:masterClrMapping/>
+  </p:clrMapOvr>
+  <mc:AlternateContent xmlns:mc="http://schemas.openxmlformats.org/markup-compatibility/2006">
+    <mc:Choice xmlns:p14="http://schemas.microsoft.com/office/powerpoint/2010/main" Requires="p14">
+      <p:transition p14:dur="10" advTm="30000">
+        <p:sndAc>
+          <p:stSnd>
+            <p:snd r:embed="rId3" name="click.wav"/>
+          </p:stSnd>
+        </p:sndAc>
+      </p:transition>
+    </mc:Choice>
+    <mc:Fallback>
+      <p:transition advTm="30000">
+        <p:sndAc>
+          <p:stSnd>
+            <p:snd r:embed="rId3" name="click.wav"/>
+          </p:stSnd>
+        </p:sndAc>
+      </p:transition>
+    </mc:Fallback>
+  </mc:AlternateContent>
+</p:sld>
+</file>
+
+<file path=ppt/slides/slide7.xml><?xml version="1.0" encoding="utf-8"?>
+<p:sld xmlns:a="http://schemas.openxmlformats.org/drawingml/2006/main" xmlns:r="http://schemas.openxmlformats.org/officeDocument/2006/relationships" xmlns:p="http://schemas.openxmlformats.org/presentationml/2006/main">
+  <p:cSld>
+    <p:spTree>
+      <p:nvGrpSpPr>
+        <p:cNvPr id="1" name=""/>
+        <p:cNvGrpSpPr/>
+        <p:nvPr/>
+      </p:nvGrpSpPr>
+      <p:grpSpPr>
+        <a:xfrm>
+          <a:off x="0" y="0"/>
+          <a:ext cx="0" cy="0"/>
+          <a:chOff x="0" y="0"/>
+          <a:chExt cx="0" cy="0"/>
+        </a:xfrm>
+      </p:grpSpPr>
+      <p:sp>
+        <p:nvSpPr>
+          <p:cNvPr id="2" name="Title 1">
+            <a:extLst>
+              <a:ext uri="{FF2B5EF4-FFF2-40B4-BE49-F238E27FC236}">
+                <a16:creationId xmlns:a16="http://schemas.microsoft.com/office/drawing/2014/main" id="{3105A310-F6C9-42C5-8659-4F56739BAEC2}"/>
+              </a:ext>
+            </a:extLst>
+          </p:cNvPr>
+          <p:cNvSpPr>
+            <a:spLocks noGrp="1"/>
+          </p:cNvSpPr>
+          <p:nvPr>
+            <p:ph type="title"/>
+          </p:nvPr>
+        </p:nvSpPr>
+        <p:spPr/>
+        <p:txBody>
+          <a:bodyPr/>
+          <a:lstStyle/>
+          <a:p>
+            <a:endParaRPr lang="en-US"/>
+          </a:p>
+        </p:txBody>
+      </p:sp>
+      <p:sp>
+        <p:nvSpPr>
+          <p:cNvPr id="3" name="Content Placeholder 2">
+            <a:extLst>
+              <a:ext uri="{FF2B5EF4-FFF2-40B4-BE49-F238E27FC236}">
+                <a16:creationId xmlns:a16="http://schemas.microsoft.com/office/drawing/2014/main" id="{85071AE1-689D-47F9-8C68-7357761CD9C3}"/>
+              </a:ext>
+            </a:extLst>
+          </p:cNvPr>
+          <p:cNvSpPr>
+            <a:spLocks noGrp="1"/>
+          </p:cNvSpPr>
+          <p:nvPr>
+            <p:ph idx="1"/>
+          </p:nvPr>
+        </p:nvSpPr>
+        <p:spPr/>
+        <p:txBody>
+          <a:bodyPr/>
+          <a:lstStyle/>
+          <a:p>
+            <a:endParaRPr lang="en-US"/>
+          </a:p>
+        </p:txBody>
+      </p:sp>
+      <p:pic>
+        <p:nvPicPr>
+          <p:cNvPr id="4" name="Picture 3">
+            <a:extLst>
+              <a:ext uri="{FF2B5EF4-FFF2-40B4-BE49-F238E27FC236}">
+                <a16:creationId xmlns:a16="http://schemas.microsoft.com/office/drawing/2014/main" id="{25B83B32-2BFA-4A40-9834-F95CB2B1A172}"/>
+              </a:ext>
+            </a:extLst>
+          </p:cNvPr>
+          <p:cNvPicPr>
+            <a:picLocks noChangeAspect="1"/>
+          </p:cNvPicPr>
+          <p:nvPr/>
+        </p:nvPicPr>
+        <p:blipFill>
+          <a:blip r:embed="rId4"/>
+          <a:stretch>
+            <a:fillRect/>
+          </a:stretch>
+        </p:blipFill>
+        <p:spPr>
+          <a:xfrm>
+            <a:off x="0" y="2881127"/>
+            <a:ext cx="12192000" cy="1095746"/>
+          </a:xfrm>
+          <a:prstGeom prst="rect">
+            <a:avLst/>
+          </a:prstGeom>
+        </p:spPr>
+      </p:pic>
+    </p:spTree>
+    <p:extLst>
+      <p:ext uri="{BB962C8B-B14F-4D97-AF65-F5344CB8AC3E}">
+        <p14:creationId xmlns:p14="http://schemas.microsoft.com/office/powerpoint/2010/main" val="1739697289"/>
+      </p:ext>
+    </p:extLst>
+  </p:cSld>
+  <p:clrMapOvr>
+    <a:masterClrMapping/>
+  </p:clrMapOvr>
+  <mc:AlternateContent xmlns:mc="http://schemas.openxmlformats.org/markup-compatibility/2006">
+    <mc:Choice xmlns:p14="http://schemas.microsoft.com/office/powerpoint/2010/main" Requires="p14">
+      <p:transition p14:dur="10" advTm="30000">
+        <p:sndAc>
+          <p:stSnd>
+            <p:snd r:embed="rId3" name="click.wav"/>
+          </p:stSnd>
+        </p:sndAc>
+      </p:transition>
+    </mc:Choice>
+    <mc:Fallback>
+      <p:transition advTm="30000">
+        <p:sndAc>
+          <p:stSnd>
+            <p:snd r:embed="rId3" name="click.wav"/>
+          </p:stSnd>
+        </p:sndAc>
+      </p:transition>
+    </mc:Fallback>
+  </mc:AlternateContent>
+</p:sld>
+</file>
+
+<file path=ppt/slides/slide8.xml><?xml version="1.0" encoding="utf-8"?>
+<p:sld xmlns:a="http://schemas.openxmlformats.org/drawingml/2006/main" xmlns:r="http://schemas.openxmlformats.org/officeDocument/2006/relationships" xmlns:p="http://schemas.openxmlformats.org/presentationml/2006/main">
+  <p:cSld>
+    <p:spTree>
+      <p:nvGrpSpPr>
+        <p:cNvPr id="1" name=""/>
+        <p:cNvGrpSpPr/>
+        <p:nvPr/>
+      </p:nvGrpSpPr>
+      <p:grpSpPr>
+        <a:xfrm>
+          <a:off x="0" y="0"/>
+          <a:ext cx="0" cy="0"/>
+          <a:chOff x="0" y="0"/>
+          <a:chExt cx="0" cy="0"/>
+        </a:xfrm>
+      </p:grpSpPr>
+      <p:sp>
+        <p:nvSpPr>
+          <p:cNvPr id="2" name="Title 1">
+            <a:extLst>
+              <a:ext uri="{FF2B5EF4-FFF2-40B4-BE49-F238E27FC236}">
+                <a16:creationId xmlns:a16="http://schemas.microsoft.com/office/drawing/2014/main" id="{3105A310-F6C9-42C5-8659-4F56739BAEC2}"/>
+              </a:ext>
+            </a:extLst>
+          </p:cNvPr>
+          <p:cNvSpPr>
+            <a:spLocks noGrp="1"/>
+          </p:cNvSpPr>
+          <p:nvPr>
+            <p:ph type="title"/>
+          </p:nvPr>
+        </p:nvSpPr>
+        <p:spPr/>
+        <p:txBody>
+          <a:bodyPr/>
+          <a:lstStyle/>
+          <a:p>
+            <a:endParaRPr lang="en-US"/>
+          </a:p>
+        </p:txBody>
+      </p:sp>
+      <p:sp>
+        <p:nvSpPr>
+          <p:cNvPr id="3" name="Content Placeholder 2">
+            <a:extLst>
+              <a:ext uri="{FF2B5EF4-FFF2-40B4-BE49-F238E27FC236}">
+                <a16:creationId xmlns:a16="http://schemas.microsoft.com/office/drawing/2014/main" id="{85071AE1-689D-47F9-8C68-7357761CD9C3}"/>
+              </a:ext>
+            </a:extLst>
+          </p:cNvPr>
+          <p:cNvSpPr>
+            <a:spLocks noGrp="1"/>
+          </p:cNvSpPr>
+          <p:nvPr>
+            <p:ph idx="1"/>
+          </p:nvPr>
+        </p:nvSpPr>
+        <p:spPr/>
+        <p:txBody>
+          <a:bodyPr/>
+          <a:lstStyle/>
+          <a:p>
+            <a:endParaRPr lang="en-US"/>
+          </a:p>
+        </p:txBody>
+      </p:sp>
+      <p:pic>
+        <p:nvPicPr>
+          <p:cNvPr id="5" name="Picture 4">
+            <a:extLst>
+              <a:ext uri="{FF2B5EF4-FFF2-40B4-BE49-F238E27FC236}">
+                <a16:creationId xmlns:a16="http://schemas.microsoft.com/office/drawing/2014/main" id="{6679DB77-2AC4-4A5C-9E2D-E27027474A88}"/>
+              </a:ext>
+            </a:extLst>
+          </p:cNvPr>
+          <p:cNvPicPr>
+            <a:picLocks noChangeAspect="1"/>
+          </p:cNvPicPr>
+          <p:nvPr/>
+        </p:nvPicPr>
+        <p:blipFill>
+          <a:blip r:embed="rId4"/>
+          <a:stretch>
+            <a:fillRect/>
+          </a:stretch>
+        </p:blipFill>
+        <p:spPr>
+          <a:xfrm>
+            <a:off x="0" y="2421285"/>
+            <a:ext cx="12192000" cy="2015430"/>
+          </a:xfrm>
+          <a:prstGeom prst="rect">
+            <a:avLst/>
+          </a:prstGeom>
+        </p:spPr>
+      </p:pic>
+    </p:spTree>
+    <p:extLst>
+      <p:ext uri="{BB962C8B-B14F-4D97-AF65-F5344CB8AC3E}">
+        <p14:creationId xmlns:p14="http://schemas.microsoft.com/office/powerpoint/2010/main" val="3824830002"/>
+      </p:ext>
+    </p:extLst>
+  </p:cSld>
+  <p:clrMapOvr>
+    <a:masterClrMapping/>
+  </p:clrMapOvr>
+  <mc:AlternateContent xmlns:mc="http://schemas.openxmlformats.org/markup-compatibility/2006">
+    <mc:Choice xmlns:p14="http://schemas.microsoft.com/office/powerpoint/2010/main" Requires="p14">
+      <p:transition p14:dur="10" advTm="30000">
+        <p:sndAc>
+          <p:stSnd>
+            <p:snd r:embed="rId3" name="click.wav"/>
+          </p:stSnd>
+        </p:sndAc>
+      </p:transition>
+    </mc:Choice>
+    <mc:Fallback>
+      <p:transition advTm="30000">
+        <p:sndAc>
+          <p:stSnd>
+            <p:snd r:embed="rId3" name="click.wav"/>
+          </p:stSnd>
+        </p:sndAc>
+      </p:transition>
+    </mc:Fallback>
+  </mc:AlternateContent>
+</p:sld>
+</file>
+
+<file path=ppt/slides/slide9.xml><?xml version="1.0" encoding="utf-8"?>
+<p:sld xmlns:a="http://schemas.openxmlformats.org/drawingml/2006/main" xmlns:r="http://schemas.openxmlformats.org/officeDocument/2006/relationships" xmlns:p="http://schemas.openxmlformats.org/presentationml/2006/main">
+  <p:cSld>
+    <p:spTree>
+      <p:nvGrpSpPr>
+        <p:cNvPr id="1" name=""/>
+        <p:cNvGrpSpPr/>
+        <p:nvPr/>
+      </p:nvGrpSpPr>
+      <p:grpSpPr>
+        <a:xfrm>
+          <a:off x="0" y="0"/>
+          <a:ext cx="0" cy="0"/>
+          <a:chOff x="0" y="0"/>
+          <a:chExt cx="0" cy="0"/>
+        </a:xfrm>
+      </p:grpSpPr>
+      <p:sp>
+        <p:nvSpPr>
+          <p:cNvPr id="2" name="Title 1">
+            <a:extLst>
+              <a:ext uri="{FF2B5EF4-FFF2-40B4-BE49-F238E27FC236}">
+                <a16:creationId xmlns:a16="http://schemas.microsoft.com/office/drawing/2014/main" id="{3105A310-F6C9-42C5-8659-4F56739BAEC2}"/>
+              </a:ext>
+            </a:extLst>
+          </p:cNvPr>
+          <p:cNvSpPr>
+            <a:spLocks noGrp="1"/>
+          </p:cNvSpPr>
+          <p:nvPr>
+            <p:ph type="title"/>
+          </p:nvPr>
+        </p:nvSpPr>
+        <p:spPr/>
+        <p:txBody>
+          <a:bodyPr/>
+          <a:lstStyle/>
+          <a:p>
+            <a:endParaRPr lang="en-US"/>
+          </a:p>
+        </p:txBody>
+      </p:sp>
+      <p:sp>
+        <p:nvSpPr>
+          <p:cNvPr id="3" name="Content Placeholder 2">
+            <a:extLst>
+              <a:ext uri="{FF2B5EF4-FFF2-40B4-BE49-F238E27FC236}">
+                <a16:creationId xmlns:a16="http://schemas.microsoft.com/office/drawing/2014/main" id="{85071AE1-689D-47F9-8C68-7357761CD9C3}"/>
+              </a:ext>
+            </a:extLst>
+          </p:cNvPr>
+          <p:cNvSpPr>
+            <a:spLocks noGrp="1"/>
+          </p:cNvSpPr>
+          <p:nvPr>
+            <p:ph idx="1"/>
+          </p:nvPr>
+        </p:nvSpPr>
+        <p:spPr/>
+        <p:txBody>
+          <a:bodyPr/>
+          <a:lstStyle/>
+          <a:p>
+            <a:endParaRPr lang="en-US"/>
+          </a:p>
+        </p:txBody>
+      </p:sp>
+      <p:pic>
+        <p:nvPicPr>
+          <p:cNvPr id="4" name="Picture 3">
+            <a:extLst>
+              <a:ext uri="{FF2B5EF4-FFF2-40B4-BE49-F238E27FC236}">
+                <a16:creationId xmlns:a16="http://schemas.microsoft.com/office/drawing/2014/main" id="{9680F99D-5F59-4E7D-96C5-DF9E2D457D60}"/>
+              </a:ext>
+            </a:extLst>
+          </p:cNvPr>
+          <p:cNvPicPr>
+            <a:picLocks noChangeAspect="1"/>
+          </p:cNvPicPr>
+          <p:nvPr/>
+        </p:nvPicPr>
+        <p:blipFill>
+          <a:blip r:embed="rId4"/>
+          <a:stretch>
+            <a:fillRect/>
+          </a:stretch>
+        </p:blipFill>
+        <p:spPr>
+          <a:xfrm>
+            <a:off x="0" y="1454557"/>
+            <a:ext cx="12192000" cy="3948886"/>
+          </a:xfrm>
+          <a:prstGeom prst="rect">
+            <a:avLst/>
+          </a:prstGeom>
+        </p:spPr>
+      </p:pic>
+    </p:spTree>
+    <p:extLst>
+      <p:ext uri="{BB962C8B-B14F-4D97-AF65-F5344CB8AC3E}">
+        <p14:creationId xmlns:p14="http://schemas.microsoft.com/office/powerpoint/2010/main" val="1258878255"/>
       </p:ext>
     </p:extLst>
   </p:cSld>
